--- a/workflows-multi-agent-microsoft-agent-workflow-mvp-conf-sorocaba.pptx
+++ b/workflows-multi-agent-microsoft-agent-workflow-mvp-conf-sorocaba.pptx
@@ -8098,7 +8098,7 @@
                 <a:ea typeface="Arial"/>
                 <a:cs typeface="Arial"/>
               </a:rPr>
-              <a:t>CTO</a:t>
+              <a:t>Role</a:t>
             </a:r>
             <a:endParaRPr sz="1200" b="1" dirty="0">
               <a:solidFill>
@@ -8193,6 +8193,29 @@
                 <a:cs typeface="Arial"/>
               </a:rPr>
               <a:t> IT</a:t>
+            </a:r>
+          </a:p>
+          <a:p>
+            <a:pPr algn="l">
+              <a:defRPr sz="975" b="0">
+                <a:solidFill>
+                  <a:srgbClr val="111111"/>
+                </a:solidFill>
+                <a:latin typeface="Arial"/>
+                <a:ea typeface="Arial"/>
+                <a:cs typeface="Arial"/>
+              </a:defRPr>
+            </a:pPr>
+            <a:r>
+              <a:rPr lang="pt-BR" sz="975" dirty="0">
+                <a:solidFill>
+                  <a:srgbClr val="111111"/>
+                </a:solidFill>
+                <a:latin typeface="Arial"/>
+                <a:ea typeface="Arial"/>
+                <a:cs typeface="Arial"/>
+              </a:rPr>
+              <a:t>Jundiaí - SP</a:t>
             </a:r>
             <a:endParaRPr sz="975" b="0" dirty="0">
               <a:solidFill>

--- a/workflows-multi-agent-microsoft-agent-workflow-mvp-conf-sorocaba.pptx
+++ b/workflows-multi-agent-microsoft-agent-workflow-mvp-conf-sorocaba.pptx
@@ -5,7 +5,7 @@
     <p:sldMasterId id="2147483648" r:id="rId1"/>
   </p:sldMasterIdLst>
   <p:notesMasterIdLst>
-    <p:notesMasterId r:id="rId17"/>
+    <p:notesMasterId r:id="rId18"/>
   </p:notesMasterIdLst>
   <p:sldIdLst>
     <p:sldId id="256" r:id="rId2"/>
@@ -22,7 +22,8 @@
     <p:sldId id="267" r:id="rId13"/>
     <p:sldId id="269" r:id="rId14"/>
     <p:sldId id="270" r:id="rId15"/>
-    <p:sldId id="271" r:id="rId16"/>
+    <p:sldId id="272" r:id="rId16"/>
+    <p:sldId id="271" r:id="rId17"/>
   </p:sldIdLst>
   <p:sldSz cx="9144000" cy="5143500" type="screen16x9"/>
   <p:notesSz cx="6858000" cy="9144000"/>
@@ -755,6 +756,110 @@
   <p:cSld>
     <p:spTree>
       <p:nvGrpSpPr>
+        <p:cNvPr id="1" name="">
+          <a:extLst>
+            <a:ext uri="{FF2B5EF4-FFF2-40B4-BE49-F238E27FC236}">
+              <a16:creationId xmlns:a16="http://schemas.microsoft.com/office/drawing/2014/main" id="{BB83B5BD-99E8-581E-9E23-B8C34E8A1646}"/>
+            </a:ext>
+          </a:extLst>
+        </p:cNvPr>
+        <p:cNvGrpSpPr/>
+        <p:nvPr/>
+      </p:nvGrpSpPr>
+      <p:grpSpPr>
+        <a:xfrm>
+          <a:off x="0" y="0"/>
+          <a:ext cx="0" cy="0"/>
+          <a:chOff x="0" y="0"/>
+          <a:chExt cx="0" cy="0"/>
+        </a:xfrm>
+      </p:grpSpPr>
+      <p:sp>
+        <p:nvSpPr>
+          <p:cNvPr id="2" name="Slide Image Placeholder 1">
+            <a:extLst>
+              <a:ext uri="{FF2B5EF4-FFF2-40B4-BE49-F238E27FC236}">
+                <a16:creationId xmlns:a16="http://schemas.microsoft.com/office/drawing/2014/main" id="{4B4A47D5-F26B-DB0D-2976-503A56579A99}"/>
+              </a:ext>
+            </a:extLst>
+          </p:cNvPr>
+          <p:cNvSpPr>
+            <a:spLocks noGrp="1" noRot="1" noChangeAspect="1"/>
+          </p:cNvSpPr>
+          <p:nvPr>
+            <p:ph type="sldImg"/>
+          </p:nvPr>
+        </p:nvSpPr>
+        <p:spPr/>
+      </p:sp>
+      <p:sp>
+        <p:nvSpPr>
+          <p:cNvPr id="3" name="Notes Placeholder 2">
+            <a:extLst>
+              <a:ext uri="{FF2B5EF4-FFF2-40B4-BE49-F238E27FC236}">
+                <a16:creationId xmlns:a16="http://schemas.microsoft.com/office/drawing/2014/main" id="{4813F646-B6C7-56E5-85C0-82C95F579055}"/>
+              </a:ext>
+            </a:extLst>
+          </p:cNvPr>
+          <p:cNvSpPr>
+            <a:spLocks noGrp="1"/>
+          </p:cNvSpPr>
+          <p:nvPr>
+            <p:ph type="body" idx="1"/>
+          </p:nvPr>
+        </p:nvSpPr>
+        <p:spPr/>
+        <p:txBody>
+          <a:bodyPr/>
+          <a:lstStyle/>
+          <a:p>
+            <a:endParaRPr/>
+          </a:p>
+        </p:txBody>
+      </p:sp>
+      <p:sp>
+        <p:nvSpPr>
+          <p:cNvPr id="4" name="Slide Number Placeholder 3">
+            <a:extLst>
+              <a:ext uri="{FF2B5EF4-FFF2-40B4-BE49-F238E27FC236}">
+                <a16:creationId xmlns:a16="http://schemas.microsoft.com/office/drawing/2014/main" id="{A2C6DC0A-CB19-01EB-CF74-560FF6A87C52}"/>
+              </a:ext>
+            </a:extLst>
+          </p:cNvPr>
+          <p:cNvSpPr>
+            <a:spLocks noGrp="1"/>
+          </p:cNvSpPr>
+          <p:nvPr>
+            <p:ph type="sldNum" idx="5"/>
+          </p:nvPr>
+        </p:nvSpPr>
+        <p:spPr/>
+        <p:txBody>
+          <a:bodyPr/>
+          <a:lstStyle/>
+          <a:p>
+            <a:endParaRPr/>
+          </a:p>
+        </p:txBody>
+      </p:sp>
+    </p:spTree>
+    <p:extLst>
+      <p:ext uri="{BB962C8B-B14F-4D97-AF65-F5344CB8AC3E}">
+        <p14:creationId xmlns:p14="http://schemas.microsoft.com/office/powerpoint/2010/main" val="966792283"/>
+      </p:ext>
+    </p:extLst>
+  </p:cSld>
+  <p:clrMapOvr>
+    <a:masterClrMapping/>
+  </p:clrMapOvr>
+</p:notes>
+</file>
+
+<file path=ppt/notesSlides/notesSlide16.xml><?xml version="1.0" encoding="utf-8"?>
+<p:notes xmlns:a="http://schemas.openxmlformats.org/drawingml/2006/main" xmlns:r="http://schemas.openxmlformats.org/officeDocument/2006/relationships" xmlns:p="http://schemas.openxmlformats.org/presentationml/2006/main">
+  <p:cSld>
+    <p:spTree>
+      <p:nvGrpSpPr>
         <p:cNvPr id="1" name=""/>
         <p:cNvGrpSpPr/>
         <p:nvPr/>
@@ -6779,7 +6884,7 @@
         </p:blipFill>
         <p:spPr>
           <a:xfrm>
-            <a:off x="3124200" y="2628900"/>
+            <a:off x="3124200" y="2754630"/>
             <a:ext cx="1905000" cy="1905000"/>
           </a:xfrm>
           <a:prstGeom prst="rect">
@@ -6801,6 +6906,401 @@
 </file>
 
 <file path=ppt/slides/slide15.xml><?xml version="1.0" encoding="utf-8"?>
+<p:sld xmlns:a="http://schemas.openxmlformats.org/drawingml/2006/main" xmlns:r="http://schemas.openxmlformats.org/officeDocument/2006/relationships" xmlns:p="http://schemas.openxmlformats.org/presentationml/2006/main">
+  <p:cSld>
+    <p:spTree>
+      <p:nvGrpSpPr>
+        <p:cNvPr id="1" name="">
+          <a:extLst>
+            <a:ext uri="{FF2B5EF4-FFF2-40B4-BE49-F238E27FC236}">
+              <a16:creationId xmlns:a16="http://schemas.microsoft.com/office/drawing/2014/main" id="{EE4F9A1C-5213-39BF-E5B7-35F330CE1917}"/>
+            </a:ext>
+          </a:extLst>
+        </p:cNvPr>
+        <p:cNvGrpSpPr/>
+        <p:nvPr/>
+      </p:nvGrpSpPr>
+      <p:grpSpPr>
+        <a:xfrm>
+          <a:off x="0" y="0"/>
+          <a:ext cx="0" cy="0"/>
+          <a:chOff x="0" y="0"/>
+          <a:chExt cx="0" cy="0"/>
+        </a:xfrm>
+      </p:grpSpPr>
+      <p:pic>
+        <p:nvPicPr>
+          <p:cNvPr id="10" name="Image 0">
+            <a:extLst>
+              <a:ext uri="{FF2B5EF4-FFF2-40B4-BE49-F238E27FC236}">
+                <a16:creationId xmlns:a16="http://schemas.microsoft.com/office/drawing/2014/main" id="{3EA1D4B5-0437-2B9D-8C2D-9A5F27508B0E}"/>
+              </a:ext>
+            </a:extLst>
+          </p:cNvPr>
+          <p:cNvPicPr>
+            <a:picLocks noChangeAspect="1"/>
+          </p:cNvPicPr>
+          <p:nvPr/>
+        </p:nvPicPr>
+        <p:blipFill>
+          <a:blip r:embed="rId3"/>
+          <a:stretch>
+            <a:fillRect/>
+          </a:stretch>
+        </p:blipFill>
+        <p:spPr>
+          <a:xfrm>
+            <a:off x="0" y="182880"/>
+            <a:ext cx="9144000" cy="5143500"/>
+          </a:xfrm>
+          <a:prstGeom prst="rect">
+            <a:avLst/>
+          </a:prstGeom>
+        </p:spPr>
+      </p:pic>
+      <p:sp>
+        <p:nvSpPr>
+          <p:cNvPr id="3" name="Rectangle 2">
+            <a:extLst>
+              <a:ext uri="{FF2B5EF4-FFF2-40B4-BE49-F238E27FC236}">
+                <a16:creationId xmlns:a16="http://schemas.microsoft.com/office/drawing/2014/main" id="{839E1243-FF3C-ACBC-B0FB-641433894553}"/>
+              </a:ext>
+            </a:extLst>
+          </p:cNvPr>
+          <p:cNvSpPr>
+            <a:spLocks noGrp="1"/>
+          </p:cNvSpPr>
+          <p:nvPr/>
+        </p:nvSpPr>
+        <p:spPr>
+          <a:xfrm>
+            <a:off x="457200" y="666750"/>
+            <a:ext cx="5334000" cy="685800"/>
+          </a:xfrm>
+          <a:prstGeom prst="rect">
+            <a:avLst/>
+          </a:prstGeom>
+          <a:solidFill>
+            <a:srgbClr val="000000">
+              <a:alpha val="0"/>
+            </a:srgbClr>
+          </a:solidFill>
+          <a:ln w="0">
+            <a:solidFill>
+              <a:srgbClr val="000000">
+                <a:alpha val="0"/>
+              </a:srgbClr>
+            </a:solidFill>
+            <a:prstDash val="solid"/>
+          </a:ln>
+        </p:spPr>
+        <p:txBody>
+          <a:bodyPr lIns="0" tIns="0" rIns="0" bIns="0" anchor="t"/>
+          <a:lstStyle/>
+          <a:p>
+            <a:pPr algn="l">
+              <a:defRPr sz="2625" b="1">
+                <a:solidFill>
+                  <a:srgbClr val="111111"/>
+                </a:solidFill>
+                <a:latin typeface="Arial"/>
+                <a:ea typeface="Arial"/>
+                <a:cs typeface="Arial"/>
+              </a:defRPr>
+            </a:pPr>
+            <a:r>
+              <a:rPr lang="pt-BR" sz="2625" b="1" dirty="0">
+                <a:solidFill>
+                  <a:srgbClr val="111111"/>
+                </a:solidFill>
+                <a:latin typeface="Arial"/>
+                <a:ea typeface="Arial"/>
+                <a:cs typeface="Arial"/>
+              </a:rPr>
+              <a:t>Mais sobre o MAF</a:t>
+            </a:r>
+            <a:endParaRPr sz="2625" b="1" dirty="0">
+              <a:solidFill>
+                <a:srgbClr val="111111"/>
+              </a:solidFill>
+              <a:latin typeface="Arial"/>
+              <a:ea typeface="Arial"/>
+              <a:cs typeface="Arial"/>
+            </a:endParaRPr>
+          </a:p>
+        </p:txBody>
+      </p:sp>
+      <p:sp>
+        <p:nvSpPr>
+          <p:cNvPr id="4" name="Rectangle 3">
+            <a:extLst>
+              <a:ext uri="{FF2B5EF4-FFF2-40B4-BE49-F238E27FC236}">
+                <a16:creationId xmlns:a16="http://schemas.microsoft.com/office/drawing/2014/main" id="{D472C27F-1B49-B4E5-DC0F-E3EC3833FC0D}"/>
+              </a:ext>
+            </a:extLst>
+          </p:cNvPr>
+          <p:cNvSpPr>
+            <a:spLocks noGrp="1"/>
+          </p:cNvSpPr>
+          <p:nvPr/>
+        </p:nvSpPr>
+        <p:spPr>
+          <a:xfrm>
+            <a:off x="457200" y="1371600"/>
+            <a:ext cx="800100" cy="66675"/>
+          </a:xfrm>
+          <a:prstGeom prst="rect">
+            <a:avLst/>
+          </a:prstGeom>
+          <a:solidFill>
+            <a:srgbClr val="08B8C8"/>
+          </a:solidFill>
+          <a:ln w="0">
+            <a:solidFill>
+              <a:srgbClr val="000000">
+                <a:alpha val="0"/>
+              </a:srgbClr>
+            </a:solidFill>
+            <a:prstDash val="solid"/>
+          </a:ln>
+        </p:spPr>
+      </p:sp>
+      <p:sp>
+        <p:nvSpPr>
+          <p:cNvPr id="5" name="Rectangle 4">
+            <a:extLst>
+              <a:ext uri="{FF2B5EF4-FFF2-40B4-BE49-F238E27FC236}">
+                <a16:creationId xmlns:a16="http://schemas.microsoft.com/office/drawing/2014/main" id="{D633DC24-CE32-E5AA-0680-31430A86BC08}"/>
+              </a:ext>
+            </a:extLst>
+          </p:cNvPr>
+          <p:cNvSpPr>
+            <a:spLocks noGrp="1"/>
+          </p:cNvSpPr>
+          <p:nvPr/>
+        </p:nvSpPr>
+        <p:spPr>
+          <a:xfrm>
+            <a:off x="457200" y="1676400"/>
+            <a:ext cx="2857500" cy="266700"/>
+          </a:xfrm>
+          <a:prstGeom prst="rect">
+            <a:avLst/>
+          </a:prstGeom>
+          <a:solidFill>
+            <a:srgbClr val="000000">
+              <a:alpha val="0"/>
+            </a:srgbClr>
+          </a:solidFill>
+          <a:ln w="0">
+            <a:solidFill>
+              <a:srgbClr val="000000">
+                <a:alpha val="0"/>
+              </a:srgbClr>
+            </a:solidFill>
+            <a:prstDash val="solid"/>
+          </a:ln>
+        </p:spPr>
+        <p:txBody>
+          <a:bodyPr lIns="0" tIns="0" rIns="0" bIns="0" anchor="t"/>
+          <a:lstStyle/>
+          <a:p>
+            <a:pPr algn="l">
+              <a:defRPr sz="1425" b="1">
+                <a:solidFill>
+                  <a:srgbClr val="111111"/>
+                </a:solidFill>
+                <a:latin typeface="Arial"/>
+                <a:ea typeface="Arial"/>
+                <a:cs typeface="Arial"/>
+              </a:defRPr>
+            </a:pPr>
+            <a:r>
+              <a:rPr lang="pt-BR" sz="1425" b="1" dirty="0">
+                <a:solidFill>
+                  <a:srgbClr val="111111"/>
+                </a:solidFill>
+                <a:latin typeface="Arial"/>
+                <a:ea typeface="Arial"/>
+                <a:cs typeface="Arial"/>
+              </a:rPr>
+              <a:t>Link da documentação</a:t>
+            </a:r>
+            <a:endParaRPr sz="1425" b="1" dirty="0">
+              <a:solidFill>
+                <a:srgbClr val="111111"/>
+              </a:solidFill>
+              <a:latin typeface="Arial"/>
+              <a:ea typeface="Arial"/>
+              <a:cs typeface="Arial"/>
+            </a:endParaRPr>
+          </a:p>
+        </p:txBody>
+      </p:sp>
+      <p:sp>
+        <p:nvSpPr>
+          <p:cNvPr id="6" name="Rectangle 5">
+            <a:extLst>
+              <a:ext uri="{FF2B5EF4-FFF2-40B4-BE49-F238E27FC236}">
+                <a16:creationId xmlns:a16="http://schemas.microsoft.com/office/drawing/2014/main" id="{E7E14272-AC60-33E1-A819-828B03380FD2}"/>
+              </a:ext>
+            </a:extLst>
+          </p:cNvPr>
+          <p:cNvSpPr>
+            <a:spLocks noGrp="1"/>
+          </p:cNvSpPr>
+          <p:nvPr/>
+        </p:nvSpPr>
+        <p:spPr>
+          <a:xfrm>
+            <a:off x="457200" y="2057400"/>
+            <a:ext cx="7243354" cy="457200"/>
+          </a:xfrm>
+          <a:prstGeom prst="rect">
+            <a:avLst/>
+          </a:prstGeom>
+          <a:solidFill>
+            <a:srgbClr val="111111"/>
+          </a:solidFill>
+          <a:ln w="0">
+            <a:solidFill>
+              <a:srgbClr val="000000">
+                <a:alpha val="0"/>
+              </a:srgbClr>
+            </a:solidFill>
+            <a:prstDash val="solid"/>
+          </a:ln>
+        </p:spPr>
+        <p:txBody>
+          <a:bodyPr lIns="133350" tIns="95250" rIns="133350" bIns="76200" anchor="ctr"/>
+          <a:lstStyle/>
+          <a:p>
+            <a:pPr>
+              <a:defRPr sz="1650" b="1">
+                <a:solidFill>
+                  <a:srgbClr val="FFFFFF"/>
+                </a:solidFill>
+                <a:latin typeface="Courier New"/>
+                <a:ea typeface="Courier New"/>
+                <a:cs typeface="Courier New"/>
+              </a:defRPr>
+            </a:pPr>
+            <a:r>
+              <a:rPr lang="en-US" sz="1400" b="1" dirty="0">
+                <a:solidFill>
+                  <a:srgbClr val="FFFFFF"/>
+                </a:solidFill>
+                <a:latin typeface="Courier New"/>
+                <a:ea typeface="Courier New"/>
+                <a:cs typeface="Courier New"/>
+              </a:rPr>
+              <a:t>https://</a:t>
+            </a:r>
+            <a:r>
+              <a:rPr lang="en-US" sz="1400" b="1" dirty="0" err="1">
+                <a:solidFill>
+                  <a:srgbClr val="FFFFFF"/>
+                </a:solidFill>
+                <a:latin typeface="Courier New"/>
+                <a:ea typeface="Courier New"/>
+                <a:cs typeface="Courier New"/>
+              </a:rPr>
+              <a:t>learn.microsoft.com</a:t>
+            </a:r>
+            <a:r>
+              <a:rPr lang="en-US" sz="1400" b="1" dirty="0">
+                <a:solidFill>
+                  <a:srgbClr val="FFFFFF"/>
+                </a:solidFill>
+                <a:latin typeface="Courier New"/>
+                <a:ea typeface="Courier New"/>
+                <a:cs typeface="Courier New"/>
+              </a:rPr>
+              <a:t>/</a:t>
+            </a:r>
+            <a:r>
+              <a:rPr lang="en-US" sz="1400" b="1" dirty="0" err="1">
+                <a:solidFill>
+                  <a:srgbClr val="FFFFFF"/>
+                </a:solidFill>
+                <a:latin typeface="Courier New"/>
+                <a:ea typeface="Courier New"/>
+                <a:cs typeface="Courier New"/>
+              </a:rPr>
+              <a:t>en</a:t>
+            </a:r>
+            <a:r>
+              <a:rPr lang="en-US" sz="1400" b="1" dirty="0">
+                <a:solidFill>
+                  <a:srgbClr val="FFFFFF"/>
+                </a:solidFill>
+                <a:latin typeface="Courier New"/>
+                <a:ea typeface="Courier New"/>
+                <a:cs typeface="Courier New"/>
+              </a:rPr>
+              <a:t>-us/agent-framework/overview/</a:t>
+            </a:r>
+            <a:endParaRPr sz="1400" b="1" dirty="0">
+              <a:solidFill>
+                <a:srgbClr val="FFFFFF"/>
+              </a:solidFill>
+              <a:latin typeface="Courier New"/>
+              <a:ea typeface="Courier New"/>
+              <a:cs typeface="Courier New"/>
+            </a:endParaRPr>
+          </a:p>
+        </p:txBody>
+      </p:sp>
+      <p:pic>
+        <p:nvPicPr>
+          <p:cNvPr id="7" name="Picture 6">
+            <a:extLst>
+              <a:ext uri="{FF2B5EF4-FFF2-40B4-BE49-F238E27FC236}">
+                <a16:creationId xmlns:a16="http://schemas.microsoft.com/office/drawing/2014/main" id="{221F76A8-0BE1-6D9D-9009-B4D790401E8D}"/>
+              </a:ext>
+            </a:extLst>
+          </p:cNvPr>
+          <p:cNvPicPr>
+            <a:picLocks noChangeAspect="1"/>
+          </p:cNvPicPr>
+          <p:nvPr/>
+        </p:nvPicPr>
+        <p:blipFill>
+          <a:blip r:embed="rId4">
+            <a:extLst>
+              <a:ext uri="{28A0092B-C50C-407E-A947-70E740481C1C}">
+                <a14:useLocalDpi xmlns:a14="http://schemas.microsoft.com/office/drawing/2010/main" val="0"/>
+              </a:ext>
+            </a:extLst>
+          </a:blip>
+          <a:stretch>
+            <a:fillRect/>
+          </a:stretch>
+        </p:blipFill>
+        <p:spPr>
+          <a:xfrm>
+            <a:off x="3126377" y="2754630"/>
+            <a:ext cx="1905000" cy="1905000"/>
+          </a:xfrm>
+          <a:prstGeom prst="rect">
+            <a:avLst/>
+          </a:prstGeom>
+        </p:spPr>
+      </p:pic>
+    </p:spTree>
+    <p:extLst>
+      <p:ext uri="{BB962C8B-B14F-4D97-AF65-F5344CB8AC3E}">
+        <p14:creationId xmlns:p14="http://schemas.microsoft.com/office/powerpoint/2010/main" val="3488919165"/>
+      </p:ext>
+    </p:extLst>
+  </p:cSld>
+  <p:clrMapOvr>
+    <a:masterClrMapping/>
+  </p:clrMapOvr>
+</p:sld>
+</file>
+
+<file path=ppt/slides/slide16.xml><?xml version="1.0" encoding="utf-8"?>
 <p:sld xmlns:a="http://schemas.openxmlformats.org/drawingml/2006/main" xmlns:r="http://schemas.openxmlformats.org/officeDocument/2006/relationships" xmlns:p="http://schemas.openxmlformats.org/presentationml/2006/main">
   <p:cSld>
     <p:spTree>
@@ -7010,10 +7510,10 @@
                 <a:ea typeface="Courier New"/>
                 <a:cs typeface="Courier New"/>
               </a:rPr>
-              <a:t> no </a:t>
-            </a:r>
-            <a:r>
-              <a:rPr lang="pt-BR" sz="975" b="0" dirty="0" err="1">
+              <a:t> </a:t>
+            </a:r>
+            <a:r>
+              <a:rPr lang="pt-BR" sz="975" b="0">
                 <a:solidFill>
                   <a:srgbClr val="111111"/>
                 </a:solidFill>
@@ -7021,7 +7521,7 @@
                 <a:ea typeface="Courier New"/>
                 <a:cs typeface="Courier New"/>
               </a:rPr>
-              <a:t>repositó</a:t>
+              <a:t>no repositório</a:t>
             </a:r>
             <a:endParaRPr sz="975" b="0" dirty="0">
               <a:solidFill>

--- a/workflows-multi-agent-microsoft-agent-workflow-mvp-conf-sorocaba.pptx
+++ b/workflows-multi-agent-microsoft-agent-workflow-mvp-conf-sorocaba.pptx
@@ -5,7 +5,7 @@
     <p:sldMasterId id="2147483648" r:id="rId1"/>
   </p:sldMasterIdLst>
   <p:notesMasterIdLst>
-    <p:notesMasterId r:id="rId18"/>
+    <p:notesMasterId r:id="rId19"/>
   </p:notesMasterIdLst>
   <p:sldIdLst>
     <p:sldId id="256" r:id="rId2"/>
@@ -18,12 +18,13 @@
     <p:sldId id="263" r:id="rId9"/>
     <p:sldId id="264" r:id="rId10"/>
     <p:sldId id="265" r:id="rId11"/>
-    <p:sldId id="266" r:id="rId12"/>
-    <p:sldId id="267" r:id="rId13"/>
-    <p:sldId id="269" r:id="rId14"/>
-    <p:sldId id="270" r:id="rId15"/>
-    <p:sldId id="272" r:id="rId16"/>
-    <p:sldId id="271" r:id="rId17"/>
+    <p:sldId id="273" r:id="rId12"/>
+    <p:sldId id="266" r:id="rId13"/>
+    <p:sldId id="267" r:id="rId14"/>
+    <p:sldId id="269" r:id="rId15"/>
+    <p:sldId id="270" r:id="rId16"/>
+    <p:sldId id="272" r:id="rId17"/>
+    <p:sldId id="271" r:id="rId18"/>
   </p:sldIdLst>
   <p:sldSz cx="9144000" cy="5143500" type="screen16x9"/>
   <p:notesSz cx="6858000" cy="9144000"/>
@@ -456,7 +457,13 @@
   <p:cSld>
     <p:spTree>
       <p:nvGrpSpPr>
-        <p:cNvPr id="1" name=""/>
+        <p:cNvPr id="1" name="">
+          <a:extLst>
+            <a:ext uri="{FF2B5EF4-FFF2-40B4-BE49-F238E27FC236}">
+              <a16:creationId xmlns:a16="http://schemas.microsoft.com/office/drawing/2014/main" id="{AD761C7A-551F-F564-D5A8-51EF81D773B4}"/>
+            </a:ext>
+          </a:extLst>
+        </p:cNvPr>
         <p:cNvGrpSpPr/>
         <p:nvPr/>
       </p:nvGrpSpPr>
@@ -470,7 +477,13 @@
       </p:grpSpPr>
       <p:sp>
         <p:nvSpPr>
-          <p:cNvPr id="2" name="Slide Image Placeholder 1"/>
+          <p:cNvPr id="2" name="Slide Image Placeholder 1">
+            <a:extLst>
+              <a:ext uri="{FF2B5EF4-FFF2-40B4-BE49-F238E27FC236}">
+                <a16:creationId xmlns:a16="http://schemas.microsoft.com/office/drawing/2014/main" id="{B21201EA-900E-59A0-EB6D-1D48271BC6F1}"/>
+              </a:ext>
+            </a:extLst>
+          </p:cNvPr>
           <p:cNvSpPr>
             <a:spLocks noGrp="1" noRot="1" noChangeAspect="1"/>
           </p:cNvSpPr>
@@ -482,7 +495,13 @@
       </p:sp>
       <p:sp>
         <p:nvSpPr>
-          <p:cNvPr id="3" name="Notes Placeholder 2"/>
+          <p:cNvPr id="3" name="Notes Placeholder 2">
+            <a:extLst>
+              <a:ext uri="{FF2B5EF4-FFF2-40B4-BE49-F238E27FC236}">
+                <a16:creationId xmlns:a16="http://schemas.microsoft.com/office/drawing/2014/main" id="{B9E9C811-8349-581B-C383-51E68EC0267C}"/>
+              </a:ext>
+            </a:extLst>
+          </p:cNvPr>
           <p:cNvSpPr>
             <a:spLocks noGrp="1"/>
           </p:cNvSpPr>
@@ -501,7 +520,13 @@
       </p:sp>
       <p:sp>
         <p:nvSpPr>
-          <p:cNvPr id="4" name="Slide Number Placeholder 3"/>
+          <p:cNvPr id="4" name="Slide Number Placeholder 3">
+            <a:extLst>
+              <a:ext uri="{FF2B5EF4-FFF2-40B4-BE49-F238E27FC236}">
+                <a16:creationId xmlns:a16="http://schemas.microsoft.com/office/drawing/2014/main" id="{BCA4F3A7-5758-38EB-0C59-A834BAD07294}"/>
+              </a:ext>
+            </a:extLst>
+          </p:cNvPr>
           <p:cNvSpPr>
             <a:spLocks noGrp="1"/>
           </p:cNvSpPr>
@@ -519,6 +544,11 @@
         </p:txBody>
       </p:sp>
     </p:spTree>
+    <p:extLst>
+      <p:ext uri="{BB962C8B-B14F-4D97-AF65-F5344CB8AC3E}">
+        <p14:creationId xmlns:p14="http://schemas.microsoft.com/office/powerpoint/2010/main" val="3192910284"/>
+      </p:ext>
+    </p:extLst>
   </p:cSld>
   <p:clrMapOvr>
     <a:masterClrMapping/>
@@ -756,6 +786,81 @@
   <p:cSld>
     <p:spTree>
       <p:nvGrpSpPr>
+        <p:cNvPr id="1" name=""/>
+        <p:cNvGrpSpPr/>
+        <p:nvPr/>
+      </p:nvGrpSpPr>
+      <p:grpSpPr>
+        <a:xfrm>
+          <a:off x="0" y="0"/>
+          <a:ext cx="0" cy="0"/>
+          <a:chOff x="0" y="0"/>
+          <a:chExt cx="0" cy="0"/>
+        </a:xfrm>
+      </p:grpSpPr>
+      <p:sp>
+        <p:nvSpPr>
+          <p:cNvPr id="2" name="Slide Image Placeholder 1"/>
+          <p:cNvSpPr>
+            <a:spLocks noGrp="1" noRot="1" noChangeAspect="1"/>
+          </p:cNvSpPr>
+          <p:nvPr>
+            <p:ph type="sldImg"/>
+          </p:nvPr>
+        </p:nvSpPr>
+        <p:spPr/>
+      </p:sp>
+      <p:sp>
+        <p:nvSpPr>
+          <p:cNvPr id="3" name="Notes Placeholder 2"/>
+          <p:cNvSpPr>
+            <a:spLocks noGrp="1"/>
+          </p:cNvSpPr>
+          <p:nvPr>
+            <p:ph type="body" idx="1"/>
+          </p:nvPr>
+        </p:nvSpPr>
+        <p:spPr/>
+        <p:txBody>
+          <a:bodyPr/>
+          <a:lstStyle/>
+          <a:p>
+            <a:endParaRPr/>
+          </a:p>
+        </p:txBody>
+      </p:sp>
+      <p:sp>
+        <p:nvSpPr>
+          <p:cNvPr id="4" name="Slide Number Placeholder 3"/>
+          <p:cNvSpPr>
+            <a:spLocks noGrp="1"/>
+          </p:cNvSpPr>
+          <p:nvPr>
+            <p:ph type="sldNum" idx="5"/>
+          </p:nvPr>
+        </p:nvSpPr>
+        <p:spPr/>
+        <p:txBody>
+          <a:bodyPr/>
+          <a:lstStyle/>
+          <a:p>
+            <a:endParaRPr/>
+          </a:p>
+        </p:txBody>
+      </p:sp>
+    </p:spTree>
+  </p:cSld>
+  <p:clrMapOvr>
+    <a:masterClrMapping/>
+  </p:clrMapOvr>
+</p:notes>
+</file>
+
+<file path=ppt/notesSlides/notesSlide16.xml><?xml version="1.0" encoding="utf-8"?>
+<p:notes xmlns:a="http://schemas.openxmlformats.org/drawingml/2006/main" xmlns:r="http://schemas.openxmlformats.org/officeDocument/2006/relationships" xmlns:p="http://schemas.openxmlformats.org/presentationml/2006/main">
+  <p:cSld>
+    <p:spTree>
+      <p:nvGrpSpPr>
         <p:cNvPr id="1" name="">
           <a:extLst>
             <a:ext uri="{FF2B5EF4-FFF2-40B4-BE49-F238E27FC236}">
@@ -855,7 +960,7 @@
 </p:notes>
 </file>
 
-<file path=ppt/notesSlides/notesSlide16.xml><?xml version="1.0" encoding="utf-8"?>
+<file path=ppt/notesSlides/notesSlide17.xml><?xml version="1.0" encoding="utf-8"?>
 <p:notes xmlns:a="http://schemas.openxmlformats.org/drawingml/2006/main" xmlns:r="http://schemas.openxmlformats.org/officeDocument/2006/relationships" xmlns:p="http://schemas.openxmlformats.org/presentationml/2006/main">
   <p:cSld>
     <p:spTree>
@@ -2907,7 +3012,13 @@
   <p:cSld>
     <p:spTree>
       <p:nvGrpSpPr>
-        <p:cNvPr id="1" name=""/>
+        <p:cNvPr id="1" name="">
+          <a:extLst>
+            <a:ext uri="{FF2B5EF4-FFF2-40B4-BE49-F238E27FC236}">
+              <a16:creationId xmlns:a16="http://schemas.microsoft.com/office/drawing/2014/main" id="{03D1763F-C1D7-AAC7-0029-317B7F009C5D}"/>
+            </a:ext>
+          </a:extLst>
+        </p:cNvPr>
         <p:cNvGrpSpPr/>
         <p:nvPr/>
       </p:nvGrpSpPr>
@@ -2921,7 +3032,13 @@
       </p:grpSpPr>
       <p:pic>
         <p:nvPicPr>
-          <p:cNvPr id="25" name="Image 0"/>
+          <p:cNvPr id="22" name="Image 0">
+            <a:extLst>
+              <a:ext uri="{FF2B5EF4-FFF2-40B4-BE49-F238E27FC236}">
+                <a16:creationId xmlns:a16="http://schemas.microsoft.com/office/drawing/2014/main" id="{F5099406-DE9F-E6D5-1601-8A6DC58418CF}"/>
+              </a:ext>
+            </a:extLst>
+          </p:cNvPr>
           <p:cNvPicPr>
             <a:picLocks noChangeAspect="1"/>
           </p:cNvPicPr>
@@ -2945,22 +3062,22 @@
       </p:pic>
       <p:sp>
         <p:nvSpPr>
-          <p:cNvPr id="2" name="Rectangle 1">
-            <a:extLst>
-              <a:ext uri="{FF2B5EF4-FFF2-40B4-BE49-F238E27FC236}">
-                <a16:creationId xmlns:a16="http://schemas.microsoft.com/office/drawing/2014/main" id="{9988E1B1-76FE-4502-86A6-D2FE6C275695}"/>
-              </a:ext>
-            </a:extLst>
-          </p:cNvPr>
-          <p:cNvSpPr>
-            <a:spLocks noGrp="1"/>
-          </p:cNvSpPr>
-          <p:nvPr/>
-        </p:nvSpPr>
-        <p:spPr>
-          <a:xfrm>
-            <a:off x="457200" y="419100"/>
-            <a:ext cx="4000500" cy="171450"/>
+          <p:cNvPr id="3" name="Rectangle 2">
+            <a:extLst>
+              <a:ext uri="{FF2B5EF4-FFF2-40B4-BE49-F238E27FC236}">
+                <a16:creationId xmlns:a16="http://schemas.microsoft.com/office/drawing/2014/main" id="{5D21D8EF-BE24-5033-5E12-D89442837F6B}"/>
+              </a:ext>
+            </a:extLst>
+          </p:cNvPr>
+          <p:cNvSpPr>
+            <a:spLocks noGrp="1"/>
+          </p:cNvSpPr>
+          <p:nvPr/>
+        </p:nvSpPr>
+        <p:spPr>
+          <a:xfrm>
+            <a:off x="457200" y="666750"/>
+            <a:ext cx="6191250" cy="685800"/>
           </a:xfrm>
           <a:prstGeom prst="rect">
             <a:avLst/>
@@ -2984,144 +3101,25 @@
           <a:lstStyle/>
           <a:p>
             <a:pPr algn="l">
-              <a:defRPr sz="675" b="1">
-                <a:solidFill>
-                  <a:srgbClr val="08B8C8"/>
-                </a:solidFill>
-                <a:latin typeface="Courier New"/>
-                <a:ea typeface="Courier New"/>
-                <a:cs typeface="Courier New"/>
+              <a:defRPr sz="2625" b="1">
+                <a:solidFill>
+                  <a:srgbClr val="111111"/>
+                </a:solidFill>
+                <a:latin typeface="Arial"/>
+                <a:ea typeface="Arial"/>
+                <a:cs typeface="Arial"/>
               </a:defRPr>
             </a:pPr>
             <a:r>
-              <a:rPr sz="675" b="1">
-                <a:solidFill>
-                  <a:srgbClr val="08B8C8"/>
-                </a:solidFill>
-                <a:latin typeface="Courier New"/>
-                <a:ea typeface="Courier New"/>
-                <a:cs typeface="Courier New"/>
-              </a:rPr>
-              <a:t>/08 DEMO</a:t>
-            </a:r>
-          </a:p>
-        </p:txBody>
-      </p:sp>
-      <p:sp>
-        <p:nvSpPr>
-          <p:cNvPr id="3" name="Rectangle 2">
-            <a:extLst>
-              <a:ext uri="{FF2B5EF4-FFF2-40B4-BE49-F238E27FC236}">
-                <a16:creationId xmlns:a16="http://schemas.microsoft.com/office/drawing/2014/main" id="{A6FAAF43-71EB-4925-8AE6-C0983CAC4D29}"/>
-              </a:ext>
-            </a:extLst>
-          </p:cNvPr>
-          <p:cNvSpPr>
-            <a:spLocks noGrp="1"/>
-          </p:cNvSpPr>
-          <p:nvPr/>
-        </p:nvSpPr>
-        <p:spPr>
-          <a:xfrm>
-            <a:off x="457199" y="666750"/>
-            <a:ext cx="6459583" cy="685800"/>
-          </a:xfrm>
-          <a:prstGeom prst="rect">
-            <a:avLst/>
-          </a:prstGeom>
-          <a:solidFill>
-            <a:srgbClr val="000000">
-              <a:alpha val="0"/>
-            </a:srgbClr>
-          </a:solidFill>
-          <a:ln w="0">
-            <a:solidFill>
-              <a:srgbClr val="000000">
-                <a:alpha val="0"/>
-              </a:srgbClr>
-            </a:solidFill>
-            <a:prstDash val="solid"/>
-          </a:ln>
-        </p:spPr>
-        <p:txBody>
-          <a:bodyPr lIns="0" tIns="0" rIns="0" bIns="0" anchor="t"/>
-          <a:lstStyle/>
-          <a:p>
-            <a:pPr algn="l">
-              <a:defRPr sz="2625" b="1">
-                <a:solidFill>
-                  <a:srgbClr val="111111"/>
-                </a:solidFill>
-                <a:latin typeface="Arial"/>
-                <a:ea typeface="Arial"/>
-                <a:cs typeface="Arial"/>
-              </a:defRPr>
-            </a:pPr>
-            <a:r>
-              <a:rPr sz="2625" b="1" dirty="0">
-                <a:solidFill>
-                  <a:srgbClr val="111111"/>
-                </a:solidFill>
-                <a:latin typeface="Arial"/>
-                <a:ea typeface="Arial"/>
-                <a:cs typeface="Arial"/>
-              </a:rPr>
-              <a:t>Demo: do </a:t>
-            </a:r>
-            <a:r>
-              <a:rPr sz="2625" b="1" dirty="0" err="1">
-                <a:solidFill>
-                  <a:srgbClr val="111111"/>
-                </a:solidFill>
-                <a:latin typeface="Arial"/>
-                <a:ea typeface="Arial"/>
-                <a:cs typeface="Arial"/>
-              </a:rPr>
-              <a:t>objetivo</a:t>
-            </a:r>
-            <a:r>
-              <a:rPr sz="2625" b="1" dirty="0">
-                <a:solidFill>
-                  <a:srgbClr val="111111"/>
-                </a:solidFill>
-                <a:latin typeface="Arial"/>
-                <a:ea typeface="Arial"/>
-                <a:cs typeface="Arial"/>
-              </a:rPr>
-              <a:t> </a:t>
-            </a:r>
-            <a:r>
-              <a:rPr sz="2625" b="1" dirty="0" err="1">
-                <a:solidFill>
-                  <a:srgbClr val="111111"/>
-                </a:solidFill>
-                <a:latin typeface="Arial"/>
-                <a:ea typeface="Arial"/>
-                <a:cs typeface="Arial"/>
-              </a:rPr>
-              <a:t>ao</a:t>
-            </a:r>
-            <a:r>
-              <a:rPr sz="2625" b="1" dirty="0">
-                <a:solidFill>
-                  <a:srgbClr val="111111"/>
-                </a:solidFill>
-                <a:latin typeface="Arial"/>
-                <a:ea typeface="Arial"/>
-                <a:cs typeface="Arial"/>
-              </a:rPr>
-              <a:t> plano </a:t>
-            </a:r>
-            <a:r>
-              <a:rPr sz="2625" b="1" dirty="0" err="1">
-                <a:solidFill>
-                  <a:srgbClr val="111111"/>
-                </a:solidFill>
-                <a:latin typeface="Arial"/>
-                <a:ea typeface="Arial"/>
-                <a:cs typeface="Arial"/>
-              </a:rPr>
-              <a:t>revisado</a:t>
+              <a:rPr lang="pt-BR" sz="2625" b="1" dirty="0">
+                <a:solidFill>
+                  <a:srgbClr val="111111"/>
+                </a:solidFill>
+                <a:latin typeface="Arial"/>
+                <a:ea typeface="Arial"/>
+                <a:cs typeface="Arial"/>
+              </a:rPr>
+              <a:t>Microsoft Agent Framework</a:t>
             </a:r>
             <a:endParaRPr sz="2625" b="1" dirty="0">
               <a:solidFill>
@@ -3139,7 +3137,7 @@
           <p:cNvPr id="4" name="Rectangle 3">
             <a:extLst>
               <a:ext uri="{FF2B5EF4-FFF2-40B4-BE49-F238E27FC236}">
-                <a16:creationId xmlns:a16="http://schemas.microsoft.com/office/drawing/2014/main" id="{6A48706F-ADC4-4AC4-BA56-820B66076433}"/>
+                <a16:creationId xmlns:a16="http://schemas.microsoft.com/office/drawing/2014/main" id="{3139422C-CE67-D8D0-9626-F035105E72E2}"/>
               </a:ext>
             </a:extLst>
           </p:cNvPr>
@@ -3174,19 +3172,19 @@
           <p:cNvPr id="5" name="Rectangle 4">
             <a:extLst>
               <a:ext uri="{FF2B5EF4-FFF2-40B4-BE49-F238E27FC236}">
-                <a16:creationId xmlns:a16="http://schemas.microsoft.com/office/drawing/2014/main" id="{EBFB24DD-4DD9-4739-8D73-AE0630AAB85B}"/>
-              </a:ext>
-            </a:extLst>
-          </p:cNvPr>
-          <p:cNvSpPr>
-            <a:spLocks noGrp="1"/>
-          </p:cNvSpPr>
-          <p:nvPr/>
-        </p:nvSpPr>
-        <p:spPr>
-          <a:xfrm>
-            <a:off x="457200" y="1571625"/>
-            <a:ext cx="2476500" cy="247650"/>
+                <a16:creationId xmlns:a16="http://schemas.microsoft.com/office/drawing/2014/main" id="{E6C2D705-2535-8C98-7921-87A17B421667}"/>
+              </a:ext>
+            </a:extLst>
+          </p:cNvPr>
+          <p:cNvSpPr>
+            <a:spLocks noGrp="1"/>
+          </p:cNvSpPr>
+          <p:nvPr/>
+        </p:nvSpPr>
+        <p:spPr>
+          <a:xfrm>
+            <a:off x="666750" y="1809750"/>
+            <a:ext cx="1619250" cy="1428750"/>
           </a:xfrm>
           <a:prstGeom prst="rect">
             <a:avLst/>
@@ -3196,6 +3194,76 @@
               <a:alpha val="0"/>
             </a:srgbClr>
           </a:solidFill>
+          <a:ln w="9525">
+            <a:solidFill>
+              <a:srgbClr val="111111"/>
+            </a:solidFill>
+            <a:prstDash val="solid"/>
+          </a:ln>
+        </p:spPr>
+      </p:sp>
+      <p:sp>
+        <p:nvSpPr>
+          <p:cNvPr id="6" name="Rectangle 5">
+            <a:extLst>
+              <a:ext uri="{FF2B5EF4-FFF2-40B4-BE49-F238E27FC236}">
+                <a16:creationId xmlns:a16="http://schemas.microsoft.com/office/drawing/2014/main" id="{876D9C46-5F4C-9839-3525-A35C8DAD2EF6}"/>
+              </a:ext>
+            </a:extLst>
+          </p:cNvPr>
+          <p:cNvSpPr>
+            <a:spLocks noGrp="1"/>
+          </p:cNvSpPr>
+          <p:nvPr/>
+        </p:nvSpPr>
+        <p:spPr>
+          <a:xfrm>
+            <a:off x="666750" y="1809750"/>
+            <a:ext cx="76200" cy="1428750"/>
+          </a:xfrm>
+          <a:prstGeom prst="rect">
+            <a:avLst/>
+          </a:prstGeom>
+          <a:solidFill>
+            <a:srgbClr val="08B8C8"/>
+          </a:solidFill>
+          <a:ln w="0">
+            <a:solidFill>
+              <a:srgbClr val="000000">
+                <a:alpha val="0"/>
+              </a:srgbClr>
+            </a:solidFill>
+            <a:prstDash val="solid"/>
+          </a:ln>
+        </p:spPr>
+      </p:sp>
+      <p:sp>
+        <p:nvSpPr>
+          <p:cNvPr id="7" name="Rectangle 6">
+            <a:extLst>
+              <a:ext uri="{FF2B5EF4-FFF2-40B4-BE49-F238E27FC236}">
+                <a16:creationId xmlns:a16="http://schemas.microsoft.com/office/drawing/2014/main" id="{9019D9D7-873C-FBAF-EA1A-E742ABB62008}"/>
+              </a:ext>
+            </a:extLst>
+          </p:cNvPr>
+          <p:cNvSpPr>
+            <a:spLocks noGrp="1"/>
+          </p:cNvSpPr>
+          <p:nvPr/>
+        </p:nvSpPr>
+        <p:spPr>
+          <a:xfrm>
+            <a:off x="838200" y="1962150"/>
+            <a:ext cx="1333500" cy="228600"/>
+          </a:xfrm>
+          <a:prstGeom prst="rect">
+            <a:avLst/>
+          </a:prstGeom>
+          <a:solidFill>
+            <a:srgbClr val="000000">
+              <a:alpha val="0"/>
+            </a:srgbClr>
+          </a:solidFill>
           <a:ln w="0">
             <a:solidFill>
               <a:srgbClr val="000000">
@@ -3210,7 +3278,7 @@
           <a:lstStyle/>
           <a:p>
             <a:pPr algn="l">
-              <a:defRPr sz="1500" b="1">
+              <a:defRPr sz="1200" b="1">
                 <a:solidFill>
                   <a:srgbClr val="111111"/>
                 </a:solidFill>
@@ -3220,180 +3288,19 @@
               </a:defRPr>
             </a:pPr>
             <a:r>
-              <a:rPr sz="1500" b="1">
-                <a:solidFill>
-                  <a:srgbClr val="111111"/>
-                </a:solidFill>
-                <a:latin typeface="Arial"/>
-                <a:ea typeface="Arial"/>
-                <a:cs typeface="Arial"/>
-              </a:rPr>
-              <a:t>Cenário proposto</a:t>
-            </a:r>
-          </a:p>
-        </p:txBody>
-      </p:sp>
-      <p:sp>
-        <p:nvSpPr>
-          <p:cNvPr id="6" name="Rectangle 5">
-            <a:extLst>
-              <a:ext uri="{FF2B5EF4-FFF2-40B4-BE49-F238E27FC236}">
-                <a16:creationId xmlns:a16="http://schemas.microsoft.com/office/drawing/2014/main" id="{C617DF89-C18A-4CC7-BBF4-89ABA506C926}"/>
-              </a:ext>
-            </a:extLst>
-          </p:cNvPr>
-          <p:cNvSpPr>
-            <a:spLocks noGrp="1"/>
-          </p:cNvSpPr>
-          <p:nvPr/>
-        </p:nvSpPr>
-        <p:spPr>
-          <a:xfrm>
-            <a:off x="457200" y="1952625"/>
-            <a:ext cx="5334000" cy="838200"/>
-          </a:xfrm>
-          <a:prstGeom prst="rect">
-            <a:avLst/>
-          </a:prstGeom>
-          <a:solidFill>
-            <a:srgbClr val="000000">
-              <a:alpha val="0"/>
-            </a:srgbClr>
-          </a:solidFill>
-          <a:ln w="0">
-            <a:solidFill>
-              <a:srgbClr val="000000">
-                <a:alpha val="0"/>
-              </a:srgbClr>
-            </a:solidFill>
-            <a:prstDash val="solid"/>
-          </a:ln>
-        </p:spPr>
-        <p:txBody>
-          <a:bodyPr lIns="0" tIns="0" rIns="0" bIns="0" anchor="t"/>
-          <a:lstStyle/>
-          <a:p>
-            <a:pPr algn="l">
-              <a:defRPr sz="1275" b="0">
-                <a:solidFill>
-                  <a:srgbClr val="111111"/>
-                </a:solidFill>
-                <a:latin typeface="Arial"/>
-                <a:ea typeface="Arial"/>
-                <a:cs typeface="Arial"/>
-              </a:defRPr>
-            </a:pPr>
-            <a:r>
-              <a:rPr sz="1275" b="0">
-                <a:solidFill>
-                  <a:srgbClr val="111111"/>
-                </a:solidFill>
-                <a:latin typeface="Arial"/>
-                <a:ea typeface="Arial"/>
-                <a:cs typeface="Arial"/>
-              </a:rPr>
-              <a:t>Um usuário informa um objetivo. O workflow divide a tarefa, aciona agentes especializados, acompanha eventos em tempo real e entrega um plano final com justificativa e riscos.</a:t>
-            </a:r>
-          </a:p>
-        </p:txBody>
-      </p:sp>
-      <p:sp>
-        <p:nvSpPr>
-          <p:cNvPr id="7" name="Rectangle 6">
-            <a:extLst>
-              <a:ext uri="{FF2B5EF4-FFF2-40B4-BE49-F238E27FC236}">
-                <a16:creationId xmlns:a16="http://schemas.microsoft.com/office/drawing/2014/main" id="{536786B9-5C16-459A-AB37-D50ED8207927}"/>
-              </a:ext>
-            </a:extLst>
-          </p:cNvPr>
-          <p:cNvSpPr>
-            <a:spLocks noGrp="1"/>
-          </p:cNvSpPr>
-          <p:nvPr/>
-        </p:nvSpPr>
-        <p:spPr>
-          <a:xfrm>
-            <a:off x="533400" y="3238500"/>
-            <a:ext cx="723900" cy="457200"/>
-          </a:xfrm>
-          <a:prstGeom prst="rect">
-            <a:avLst/>
-          </a:prstGeom>
-          <a:solidFill>
-            <a:srgbClr val="111111"/>
-          </a:solidFill>
-          <a:ln w="13335">
-            <a:solidFill>
-              <a:srgbClr val="111111"/>
-            </a:solidFill>
-            <a:prstDash val="solid"/>
-          </a:ln>
-        </p:spPr>
-      </p:sp>
-      <p:sp>
-        <p:nvSpPr>
-          <p:cNvPr id="8" name="Rectangle 7">
-            <a:extLst>
-              <a:ext uri="{FF2B5EF4-FFF2-40B4-BE49-F238E27FC236}">
-                <a16:creationId xmlns:a16="http://schemas.microsoft.com/office/drawing/2014/main" id="{D3DA8EB9-D673-4985-9A7F-808F49FC7D4E}"/>
-              </a:ext>
-            </a:extLst>
-          </p:cNvPr>
-          <p:cNvSpPr>
-            <a:spLocks noGrp="1"/>
-          </p:cNvSpPr>
-          <p:nvPr/>
-        </p:nvSpPr>
-        <p:spPr>
-          <a:xfrm>
-            <a:off x="609600" y="3298101"/>
-            <a:ext cx="571500" cy="323850"/>
-          </a:xfrm>
-          <a:prstGeom prst="rect">
-            <a:avLst/>
-          </a:prstGeom>
-          <a:solidFill>
-            <a:srgbClr val="000000">
-              <a:alpha val="0"/>
-            </a:srgbClr>
-          </a:solidFill>
-          <a:ln w="0">
-            <a:solidFill>
-              <a:srgbClr val="000000">
-                <a:alpha val="0"/>
-              </a:srgbClr>
-            </a:solidFill>
-            <a:prstDash val="solid"/>
-          </a:ln>
-        </p:spPr>
-        <p:txBody>
-          <a:bodyPr lIns="0" tIns="0" rIns="0" bIns="0" anchor="ctr"/>
-          <a:lstStyle/>
-          <a:p>
-            <a:pPr algn="ctr">
-              <a:defRPr sz="825" b="1">
-                <a:solidFill>
-                  <a:srgbClr val="FFFFFF"/>
-                </a:solidFill>
-                <a:latin typeface="Arial"/>
-                <a:ea typeface="Arial"/>
-                <a:cs typeface="Arial"/>
-              </a:defRPr>
-            </a:pPr>
-            <a:r>
-              <a:rPr sz="825" b="1" dirty="0" err="1">
-                <a:solidFill>
-                  <a:srgbClr val="FFFFFF"/>
-                </a:solidFill>
-                <a:latin typeface="Arial"/>
-                <a:ea typeface="Arial"/>
-                <a:cs typeface="Arial"/>
-              </a:rPr>
-              <a:t>Objetivo</a:t>
-            </a:r>
-            <a:endParaRPr sz="825" b="1" dirty="0">
+              <a:rPr lang="pt-BR" sz="1200" b="1" dirty="0" err="1">
+                <a:solidFill>
+                  <a:srgbClr val="111111"/>
+                </a:solidFill>
+                <a:latin typeface="Arial"/>
+                <a:ea typeface="Arial"/>
+                <a:cs typeface="Arial"/>
+              </a:rPr>
+              <a:t>Agents</a:t>
+            </a:r>
+            <a:endParaRPr sz="1200" b="1" dirty="0">
               <a:solidFill>
-                <a:srgbClr val="FFFFFF"/>
+                <a:srgbClr val="111111"/>
               </a:solidFill>
               <a:latin typeface="Arial"/>
               <a:ea typeface="Arial"/>
@@ -3404,90 +3311,22 @@
       </p:sp>
       <p:sp>
         <p:nvSpPr>
-          <p:cNvPr id="9" name="Rectangle 8">
-            <a:extLst>
-              <a:ext uri="{FF2B5EF4-FFF2-40B4-BE49-F238E27FC236}">
-                <a16:creationId xmlns:a16="http://schemas.microsoft.com/office/drawing/2014/main" id="{0C1EA30C-22B4-4327-9EEB-0C5DD570F0F7}"/>
-              </a:ext>
-            </a:extLst>
-          </p:cNvPr>
-          <p:cNvSpPr>
-            <a:spLocks noGrp="1"/>
-          </p:cNvSpPr>
-          <p:nvPr/>
-        </p:nvSpPr>
-        <p:spPr>
-          <a:xfrm>
-            <a:off x="1257300" y="3457575"/>
-            <a:ext cx="152400" cy="28575"/>
-          </a:xfrm>
-          <a:prstGeom prst="rect">
-            <a:avLst/>
-          </a:prstGeom>
-          <a:solidFill>
-            <a:srgbClr val="08B8C8"/>
-          </a:solidFill>
-          <a:ln w="0">
-            <a:solidFill>
-              <a:srgbClr val="000000">
-                <a:alpha val="0"/>
-              </a:srgbClr>
-            </a:solidFill>
-            <a:prstDash val="solid"/>
-          </a:ln>
-        </p:spPr>
-      </p:sp>
-      <p:sp>
-        <p:nvSpPr>
-          <p:cNvPr id="10" name="Rectangle 9">
-            <a:extLst>
-              <a:ext uri="{FF2B5EF4-FFF2-40B4-BE49-F238E27FC236}">
-                <a16:creationId xmlns:a16="http://schemas.microsoft.com/office/drawing/2014/main" id="{B18AAE21-C9DC-4D6A-BB2D-C4BFE88168A3}"/>
-              </a:ext>
-            </a:extLst>
-          </p:cNvPr>
-          <p:cNvSpPr>
-            <a:spLocks noGrp="1"/>
-          </p:cNvSpPr>
-          <p:nvPr/>
-        </p:nvSpPr>
-        <p:spPr>
-          <a:xfrm>
-            <a:off x="1409700" y="3238500"/>
-            <a:ext cx="723900" cy="457200"/>
-          </a:xfrm>
-          <a:prstGeom prst="rect">
-            <a:avLst/>
-          </a:prstGeom>
-          <a:solidFill>
-            <a:srgbClr val="FFFFFF"/>
-          </a:solidFill>
-          <a:ln w="13335">
-            <a:solidFill>
-              <a:srgbClr val="111111"/>
-            </a:solidFill>
-            <a:prstDash val="solid"/>
-          </a:ln>
-        </p:spPr>
-      </p:sp>
-      <p:sp>
-        <p:nvSpPr>
-          <p:cNvPr id="11" name="Rectangle 10">
-            <a:extLst>
-              <a:ext uri="{FF2B5EF4-FFF2-40B4-BE49-F238E27FC236}">
-                <a16:creationId xmlns:a16="http://schemas.microsoft.com/office/drawing/2014/main" id="{3207D62A-590B-42A6-9FBF-C116606312DD}"/>
-              </a:ext>
-            </a:extLst>
-          </p:cNvPr>
-          <p:cNvSpPr>
-            <a:spLocks noGrp="1"/>
-          </p:cNvSpPr>
-          <p:nvPr/>
-        </p:nvSpPr>
-        <p:spPr>
-          <a:xfrm>
-            <a:off x="1485900" y="3298101"/>
-            <a:ext cx="571500" cy="323850"/>
+          <p:cNvPr id="8" name="Rectangle 7">
+            <a:extLst>
+              <a:ext uri="{FF2B5EF4-FFF2-40B4-BE49-F238E27FC236}">
+                <a16:creationId xmlns:a16="http://schemas.microsoft.com/office/drawing/2014/main" id="{9A9D9C9F-89D2-C2C7-FDA6-CC2CBAA462EF}"/>
+              </a:ext>
+            </a:extLst>
+          </p:cNvPr>
+          <p:cNvSpPr>
+            <a:spLocks noGrp="1"/>
+          </p:cNvSpPr>
+          <p:nvPr/>
+        </p:nvSpPr>
+        <p:spPr>
+          <a:xfrm>
+            <a:off x="838200" y="2247900"/>
+            <a:ext cx="1314450" cy="895350"/>
           </a:xfrm>
           <a:prstGeom prst="rect">
             <a:avLst/>
@@ -3507,11 +3346,11 @@
           </a:ln>
         </p:spPr>
         <p:txBody>
-          <a:bodyPr lIns="0" tIns="0" rIns="0" bIns="0" anchor="ctr"/>
+          <a:bodyPr lIns="0" tIns="0" rIns="0" bIns="0" anchor="t"/>
           <a:lstStyle/>
           <a:p>
-            <a:pPr algn="ctr">
-              <a:defRPr sz="825" b="1">
+            <a:pPr algn="l">
+              <a:defRPr sz="975" b="0">
                 <a:solidFill>
                   <a:srgbClr val="111111"/>
                 </a:solidFill>
@@ -3521,105 +3360,111 @@
               </a:defRPr>
             </a:pPr>
             <a:r>
-              <a:rPr sz="825" b="1">
-                <a:solidFill>
-                  <a:srgbClr val="111111"/>
-                </a:solidFill>
-                <a:latin typeface="Arial"/>
-                <a:ea typeface="Arial"/>
-                <a:cs typeface="Arial"/>
-              </a:rPr>
-              <a:t>Plano</a:t>
-            </a:r>
+              <a:rPr lang="pt-BR" sz="975" b="0" dirty="0">
+                <a:solidFill>
+                  <a:srgbClr val="111111"/>
+                </a:solidFill>
+                <a:latin typeface="Arial"/>
+                <a:ea typeface="Arial"/>
+                <a:cs typeface="Arial"/>
+              </a:rPr>
+              <a:t>Permite a execução de agentes usando </a:t>
+            </a:r>
+            <a:r>
+              <a:rPr lang="pt-BR" sz="975" b="0" dirty="0" err="1">
+                <a:solidFill>
+                  <a:srgbClr val="111111"/>
+                </a:solidFill>
+                <a:latin typeface="Arial"/>
+                <a:ea typeface="Arial"/>
+                <a:cs typeface="Arial"/>
+              </a:rPr>
+              <a:t>LLMs</a:t>
+            </a:r>
+            <a:r>
+              <a:rPr lang="pt-BR" sz="975" b="0" dirty="0">
+                <a:solidFill>
+                  <a:srgbClr val="111111"/>
+                </a:solidFill>
+                <a:latin typeface="Arial"/>
+                <a:ea typeface="Arial"/>
+                <a:cs typeface="Arial"/>
+              </a:rPr>
+              <a:t>, Tools, servidores MCP, com suporte ao </a:t>
+            </a:r>
+            <a:r>
+              <a:rPr lang="pt-BR" sz="975" b="0" dirty="0" err="1">
+                <a:solidFill>
+                  <a:srgbClr val="111111"/>
+                </a:solidFill>
+                <a:latin typeface="Arial"/>
+                <a:ea typeface="Arial"/>
+                <a:cs typeface="Arial"/>
+              </a:rPr>
+              <a:t>Foundry</a:t>
+            </a:r>
+            <a:r>
+              <a:rPr lang="pt-BR" sz="975" b="0" dirty="0">
+                <a:solidFill>
+                  <a:srgbClr val="111111"/>
+                </a:solidFill>
+                <a:latin typeface="Arial"/>
+                <a:ea typeface="Arial"/>
+                <a:cs typeface="Arial"/>
+              </a:rPr>
+              <a:t>, OpenAI, </a:t>
+            </a:r>
+            <a:r>
+              <a:rPr lang="pt-BR" sz="975" b="0" dirty="0" err="1">
+                <a:solidFill>
+                  <a:srgbClr val="111111"/>
+                </a:solidFill>
+                <a:latin typeface="Arial"/>
+                <a:ea typeface="Arial"/>
+                <a:cs typeface="Arial"/>
+              </a:rPr>
+              <a:t>Ollama</a:t>
+            </a:r>
+            <a:r>
+              <a:rPr lang="pt-BR" sz="975" b="0" dirty="0">
+                <a:solidFill>
+                  <a:srgbClr val="111111"/>
+                </a:solidFill>
+                <a:latin typeface="Arial"/>
+                <a:ea typeface="Arial"/>
+                <a:cs typeface="Arial"/>
+              </a:rPr>
+              <a:t>, etc.</a:t>
+            </a:r>
+            <a:endParaRPr sz="975" b="0" dirty="0">
+              <a:solidFill>
+                <a:srgbClr val="111111"/>
+              </a:solidFill>
+              <a:latin typeface="Arial"/>
+              <a:ea typeface="Arial"/>
+              <a:cs typeface="Arial"/>
+            </a:endParaRPr>
           </a:p>
         </p:txBody>
       </p:sp>
       <p:sp>
         <p:nvSpPr>
-          <p:cNvPr id="12" name="Rectangle 11">
-            <a:extLst>
-              <a:ext uri="{FF2B5EF4-FFF2-40B4-BE49-F238E27FC236}">
-                <a16:creationId xmlns:a16="http://schemas.microsoft.com/office/drawing/2014/main" id="{A571FE11-815B-4E43-84BF-3C66E74944CB}"/>
-              </a:ext>
-            </a:extLst>
-          </p:cNvPr>
-          <p:cNvSpPr>
-            <a:spLocks noGrp="1"/>
-          </p:cNvSpPr>
-          <p:nvPr/>
-        </p:nvSpPr>
-        <p:spPr>
-          <a:xfrm>
-            <a:off x="2133600" y="3457575"/>
-            <a:ext cx="152400" cy="28575"/>
-          </a:xfrm>
-          <a:prstGeom prst="rect">
-            <a:avLst/>
-          </a:prstGeom>
-          <a:solidFill>
-            <a:srgbClr val="08B8C8"/>
-          </a:solidFill>
-          <a:ln w="0">
-            <a:solidFill>
-              <a:srgbClr val="000000">
-                <a:alpha val="0"/>
-              </a:srgbClr>
-            </a:solidFill>
-            <a:prstDash val="solid"/>
-          </a:ln>
-        </p:spPr>
-      </p:sp>
-      <p:sp>
-        <p:nvSpPr>
-          <p:cNvPr id="13" name="Rectangle 12">
-            <a:extLst>
-              <a:ext uri="{FF2B5EF4-FFF2-40B4-BE49-F238E27FC236}">
-                <a16:creationId xmlns:a16="http://schemas.microsoft.com/office/drawing/2014/main" id="{E29E0FC1-DB1A-4BC2-BE6E-8A732EE0668D}"/>
-              </a:ext>
-            </a:extLst>
-          </p:cNvPr>
-          <p:cNvSpPr>
-            <a:spLocks noGrp="1"/>
-          </p:cNvSpPr>
-          <p:nvPr/>
-        </p:nvSpPr>
-        <p:spPr>
-          <a:xfrm>
-            <a:off x="2286000" y="3238500"/>
-            <a:ext cx="723900" cy="457200"/>
-          </a:xfrm>
-          <a:prstGeom prst="rect">
-            <a:avLst/>
-          </a:prstGeom>
-          <a:solidFill>
-            <a:srgbClr val="FFFFFF"/>
-          </a:solidFill>
-          <a:ln w="13335">
-            <a:solidFill>
-              <a:srgbClr val="111111"/>
-            </a:solidFill>
-            <a:prstDash val="solid"/>
-          </a:ln>
-        </p:spPr>
-      </p:sp>
-      <p:sp>
-        <p:nvSpPr>
-          <p:cNvPr id="14" name="Rectangle 13">
-            <a:extLst>
-              <a:ext uri="{FF2B5EF4-FFF2-40B4-BE49-F238E27FC236}">
-                <a16:creationId xmlns:a16="http://schemas.microsoft.com/office/drawing/2014/main" id="{A991B892-C6F5-4569-BB2E-5A1636E8A1F2}"/>
-              </a:ext>
-            </a:extLst>
-          </p:cNvPr>
-          <p:cNvSpPr>
-            <a:spLocks noGrp="1"/>
-          </p:cNvSpPr>
-          <p:nvPr/>
-        </p:nvSpPr>
-        <p:spPr>
-          <a:xfrm>
-            <a:off x="2362200" y="3298101"/>
-            <a:ext cx="571500" cy="323850"/>
+          <p:cNvPr id="9" name="Rectangle 8">
+            <a:extLst>
+              <a:ext uri="{FF2B5EF4-FFF2-40B4-BE49-F238E27FC236}">
+                <a16:creationId xmlns:a16="http://schemas.microsoft.com/office/drawing/2014/main" id="{F5E0FAA5-B4FE-2D78-BB72-55C4EB89BFDB}"/>
+              </a:ext>
+            </a:extLst>
+          </p:cNvPr>
+          <p:cNvSpPr>
+            <a:spLocks noGrp="1"/>
+          </p:cNvSpPr>
+          <p:nvPr/>
+        </p:nvSpPr>
+        <p:spPr>
+          <a:xfrm>
+            <a:off x="2619375" y="1809750"/>
+            <a:ext cx="1619250" cy="1428750"/>
           </a:xfrm>
           <a:prstGeom prst="rect">
             <a:avLst/>
@@ -3629,61 +3474,32 @@
               <a:alpha val="0"/>
             </a:srgbClr>
           </a:solidFill>
-          <a:ln w="0">
-            <a:solidFill>
-              <a:srgbClr val="000000">
-                <a:alpha val="0"/>
-              </a:srgbClr>
-            </a:solidFill>
-            <a:prstDash val="solid"/>
-          </a:ln>
-        </p:spPr>
-        <p:txBody>
-          <a:bodyPr lIns="0" tIns="0" rIns="0" bIns="0" anchor="ctr"/>
-          <a:lstStyle/>
-          <a:p>
-            <a:pPr algn="ctr">
-              <a:defRPr sz="825" b="1">
-                <a:solidFill>
-                  <a:srgbClr val="111111"/>
-                </a:solidFill>
-                <a:latin typeface="Arial"/>
-                <a:ea typeface="Arial"/>
-                <a:cs typeface="Arial"/>
-              </a:defRPr>
-            </a:pPr>
-            <a:r>
-              <a:rPr sz="825" b="1">
-                <a:solidFill>
-                  <a:srgbClr val="111111"/>
-                </a:solidFill>
-                <a:latin typeface="Arial"/>
-                <a:ea typeface="Arial"/>
-                <a:cs typeface="Arial"/>
-              </a:rPr>
-              <a:t>Pesquisa</a:t>
-            </a:r>
-          </a:p>
-        </p:txBody>
-      </p:sp>
-      <p:sp>
-        <p:nvSpPr>
-          <p:cNvPr id="15" name="Rectangle 14">
-            <a:extLst>
-              <a:ext uri="{FF2B5EF4-FFF2-40B4-BE49-F238E27FC236}">
-                <a16:creationId xmlns:a16="http://schemas.microsoft.com/office/drawing/2014/main" id="{7A3805A6-6ACE-4E50-BA1D-520492CDD72E}"/>
-              </a:ext>
-            </a:extLst>
-          </p:cNvPr>
-          <p:cNvSpPr>
-            <a:spLocks noGrp="1"/>
-          </p:cNvSpPr>
-          <p:nvPr/>
-        </p:nvSpPr>
-        <p:spPr>
-          <a:xfrm>
-            <a:off x="3009900" y="3457575"/>
-            <a:ext cx="152400" cy="28575"/>
+          <a:ln w="9525">
+            <a:solidFill>
+              <a:srgbClr val="111111"/>
+            </a:solidFill>
+            <a:prstDash val="solid"/>
+          </a:ln>
+        </p:spPr>
+      </p:sp>
+      <p:sp>
+        <p:nvSpPr>
+          <p:cNvPr id="10" name="Rectangle 9">
+            <a:extLst>
+              <a:ext uri="{FF2B5EF4-FFF2-40B4-BE49-F238E27FC236}">
+                <a16:creationId xmlns:a16="http://schemas.microsoft.com/office/drawing/2014/main" id="{4658DA4C-B016-BAE9-AF26-03C76CF1ADE4}"/>
+              </a:ext>
+            </a:extLst>
+          </p:cNvPr>
+          <p:cNvSpPr>
+            <a:spLocks noGrp="1"/>
+          </p:cNvSpPr>
+          <p:nvPr/>
+        </p:nvSpPr>
+        <p:spPr>
+          <a:xfrm>
+            <a:off x="2619375" y="1809750"/>
+            <a:ext cx="76200" cy="1428750"/>
           </a:xfrm>
           <a:prstGeom prst="rect">
             <a:avLst/>
@@ -3703,55 +3519,22 @@
       </p:sp>
       <p:sp>
         <p:nvSpPr>
-          <p:cNvPr id="16" name="Rectangle 15">
-            <a:extLst>
-              <a:ext uri="{FF2B5EF4-FFF2-40B4-BE49-F238E27FC236}">
-                <a16:creationId xmlns:a16="http://schemas.microsoft.com/office/drawing/2014/main" id="{623E322A-4C2C-44B5-9BDD-BD233E4D6B3E}"/>
-              </a:ext>
-            </a:extLst>
-          </p:cNvPr>
-          <p:cNvSpPr>
-            <a:spLocks noGrp="1"/>
-          </p:cNvSpPr>
-          <p:nvPr/>
-        </p:nvSpPr>
-        <p:spPr>
-          <a:xfrm>
-            <a:off x="3162300" y="3238500"/>
-            <a:ext cx="723900" cy="457200"/>
-          </a:xfrm>
-          <a:prstGeom prst="rect">
-            <a:avLst/>
-          </a:prstGeom>
-          <a:solidFill>
-            <a:srgbClr val="FFFFFF"/>
-          </a:solidFill>
-          <a:ln w="13335">
-            <a:solidFill>
-              <a:srgbClr val="111111"/>
-            </a:solidFill>
-            <a:prstDash val="solid"/>
-          </a:ln>
-        </p:spPr>
-      </p:sp>
-      <p:sp>
-        <p:nvSpPr>
-          <p:cNvPr id="17" name="Rectangle 16">
-            <a:extLst>
-              <a:ext uri="{FF2B5EF4-FFF2-40B4-BE49-F238E27FC236}">
-                <a16:creationId xmlns:a16="http://schemas.microsoft.com/office/drawing/2014/main" id="{1E8C83C0-48BC-4EB5-8D23-2282438B0E2F}"/>
-              </a:ext>
-            </a:extLst>
-          </p:cNvPr>
-          <p:cNvSpPr>
-            <a:spLocks noGrp="1"/>
-          </p:cNvSpPr>
-          <p:nvPr/>
-        </p:nvSpPr>
-        <p:spPr>
-          <a:xfrm>
-            <a:off x="3238500" y="3298101"/>
-            <a:ext cx="571500" cy="323850"/>
+          <p:cNvPr id="11" name="Rectangle 10">
+            <a:extLst>
+              <a:ext uri="{FF2B5EF4-FFF2-40B4-BE49-F238E27FC236}">
+                <a16:creationId xmlns:a16="http://schemas.microsoft.com/office/drawing/2014/main" id="{813B0DFD-02F2-392A-1625-9590F4AE86F3}"/>
+              </a:ext>
+            </a:extLst>
+          </p:cNvPr>
+          <p:cNvSpPr>
+            <a:spLocks noGrp="1"/>
+          </p:cNvSpPr>
+          <p:nvPr/>
+        </p:nvSpPr>
+        <p:spPr>
+          <a:xfrm>
+            <a:off x="2790825" y="1962150"/>
+            <a:ext cx="1333500" cy="228600"/>
           </a:xfrm>
           <a:prstGeom prst="rect">
             <a:avLst/>
@@ -3771,11 +3554,11 @@
           </a:ln>
         </p:spPr>
         <p:txBody>
-          <a:bodyPr lIns="0" tIns="0" rIns="0" bIns="0" anchor="ctr"/>
+          <a:bodyPr lIns="0" tIns="0" rIns="0" bIns="0" anchor="t"/>
           <a:lstStyle/>
           <a:p>
-            <a:pPr algn="ctr">
-              <a:defRPr sz="825" b="1">
+            <a:pPr algn="l">
+              <a:defRPr sz="1200" b="1">
                 <a:solidFill>
                   <a:srgbClr val="111111"/>
                 </a:solidFill>
@@ -3785,105 +3568,45 @@
               </a:defRPr>
             </a:pPr>
             <a:r>
-              <a:rPr sz="825" b="1">
-                <a:solidFill>
-                  <a:srgbClr val="111111"/>
-                </a:solidFill>
-                <a:latin typeface="Arial"/>
-                <a:ea typeface="Arial"/>
-                <a:cs typeface="Arial"/>
-              </a:rPr>
-              <a:t>Execução</a:t>
-            </a:r>
+              <a:rPr lang="pt-BR" sz="1200" b="1" dirty="0">
+                <a:solidFill>
+                  <a:srgbClr val="111111"/>
+                </a:solidFill>
+                <a:latin typeface="Arial"/>
+                <a:ea typeface="Arial"/>
+                <a:cs typeface="Arial"/>
+              </a:rPr>
+              <a:t>Workflows</a:t>
+            </a:r>
+            <a:endParaRPr sz="1200" b="1" dirty="0">
+              <a:solidFill>
+                <a:srgbClr val="111111"/>
+              </a:solidFill>
+              <a:latin typeface="Arial"/>
+              <a:ea typeface="Arial"/>
+              <a:cs typeface="Arial"/>
+            </a:endParaRPr>
           </a:p>
         </p:txBody>
       </p:sp>
       <p:sp>
         <p:nvSpPr>
-          <p:cNvPr id="18" name="Rectangle 17">
-            <a:extLst>
-              <a:ext uri="{FF2B5EF4-FFF2-40B4-BE49-F238E27FC236}">
-                <a16:creationId xmlns:a16="http://schemas.microsoft.com/office/drawing/2014/main" id="{6CB77C1B-7CBD-4876-830C-6788FA430392}"/>
-              </a:ext>
-            </a:extLst>
-          </p:cNvPr>
-          <p:cNvSpPr>
-            <a:spLocks noGrp="1"/>
-          </p:cNvSpPr>
-          <p:nvPr/>
-        </p:nvSpPr>
-        <p:spPr>
-          <a:xfrm>
-            <a:off x="3886200" y="3457575"/>
-            <a:ext cx="152400" cy="28575"/>
-          </a:xfrm>
-          <a:prstGeom prst="rect">
-            <a:avLst/>
-          </a:prstGeom>
-          <a:solidFill>
-            <a:srgbClr val="08B8C8"/>
-          </a:solidFill>
-          <a:ln w="0">
-            <a:solidFill>
-              <a:srgbClr val="000000">
-                <a:alpha val="0"/>
-              </a:srgbClr>
-            </a:solidFill>
-            <a:prstDash val="solid"/>
-          </a:ln>
-        </p:spPr>
-      </p:sp>
-      <p:sp>
-        <p:nvSpPr>
-          <p:cNvPr id="19" name="Rectangle 18">
-            <a:extLst>
-              <a:ext uri="{FF2B5EF4-FFF2-40B4-BE49-F238E27FC236}">
-                <a16:creationId xmlns:a16="http://schemas.microsoft.com/office/drawing/2014/main" id="{F515A25F-8A84-4B9A-AE24-BEAE02C63DB3}"/>
-              </a:ext>
-            </a:extLst>
-          </p:cNvPr>
-          <p:cNvSpPr>
-            <a:spLocks noGrp="1"/>
-          </p:cNvSpPr>
-          <p:nvPr/>
-        </p:nvSpPr>
-        <p:spPr>
-          <a:xfrm>
-            <a:off x="4038600" y="3238500"/>
-            <a:ext cx="723900" cy="457200"/>
-          </a:xfrm>
-          <a:prstGeom prst="rect">
-            <a:avLst/>
-          </a:prstGeom>
-          <a:solidFill>
-            <a:srgbClr val="FFFFFF"/>
-          </a:solidFill>
-          <a:ln w="13335">
-            <a:solidFill>
-              <a:srgbClr val="111111"/>
-            </a:solidFill>
-            <a:prstDash val="solid"/>
-          </a:ln>
-        </p:spPr>
-      </p:sp>
-      <p:sp>
-        <p:nvSpPr>
-          <p:cNvPr id="20" name="Rectangle 19">
-            <a:extLst>
-              <a:ext uri="{FF2B5EF4-FFF2-40B4-BE49-F238E27FC236}">
-                <a16:creationId xmlns:a16="http://schemas.microsoft.com/office/drawing/2014/main" id="{5A99CD0A-EC99-432F-8D7D-FC2F86DE9094}"/>
-              </a:ext>
-            </a:extLst>
-          </p:cNvPr>
-          <p:cNvSpPr>
-            <a:spLocks noGrp="1"/>
-          </p:cNvSpPr>
-          <p:nvPr/>
-        </p:nvSpPr>
-        <p:spPr>
-          <a:xfrm>
-            <a:off x="4114800" y="3298101"/>
-            <a:ext cx="571500" cy="323850"/>
+          <p:cNvPr id="12" name="Rectangle 11">
+            <a:extLst>
+              <a:ext uri="{FF2B5EF4-FFF2-40B4-BE49-F238E27FC236}">
+                <a16:creationId xmlns:a16="http://schemas.microsoft.com/office/drawing/2014/main" id="{1B71CCFA-F292-BB02-F434-0A1E84D83B92}"/>
+              </a:ext>
+            </a:extLst>
+          </p:cNvPr>
+          <p:cNvSpPr>
+            <a:spLocks noGrp="1"/>
+          </p:cNvSpPr>
+          <p:nvPr/>
+        </p:nvSpPr>
+        <p:spPr>
+          <a:xfrm>
+            <a:off x="2790825" y="2247900"/>
+            <a:ext cx="1314450" cy="895350"/>
           </a:xfrm>
           <a:prstGeom prst="rect">
             <a:avLst/>
@@ -3903,11 +3626,11 @@
           </a:ln>
         </p:spPr>
         <p:txBody>
-          <a:bodyPr lIns="0" tIns="0" rIns="0" bIns="0" anchor="ctr"/>
+          <a:bodyPr lIns="0" tIns="0" rIns="0" bIns="0" anchor="t"/>
           <a:lstStyle/>
           <a:p>
-            <a:pPr algn="ctr">
-              <a:defRPr sz="825" b="1">
+            <a:pPr algn="l">
+              <a:defRPr sz="975" b="0">
                 <a:solidFill>
                   <a:srgbClr val="111111"/>
                 </a:solidFill>
@@ -3917,105 +3640,56 @@
               </a:defRPr>
             </a:pPr>
             <a:r>
-              <a:rPr sz="825" b="1">
-                <a:solidFill>
-                  <a:srgbClr val="111111"/>
-                </a:solidFill>
-                <a:latin typeface="Arial"/>
-                <a:ea typeface="Arial"/>
-                <a:cs typeface="Arial"/>
-              </a:rPr>
-              <a:t>Revisão</a:t>
-            </a:r>
+              <a:rPr lang="pt-BR" sz="975" b="0" dirty="0">
+                <a:solidFill>
+                  <a:srgbClr val="111111"/>
+                </a:solidFill>
+                <a:latin typeface="Arial"/>
+                <a:ea typeface="Arial"/>
+                <a:cs typeface="Arial"/>
+              </a:rPr>
+              <a:t>Consegue automatizar workflows entre </a:t>
+            </a:r>
+            <a:r>
+              <a:rPr lang="pt-BR" sz="975" dirty="0">
+                <a:solidFill>
+                  <a:srgbClr val="111111"/>
+                </a:solidFill>
+                <a:latin typeface="Arial"/>
+                <a:ea typeface="Arial"/>
+                <a:cs typeface="Arial"/>
+              </a:rPr>
+              <a:t>diferentes agentes, provedores, tools, etc.</a:t>
+            </a:r>
+            <a:endParaRPr sz="975" b="0" dirty="0">
+              <a:solidFill>
+                <a:srgbClr val="111111"/>
+              </a:solidFill>
+              <a:latin typeface="Arial"/>
+              <a:ea typeface="Arial"/>
+              <a:cs typeface="Arial"/>
+            </a:endParaRPr>
           </a:p>
         </p:txBody>
       </p:sp>
       <p:sp>
         <p:nvSpPr>
-          <p:cNvPr id="21" name="Rectangle 20">
-            <a:extLst>
-              <a:ext uri="{FF2B5EF4-FFF2-40B4-BE49-F238E27FC236}">
-                <a16:creationId xmlns:a16="http://schemas.microsoft.com/office/drawing/2014/main" id="{B18A313A-64F9-44D6-A3C6-831A2ED74A65}"/>
-              </a:ext>
-            </a:extLst>
-          </p:cNvPr>
-          <p:cNvSpPr>
-            <a:spLocks noGrp="1"/>
-          </p:cNvSpPr>
-          <p:nvPr/>
-        </p:nvSpPr>
-        <p:spPr>
-          <a:xfrm>
-            <a:off x="4762500" y="3457575"/>
-            <a:ext cx="152400" cy="28575"/>
-          </a:xfrm>
-          <a:prstGeom prst="rect">
-            <a:avLst/>
-          </a:prstGeom>
-          <a:solidFill>
-            <a:srgbClr val="08B8C8"/>
-          </a:solidFill>
-          <a:ln w="0">
-            <a:solidFill>
-              <a:srgbClr val="000000">
-                <a:alpha val="0"/>
-              </a:srgbClr>
-            </a:solidFill>
-            <a:prstDash val="solid"/>
-          </a:ln>
-        </p:spPr>
-      </p:sp>
-      <p:sp>
-        <p:nvSpPr>
-          <p:cNvPr id="22" name="Rectangle 21">
-            <a:extLst>
-              <a:ext uri="{FF2B5EF4-FFF2-40B4-BE49-F238E27FC236}">
-                <a16:creationId xmlns:a16="http://schemas.microsoft.com/office/drawing/2014/main" id="{21E99DFB-A5A4-4775-A688-70F231DB03F0}"/>
-              </a:ext>
-            </a:extLst>
-          </p:cNvPr>
-          <p:cNvSpPr>
-            <a:spLocks noGrp="1"/>
-          </p:cNvSpPr>
-          <p:nvPr/>
-        </p:nvSpPr>
-        <p:spPr>
-          <a:xfrm>
-            <a:off x="4914900" y="3238500"/>
-            <a:ext cx="723900" cy="457200"/>
-          </a:xfrm>
-          <a:prstGeom prst="rect">
-            <a:avLst/>
-          </a:prstGeom>
-          <a:solidFill>
-            <a:srgbClr val="111111"/>
-          </a:solidFill>
-          <a:ln w="13335">
-            <a:solidFill>
-              <a:srgbClr val="111111"/>
-            </a:solidFill>
-            <a:prstDash val="solid"/>
-          </a:ln>
-        </p:spPr>
-      </p:sp>
-      <p:sp>
-        <p:nvSpPr>
-          <p:cNvPr id="23" name="Rectangle 22">
-            <a:extLst>
-              <a:ext uri="{FF2B5EF4-FFF2-40B4-BE49-F238E27FC236}">
-                <a16:creationId xmlns:a16="http://schemas.microsoft.com/office/drawing/2014/main" id="{39E2F292-7321-43DC-A9FE-8DEFB20381FF}"/>
-              </a:ext>
-            </a:extLst>
-          </p:cNvPr>
-          <p:cNvSpPr>
-            <a:spLocks noGrp="1"/>
-          </p:cNvSpPr>
-          <p:nvPr/>
-        </p:nvSpPr>
-        <p:spPr>
-          <a:xfrm>
-            <a:off x="4991100" y="3298101"/>
-            <a:ext cx="571500" cy="323850"/>
+          <p:cNvPr id="13" name="Rectangle 12">
+            <a:extLst>
+              <a:ext uri="{FF2B5EF4-FFF2-40B4-BE49-F238E27FC236}">
+                <a16:creationId xmlns:a16="http://schemas.microsoft.com/office/drawing/2014/main" id="{E76CE68B-251A-58CB-B753-50E743A060AE}"/>
+              </a:ext>
+            </a:extLst>
+          </p:cNvPr>
+          <p:cNvSpPr>
+            <a:spLocks noGrp="1"/>
+          </p:cNvSpPr>
+          <p:nvPr/>
+        </p:nvSpPr>
+        <p:spPr>
+          <a:xfrm>
+            <a:off x="4572000" y="1809750"/>
+            <a:ext cx="1619250" cy="1428750"/>
           </a:xfrm>
           <a:prstGeom prst="rect">
             <a:avLst/>
@@ -4025,6 +3699,76 @@
               <a:alpha val="0"/>
             </a:srgbClr>
           </a:solidFill>
+          <a:ln w="9525">
+            <a:solidFill>
+              <a:srgbClr val="111111"/>
+            </a:solidFill>
+            <a:prstDash val="solid"/>
+          </a:ln>
+        </p:spPr>
+      </p:sp>
+      <p:sp>
+        <p:nvSpPr>
+          <p:cNvPr id="14" name="Rectangle 13">
+            <a:extLst>
+              <a:ext uri="{FF2B5EF4-FFF2-40B4-BE49-F238E27FC236}">
+                <a16:creationId xmlns:a16="http://schemas.microsoft.com/office/drawing/2014/main" id="{FA0F7892-4CDF-AD62-E8E7-0151638A18D1}"/>
+              </a:ext>
+            </a:extLst>
+          </p:cNvPr>
+          <p:cNvSpPr>
+            <a:spLocks noGrp="1"/>
+          </p:cNvSpPr>
+          <p:nvPr/>
+        </p:nvSpPr>
+        <p:spPr>
+          <a:xfrm>
+            <a:off x="4572000" y="1809750"/>
+            <a:ext cx="76200" cy="1428750"/>
+          </a:xfrm>
+          <a:prstGeom prst="rect">
+            <a:avLst/>
+          </a:prstGeom>
+          <a:solidFill>
+            <a:srgbClr val="08B8C8"/>
+          </a:solidFill>
+          <a:ln w="0">
+            <a:solidFill>
+              <a:srgbClr val="000000">
+                <a:alpha val="0"/>
+              </a:srgbClr>
+            </a:solidFill>
+            <a:prstDash val="solid"/>
+          </a:ln>
+        </p:spPr>
+      </p:sp>
+      <p:sp>
+        <p:nvSpPr>
+          <p:cNvPr id="15" name="Rectangle 14">
+            <a:extLst>
+              <a:ext uri="{FF2B5EF4-FFF2-40B4-BE49-F238E27FC236}">
+                <a16:creationId xmlns:a16="http://schemas.microsoft.com/office/drawing/2014/main" id="{BC2C3DC8-5B04-F0A1-6D9F-EC2FDD0A4D1F}"/>
+              </a:ext>
+            </a:extLst>
+          </p:cNvPr>
+          <p:cNvSpPr>
+            <a:spLocks noGrp="1"/>
+          </p:cNvSpPr>
+          <p:nvPr/>
+        </p:nvSpPr>
+        <p:spPr>
+          <a:xfrm>
+            <a:off x="4743450" y="1962150"/>
+            <a:ext cx="1333500" cy="228600"/>
+          </a:xfrm>
+          <a:prstGeom prst="rect">
+            <a:avLst/>
+          </a:prstGeom>
+          <a:solidFill>
+            <a:srgbClr val="000000">
+              <a:alpha val="0"/>
+            </a:srgbClr>
+          </a:solidFill>
           <a:ln w="0">
             <a:solidFill>
               <a:srgbClr val="000000">
@@ -4035,13 +3779,13 @@
           </a:ln>
         </p:spPr>
         <p:txBody>
-          <a:bodyPr lIns="0" tIns="0" rIns="0" bIns="0" anchor="ctr"/>
+          <a:bodyPr lIns="0" tIns="0" rIns="0" bIns="0" anchor="t"/>
           <a:lstStyle/>
           <a:p>
-            <a:pPr algn="ctr">
-              <a:defRPr sz="825" b="1">
-                <a:solidFill>
-                  <a:srgbClr val="FFFFFF"/>
+            <a:pPr algn="l">
+              <a:defRPr sz="1200" b="1">
+                <a:solidFill>
+                  <a:srgbClr val="111111"/>
                 </a:solidFill>
                 <a:latin typeface="Arial"/>
                 <a:ea typeface="Arial"/>
@@ -4049,53 +3793,76 @@
               </a:defRPr>
             </a:pPr>
             <a:r>
-              <a:rPr sz="825" b="1">
-                <a:solidFill>
-                  <a:srgbClr val="FFFFFF"/>
-                </a:solidFill>
-                <a:latin typeface="Arial"/>
-                <a:ea typeface="Arial"/>
-                <a:cs typeface="Arial"/>
-              </a:rPr>
-              <a:t>Resposta</a:t>
-            </a:r>
+              <a:rPr lang="pt-BR" sz="1200" b="1" dirty="0">
+                <a:solidFill>
+                  <a:srgbClr val="111111"/>
+                </a:solidFill>
+                <a:latin typeface="Arial"/>
+                <a:ea typeface="Arial"/>
+                <a:cs typeface="Arial"/>
+              </a:rPr>
+              <a:t>Open </a:t>
+            </a:r>
+            <a:r>
+              <a:rPr lang="pt-BR" sz="1200" b="1" dirty="0" err="1">
+                <a:solidFill>
+                  <a:srgbClr val="111111"/>
+                </a:solidFill>
+                <a:latin typeface="Arial"/>
+                <a:ea typeface="Arial"/>
+                <a:cs typeface="Arial"/>
+              </a:rPr>
+              <a:t>Source</a:t>
+            </a:r>
+            <a:endParaRPr sz="1200" b="1" dirty="0">
+              <a:solidFill>
+                <a:srgbClr val="111111"/>
+              </a:solidFill>
+              <a:latin typeface="Arial"/>
+              <a:ea typeface="Arial"/>
+              <a:cs typeface="Arial"/>
+            </a:endParaRPr>
           </a:p>
         </p:txBody>
       </p:sp>
       <p:sp>
         <p:nvSpPr>
-          <p:cNvPr id="24" name="Rectangle 23">
-            <a:extLst>
-              <a:ext uri="{FF2B5EF4-FFF2-40B4-BE49-F238E27FC236}">
-                <a16:creationId xmlns:a16="http://schemas.microsoft.com/office/drawing/2014/main" id="{E0029CBF-0ADB-4935-83EB-CA66C37620D1}"/>
-              </a:ext>
-            </a:extLst>
-          </p:cNvPr>
-          <p:cNvSpPr>
-            <a:spLocks noGrp="1"/>
-          </p:cNvSpPr>
-          <p:nvPr/>
-        </p:nvSpPr>
-        <p:spPr>
-          <a:xfrm>
-            <a:off x="457200" y="4095750"/>
-            <a:ext cx="5429250" cy="438150"/>
-          </a:xfrm>
-          <a:prstGeom prst="rect">
-            <a:avLst/>
-          </a:prstGeom>
-          <a:solidFill>
-            <a:srgbClr val="ECECEC"/>
-          </a:solidFill>
-          <a:ln w="9525">
-            <a:solidFill>
-              <a:srgbClr val="08B8C8"/>
+          <p:cNvPr id="16" name="Rectangle 15">
+            <a:extLst>
+              <a:ext uri="{FF2B5EF4-FFF2-40B4-BE49-F238E27FC236}">
+                <a16:creationId xmlns:a16="http://schemas.microsoft.com/office/drawing/2014/main" id="{7C1C3EE5-08BD-FE04-D093-7FE409F16FE9}"/>
+              </a:ext>
+            </a:extLst>
+          </p:cNvPr>
+          <p:cNvSpPr>
+            <a:spLocks noGrp="1"/>
+          </p:cNvSpPr>
+          <p:nvPr/>
+        </p:nvSpPr>
+        <p:spPr>
+          <a:xfrm>
+            <a:off x="4743450" y="2247900"/>
+            <a:ext cx="1314450" cy="895350"/>
+          </a:xfrm>
+          <a:prstGeom prst="rect">
+            <a:avLst/>
+          </a:prstGeom>
+          <a:solidFill>
+            <a:srgbClr val="000000">
+              <a:alpha val="0"/>
+            </a:srgbClr>
+          </a:solidFill>
+          <a:ln w="0">
+            <a:solidFill>
+              <a:srgbClr val="000000">
+                <a:alpha val="0"/>
+              </a:srgbClr>
             </a:solidFill>
             <a:prstDash val="solid"/>
           </a:ln>
         </p:spPr>
         <p:txBody>
-          <a:bodyPr lIns="114300" tIns="85725" rIns="114300" bIns="85725" anchor="ctr"/>
+          <a:bodyPr lIns="0" tIns="0" rIns="0" bIns="0" anchor="t"/>
           <a:lstStyle/>
           <a:p>
             <a:pPr algn="l">
@@ -4109,23 +3876,383 @@
               </a:defRPr>
             </a:pPr>
             <a:r>
-              <a:rPr sz="975" b="0">
-                <a:solidFill>
-                  <a:srgbClr val="111111"/>
-                </a:solidFill>
-                <a:latin typeface="Arial"/>
-                <a:ea typeface="Arial"/>
-                <a:cs typeface="Arial"/>
-              </a:rPr>
-              <a:t>A demo deve vender o raciocínio do fluxo, não só a resposta bonita no fim.</a:t>
-            </a:r>
+              <a:rPr lang="pt-BR" sz="975" b="0" dirty="0">
+                <a:solidFill>
+                  <a:srgbClr val="111111"/>
+                </a:solidFill>
+                <a:latin typeface="Arial"/>
+                <a:ea typeface="Arial"/>
+                <a:cs typeface="Arial"/>
+              </a:rPr>
+              <a:t>100% open </a:t>
+            </a:r>
+            <a:r>
+              <a:rPr lang="pt-BR" sz="975" b="0" dirty="0" err="1">
+                <a:solidFill>
+                  <a:srgbClr val="111111"/>
+                </a:solidFill>
+                <a:latin typeface="Arial"/>
+                <a:ea typeface="Arial"/>
+                <a:cs typeface="Arial"/>
+              </a:rPr>
+              <a:t>source</a:t>
+            </a:r>
+            <a:r>
+              <a:rPr lang="pt-BR" sz="975" dirty="0">
+                <a:solidFill>
+                  <a:srgbClr val="111111"/>
+                </a:solidFill>
+                <a:latin typeface="Arial"/>
+                <a:ea typeface="Arial"/>
+                <a:cs typeface="Arial"/>
+              </a:rPr>
+              <a:t>, disponível no GitHub</a:t>
+            </a:r>
+            <a:endParaRPr sz="975" b="0" dirty="0">
+              <a:solidFill>
+                <a:srgbClr val="111111"/>
+              </a:solidFill>
+              <a:latin typeface="Arial"/>
+              <a:ea typeface="Arial"/>
+              <a:cs typeface="Arial"/>
+            </a:endParaRPr>
+          </a:p>
+        </p:txBody>
+      </p:sp>
+      <p:sp>
+        <p:nvSpPr>
+          <p:cNvPr id="17" name="Rectangle 16">
+            <a:extLst>
+              <a:ext uri="{FF2B5EF4-FFF2-40B4-BE49-F238E27FC236}">
+                <a16:creationId xmlns:a16="http://schemas.microsoft.com/office/drawing/2014/main" id="{7EBCE332-5B5E-3343-8AD6-08A89483A948}"/>
+              </a:ext>
+            </a:extLst>
+          </p:cNvPr>
+          <p:cNvSpPr>
+            <a:spLocks noGrp="1"/>
+          </p:cNvSpPr>
+          <p:nvPr/>
+        </p:nvSpPr>
+        <p:spPr>
+          <a:xfrm>
+            <a:off x="6524625" y="1809750"/>
+            <a:ext cx="1619250" cy="1428750"/>
+          </a:xfrm>
+          <a:prstGeom prst="rect">
+            <a:avLst/>
+          </a:prstGeom>
+          <a:solidFill>
+            <a:srgbClr val="000000">
+              <a:alpha val="0"/>
+            </a:srgbClr>
+          </a:solidFill>
+          <a:ln w="9525">
+            <a:solidFill>
+              <a:srgbClr val="111111"/>
+            </a:solidFill>
+            <a:prstDash val="solid"/>
+          </a:ln>
+        </p:spPr>
+      </p:sp>
+      <p:sp>
+        <p:nvSpPr>
+          <p:cNvPr id="18" name="Rectangle 17">
+            <a:extLst>
+              <a:ext uri="{FF2B5EF4-FFF2-40B4-BE49-F238E27FC236}">
+                <a16:creationId xmlns:a16="http://schemas.microsoft.com/office/drawing/2014/main" id="{4FC1E28D-9380-065A-7B46-9E442F93B7E5}"/>
+              </a:ext>
+            </a:extLst>
+          </p:cNvPr>
+          <p:cNvSpPr>
+            <a:spLocks noGrp="1"/>
+          </p:cNvSpPr>
+          <p:nvPr/>
+        </p:nvSpPr>
+        <p:spPr>
+          <a:xfrm>
+            <a:off x="6524625" y="1809750"/>
+            <a:ext cx="76200" cy="1428750"/>
+          </a:xfrm>
+          <a:prstGeom prst="rect">
+            <a:avLst/>
+          </a:prstGeom>
+          <a:solidFill>
+            <a:srgbClr val="111111"/>
+          </a:solidFill>
+          <a:ln w="0">
+            <a:solidFill>
+              <a:srgbClr val="000000">
+                <a:alpha val="0"/>
+              </a:srgbClr>
+            </a:solidFill>
+            <a:prstDash val="solid"/>
+          </a:ln>
+        </p:spPr>
+      </p:sp>
+      <p:sp>
+        <p:nvSpPr>
+          <p:cNvPr id="19" name="Rectangle 18">
+            <a:extLst>
+              <a:ext uri="{FF2B5EF4-FFF2-40B4-BE49-F238E27FC236}">
+                <a16:creationId xmlns:a16="http://schemas.microsoft.com/office/drawing/2014/main" id="{F7ADDA3F-B67F-DEA6-E048-E084159EA056}"/>
+              </a:ext>
+            </a:extLst>
+          </p:cNvPr>
+          <p:cNvSpPr>
+            <a:spLocks noGrp="1"/>
+          </p:cNvSpPr>
+          <p:nvPr/>
+        </p:nvSpPr>
+        <p:spPr>
+          <a:xfrm>
+            <a:off x="6696075" y="1962150"/>
+            <a:ext cx="1333500" cy="228600"/>
+          </a:xfrm>
+          <a:prstGeom prst="rect">
+            <a:avLst/>
+          </a:prstGeom>
+          <a:solidFill>
+            <a:srgbClr val="000000">
+              <a:alpha val="0"/>
+            </a:srgbClr>
+          </a:solidFill>
+          <a:ln w="0">
+            <a:solidFill>
+              <a:srgbClr val="000000">
+                <a:alpha val="0"/>
+              </a:srgbClr>
+            </a:solidFill>
+            <a:prstDash val="solid"/>
+          </a:ln>
+        </p:spPr>
+        <p:txBody>
+          <a:bodyPr lIns="0" tIns="0" rIns="0" bIns="0" anchor="t"/>
+          <a:lstStyle/>
+          <a:p>
+            <a:pPr algn="l">
+              <a:defRPr sz="1200" b="1">
+                <a:solidFill>
+                  <a:srgbClr val="111111"/>
+                </a:solidFill>
+                <a:latin typeface="Arial"/>
+                <a:ea typeface="Arial"/>
+                <a:cs typeface="Arial"/>
+              </a:defRPr>
+            </a:pPr>
+            <a:r>
+              <a:rPr lang="pt-BR" sz="1200" b="1" dirty="0">
+                <a:solidFill>
+                  <a:srgbClr val="111111"/>
+                </a:solidFill>
+                <a:latin typeface="Arial"/>
+                <a:ea typeface="Arial"/>
+                <a:cs typeface="Arial"/>
+              </a:rPr>
+              <a:t>Suporte</a:t>
+            </a:r>
+            <a:endParaRPr sz="1200" b="1" dirty="0">
+              <a:solidFill>
+                <a:srgbClr val="111111"/>
+              </a:solidFill>
+              <a:latin typeface="Arial"/>
+              <a:ea typeface="Arial"/>
+              <a:cs typeface="Arial"/>
+            </a:endParaRPr>
+          </a:p>
+        </p:txBody>
+      </p:sp>
+      <p:sp>
+        <p:nvSpPr>
+          <p:cNvPr id="20" name="Rectangle 19">
+            <a:extLst>
+              <a:ext uri="{FF2B5EF4-FFF2-40B4-BE49-F238E27FC236}">
+                <a16:creationId xmlns:a16="http://schemas.microsoft.com/office/drawing/2014/main" id="{D0EFD2F5-9B52-BE16-6558-87DD8C25915D}"/>
+              </a:ext>
+            </a:extLst>
+          </p:cNvPr>
+          <p:cNvSpPr>
+            <a:spLocks noGrp="1"/>
+          </p:cNvSpPr>
+          <p:nvPr/>
+        </p:nvSpPr>
+        <p:spPr>
+          <a:xfrm>
+            <a:off x="6696075" y="2247900"/>
+            <a:ext cx="1314450" cy="895350"/>
+          </a:xfrm>
+          <a:prstGeom prst="rect">
+            <a:avLst/>
+          </a:prstGeom>
+          <a:solidFill>
+            <a:srgbClr val="000000">
+              <a:alpha val="0"/>
+            </a:srgbClr>
+          </a:solidFill>
+          <a:ln w="0">
+            <a:solidFill>
+              <a:srgbClr val="000000">
+                <a:alpha val="0"/>
+              </a:srgbClr>
+            </a:solidFill>
+            <a:prstDash val="solid"/>
+          </a:ln>
+        </p:spPr>
+        <p:txBody>
+          <a:bodyPr lIns="0" tIns="0" rIns="0" bIns="0" anchor="t"/>
+          <a:lstStyle/>
+          <a:p>
+            <a:pPr algn="l">
+              <a:defRPr sz="975" b="0">
+                <a:solidFill>
+                  <a:srgbClr val="111111"/>
+                </a:solidFill>
+                <a:latin typeface="Arial"/>
+                <a:ea typeface="Arial"/>
+                <a:cs typeface="Arial"/>
+              </a:defRPr>
+            </a:pPr>
+            <a:r>
+              <a:rPr lang="pt-BR" sz="975" b="0" dirty="0">
+                <a:solidFill>
+                  <a:srgbClr val="111111"/>
+                </a:solidFill>
+                <a:latin typeface="Arial"/>
+                <a:ea typeface="Arial"/>
+                <a:cs typeface="Arial"/>
+              </a:rPr>
+              <a:t>Suporte a C# e Python atualmente</a:t>
+            </a:r>
+            <a:endParaRPr sz="975" b="0" dirty="0">
+              <a:solidFill>
+                <a:srgbClr val="111111"/>
+              </a:solidFill>
+              <a:latin typeface="Arial"/>
+              <a:ea typeface="Arial"/>
+              <a:cs typeface="Arial"/>
+            </a:endParaRPr>
+          </a:p>
+        </p:txBody>
+      </p:sp>
+      <p:sp>
+        <p:nvSpPr>
+          <p:cNvPr id="21" name="Rectangle 20">
+            <a:extLst>
+              <a:ext uri="{FF2B5EF4-FFF2-40B4-BE49-F238E27FC236}">
+                <a16:creationId xmlns:a16="http://schemas.microsoft.com/office/drawing/2014/main" id="{69C1B772-ED37-05D5-7B4E-3BC002AC6F0E}"/>
+              </a:ext>
+            </a:extLst>
+          </p:cNvPr>
+          <p:cNvSpPr>
+            <a:spLocks noGrp="1"/>
+          </p:cNvSpPr>
+          <p:nvPr/>
+        </p:nvSpPr>
+        <p:spPr>
+          <a:xfrm>
+            <a:off x="876300" y="3857625"/>
+            <a:ext cx="6953250" cy="333375"/>
+          </a:xfrm>
+          <a:prstGeom prst="rect">
+            <a:avLst/>
+          </a:prstGeom>
+          <a:solidFill>
+            <a:srgbClr val="000000">
+              <a:alpha val="0"/>
+            </a:srgbClr>
+          </a:solidFill>
+          <a:ln w="0">
+            <a:solidFill>
+              <a:srgbClr val="000000">
+                <a:alpha val="0"/>
+              </a:srgbClr>
+            </a:solidFill>
+            <a:prstDash val="solid"/>
+          </a:ln>
+        </p:spPr>
+        <p:txBody>
+          <a:bodyPr lIns="0" tIns="0" rIns="0" bIns="0" anchor="t"/>
+          <a:lstStyle/>
+          <a:p>
+            <a:pPr algn="ctr">
+              <a:defRPr sz="1500" b="1">
+                <a:solidFill>
+                  <a:srgbClr val="111111"/>
+                </a:solidFill>
+                <a:latin typeface="Arial"/>
+                <a:ea typeface="Arial"/>
+                <a:cs typeface="Arial"/>
+              </a:defRPr>
+            </a:pPr>
+            <a:r>
+              <a:rPr lang="en-US" sz="1500" b="1" dirty="0">
+                <a:solidFill>
+                  <a:srgbClr val="111111"/>
+                </a:solidFill>
+                <a:latin typeface="Arial"/>
+                <a:ea typeface="Arial"/>
+                <a:cs typeface="Arial"/>
+              </a:rPr>
+              <a:t>https://</a:t>
+            </a:r>
+            <a:r>
+              <a:rPr lang="en-US" sz="1500" b="1" dirty="0" err="1">
+                <a:solidFill>
+                  <a:srgbClr val="111111"/>
+                </a:solidFill>
+                <a:latin typeface="Arial"/>
+                <a:ea typeface="Arial"/>
+                <a:cs typeface="Arial"/>
+              </a:rPr>
+              <a:t>github.com</a:t>
+            </a:r>
+            <a:r>
+              <a:rPr lang="en-US" sz="1500" b="1" dirty="0">
+                <a:solidFill>
+                  <a:srgbClr val="111111"/>
+                </a:solidFill>
+                <a:latin typeface="Arial"/>
+                <a:ea typeface="Arial"/>
+                <a:cs typeface="Arial"/>
+              </a:rPr>
+              <a:t>/</a:t>
+            </a:r>
+            <a:r>
+              <a:rPr lang="en-US" sz="1500" b="1" dirty="0" err="1">
+                <a:solidFill>
+                  <a:srgbClr val="111111"/>
+                </a:solidFill>
+                <a:latin typeface="Arial"/>
+                <a:ea typeface="Arial"/>
+                <a:cs typeface="Arial"/>
+              </a:rPr>
+              <a:t>microsoft</a:t>
+            </a:r>
+            <a:r>
+              <a:rPr lang="en-US" sz="1500" b="1" dirty="0">
+                <a:solidFill>
+                  <a:srgbClr val="111111"/>
+                </a:solidFill>
+                <a:latin typeface="Arial"/>
+                <a:ea typeface="Arial"/>
+                <a:cs typeface="Arial"/>
+              </a:rPr>
+              <a:t>/agent-framework</a:t>
+            </a:r>
+            <a:endParaRPr sz="1500" b="1" dirty="0">
+              <a:solidFill>
+                <a:srgbClr val="111111"/>
+              </a:solidFill>
+              <a:latin typeface="Arial"/>
+              <a:ea typeface="Arial"/>
+              <a:cs typeface="Arial"/>
+            </a:endParaRPr>
           </a:p>
         </p:txBody>
       </p:sp>
     </p:spTree>
     <p:extLst>
       <p:ext uri="{BB962C8B-B14F-4D97-AF65-F5344CB8AC3E}">
-        <p14:creationId xmlns:p14="http://schemas.microsoft.com/office/powerpoint/2010/main" val="1348552864"/>
+        <p14:creationId xmlns:p14="http://schemas.microsoft.com/office/powerpoint/2010/main" val="444396227"/>
       </p:ext>
     </p:extLst>
   </p:cSld>
@@ -4154,7 +4281,7 @@
       </p:grpSpPr>
       <p:pic>
         <p:nvPicPr>
-          <p:cNvPr id="26" name="Image 0"/>
+          <p:cNvPr id="25" name="Image 0"/>
           <p:cNvPicPr>
             <a:picLocks noChangeAspect="1"/>
           </p:cNvPicPr>
@@ -4178,22 +4305,22 @@
       </p:pic>
       <p:sp>
         <p:nvSpPr>
-          <p:cNvPr id="3" name="Rectangle 2">
-            <a:extLst>
-              <a:ext uri="{FF2B5EF4-FFF2-40B4-BE49-F238E27FC236}">
-                <a16:creationId xmlns:a16="http://schemas.microsoft.com/office/drawing/2014/main" id="{4B2C17C4-5A16-4E71-A0D2-6092C57E821E}"/>
-              </a:ext>
-            </a:extLst>
-          </p:cNvPr>
-          <p:cNvSpPr>
-            <a:spLocks noGrp="1"/>
-          </p:cNvSpPr>
-          <p:nvPr/>
-        </p:nvSpPr>
-        <p:spPr>
-          <a:xfrm>
-            <a:off x="457200" y="552450"/>
-            <a:ext cx="5619750" cy="685800"/>
+          <p:cNvPr id="2" name="Rectangle 1">
+            <a:extLst>
+              <a:ext uri="{FF2B5EF4-FFF2-40B4-BE49-F238E27FC236}">
+                <a16:creationId xmlns:a16="http://schemas.microsoft.com/office/drawing/2014/main" id="{9988E1B1-76FE-4502-86A6-D2FE6C275695}"/>
+              </a:ext>
+            </a:extLst>
+          </p:cNvPr>
+          <p:cNvSpPr>
+            <a:spLocks noGrp="1"/>
+          </p:cNvSpPr>
+          <p:nvPr/>
+        </p:nvSpPr>
+        <p:spPr>
+          <a:xfrm>
+            <a:off x="457200" y="419100"/>
+            <a:ext cx="4000500" cy="171450"/>
           </a:xfrm>
           <a:prstGeom prst="rect">
             <a:avLst/>
@@ -4217,115 +4344,47 @@
           <a:lstStyle/>
           <a:p>
             <a:pPr algn="l">
-              <a:defRPr sz="2625" b="1">
-                <a:solidFill>
-                  <a:srgbClr val="111111"/>
-                </a:solidFill>
-                <a:latin typeface="Arial"/>
-                <a:ea typeface="Arial"/>
-                <a:cs typeface="Arial"/>
+              <a:defRPr sz="675" b="1">
+                <a:solidFill>
+                  <a:srgbClr val="08B8C8"/>
+                </a:solidFill>
+                <a:latin typeface="Courier New"/>
+                <a:ea typeface="Courier New"/>
+                <a:cs typeface="Courier New"/>
               </a:defRPr>
             </a:pPr>
             <a:r>
-              <a:rPr sz="2625" b="1">
-                <a:solidFill>
-                  <a:srgbClr val="111111"/>
-                </a:solidFill>
-                <a:latin typeface="Arial"/>
-                <a:ea typeface="Arial"/>
-                <a:cs typeface="Arial"/>
-              </a:rPr>
-              <a:t>Blazor como cockpit do workflow</a:t>
+              <a:rPr sz="675" b="1">
+                <a:solidFill>
+                  <a:srgbClr val="08B8C8"/>
+                </a:solidFill>
+                <a:latin typeface="Courier New"/>
+                <a:ea typeface="Courier New"/>
+                <a:cs typeface="Courier New"/>
+              </a:rPr>
+              <a:t>/08 DEMO</a:t>
             </a:r>
           </a:p>
         </p:txBody>
       </p:sp>
       <p:sp>
         <p:nvSpPr>
-          <p:cNvPr id="4" name="Rectangle 3">
-            <a:extLst>
-              <a:ext uri="{FF2B5EF4-FFF2-40B4-BE49-F238E27FC236}">
-                <a16:creationId xmlns:a16="http://schemas.microsoft.com/office/drawing/2014/main" id="{BCFBB6C8-84EC-4136-A6DB-A0AB66892E8F}"/>
-              </a:ext>
-            </a:extLst>
-          </p:cNvPr>
-          <p:cNvSpPr>
-            <a:spLocks noGrp="1"/>
-          </p:cNvSpPr>
-          <p:nvPr/>
-        </p:nvSpPr>
-        <p:spPr>
-          <a:xfrm>
-            <a:off x="457200" y="1257300"/>
-            <a:ext cx="800100" cy="66675"/>
-          </a:xfrm>
-          <a:prstGeom prst="rect">
-            <a:avLst/>
-          </a:prstGeom>
-          <a:solidFill>
-            <a:srgbClr val="08B8C8"/>
-          </a:solidFill>
-          <a:ln w="0">
-            <a:solidFill>
-              <a:srgbClr val="000000">
-                <a:alpha val="0"/>
-              </a:srgbClr>
-            </a:solidFill>
-            <a:prstDash val="solid"/>
-          </a:ln>
-        </p:spPr>
-      </p:sp>
-      <p:sp>
-        <p:nvSpPr>
-          <p:cNvPr id="5" name="Rectangle 4">
-            <a:extLst>
-              <a:ext uri="{FF2B5EF4-FFF2-40B4-BE49-F238E27FC236}">
-                <a16:creationId xmlns:a16="http://schemas.microsoft.com/office/drawing/2014/main" id="{57C36E84-6E1F-4E2B-9F1F-9CE6962F28F0}"/>
-              </a:ext>
-            </a:extLst>
-          </p:cNvPr>
-          <p:cNvSpPr>
-            <a:spLocks noGrp="1"/>
-          </p:cNvSpPr>
-          <p:nvPr/>
-        </p:nvSpPr>
-        <p:spPr>
-          <a:xfrm>
-            <a:off x="590550" y="1638300"/>
-            <a:ext cx="1285875" cy="666750"/>
-          </a:xfrm>
-          <a:prstGeom prst="rect">
-            <a:avLst/>
-          </a:prstGeom>
-          <a:solidFill>
-            <a:srgbClr val="111111"/>
-          </a:solidFill>
-          <a:ln w="13335">
-            <a:solidFill>
-              <a:srgbClr val="111111"/>
-            </a:solidFill>
-            <a:prstDash val="solid"/>
-          </a:ln>
-        </p:spPr>
-      </p:sp>
-      <p:sp>
-        <p:nvSpPr>
-          <p:cNvPr id="6" name="Rectangle 5">
-            <a:extLst>
-              <a:ext uri="{FF2B5EF4-FFF2-40B4-BE49-F238E27FC236}">
-                <a16:creationId xmlns:a16="http://schemas.microsoft.com/office/drawing/2014/main" id="{F6082241-7DFE-4B9F-8B30-84CF3C0218B5}"/>
-              </a:ext>
-            </a:extLst>
-          </p:cNvPr>
-          <p:cNvSpPr>
-            <a:spLocks noGrp="1"/>
-          </p:cNvSpPr>
-          <p:nvPr/>
-        </p:nvSpPr>
-        <p:spPr>
-          <a:xfrm>
-            <a:off x="666750" y="1724025"/>
-            <a:ext cx="1133475" cy="533400"/>
+          <p:cNvPr id="3" name="Rectangle 2">
+            <a:extLst>
+              <a:ext uri="{FF2B5EF4-FFF2-40B4-BE49-F238E27FC236}">
+                <a16:creationId xmlns:a16="http://schemas.microsoft.com/office/drawing/2014/main" id="{A6FAAF43-71EB-4925-8AE6-C0983CAC4D29}"/>
+              </a:ext>
+            </a:extLst>
+          </p:cNvPr>
+          <p:cNvSpPr>
+            <a:spLocks noGrp="1"/>
+          </p:cNvSpPr>
+          <p:nvPr/>
+        </p:nvSpPr>
+        <p:spPr>
+          <a:xfrm>
+            <a:off x="457199" y="666750"/>
+            <a:ext cx="6459583" cy="685800"/>
           </a:xfrm>
           <a:prstGeom prst="rect">
             <a:avLst/>
@@ -4345,13 +4404,13 @@
           </a:ln>
         </p:spPr>
         <p:txBody>
-          <a:bodyPr lIns="0" tIns="0" rIns="0" bIns="0" anchor="ctr"/>
+          <a:bodyPr lIns="0" tIns="0" rIns="0" bIns="0" anchor="t"/>
           <a:lstStyle/>
           <a:p>
-            <a:pPr algn="ctr">
-              <a:defRPr sz="975" b="1">
-                <a:solidFill>
-                  <a:srgbClr val="FFFFFF"/>
+            <a:pPr algn="l">
+              <a:defRPr sz="2625" b="1">
+                <a:solidFill>
+                  <a:srgbClr val="111111"/>
                 </a:solidFill>
                 <a:latin typeface="Arial"/>
                 <a:ea typeface="Arial"/>
@@ -4359,95 +4418,100 @@
               </a:defRPr>
             </a:pPr>
             <a:r>
-              <a:rPr sz="975" b="1">
-                <a:solidFill>
-                  <a:srgbClr val="FFFFFF"/>
-                </a:solidFill>
-                <a:latin typeface="Arial"/>
-                <a:ea typeface="Arial"/>
-                <a:cs typeface="Arial"/>
-              </a:rPr>
-              <a:t>Blazor UI</a:t>
-            </a:r>
-          </a:p>
-          <a:p>
-            <a:pPr algn="ctr">
-              <a:defRPr sz="975" b="1">
-                <a:solidFill>
-                  <a:srgbClr val="FFFFFF"/>
-                </a:solidFill>
-                <a:latin typeface="Arial"/>
-                <a:ea typeface="Arial"/>
-                <a:cs typeface="Arial"/>
-              </a:defRPr>
-            </a:pPr>
-            <a:r>
-              <a:rPr sz="975" b="1">
-                <a:solidFill>
-                  <a:srgbClr val="FFFFFF"/>
-                </a:solidFill>
-                <a:latin typeface="Arial"/>
-                <a:ea typeface="Arial"/>
-                <a:cs typeface="Arial"/>
-              </a:rPr>
-              <a:t>stream + estado</a:t>
-            </a:r>
+              <a:rPr sz="2625" b="1" dirty="0">
+                <a:solidFill>
+                  <a:srgbClr val="111111"/>
+                </a:solidFill>
+                <a:latin typeface="Arial"/>
+                <a:ea typeface="Arial"/>
+                <a:cs typeface="Arial"/>
+              </a:rPr>
+              <a:t>Demo: do </a:t>
+            </a:r>
+            <a:r>
+              <a:rPr sz="2625" b="1" dirty="0" err="1">
+                <a:solidFill>
+                  <a:srgbClr val="111111"/>
+                </a:solidFill>
+                <a:latin typeface="Arial"/>
+                <a:ea typeface="Arial"/>
+                <a:cs typeface="Arial"/>
+              </a:rPr>
+              <a:t>objetivo</a:t>
+            </a:r>
+            <a:r>
+              <a:rPr sz="2625" b="1" dirty="0">
+                <a:solidFill>
+                  <a:srgbClr val="111111"/>
+                </a:solidFill>
+                <a:latin typeface="Arial"/>
+                <a:ea typeface="Arial"/>
+                <a:cs typeface="Arial"/>
+              </a:rPr>
+              <a:t> </a:t>
+            </a:r>
+            <a:r>
+              <a:rPr sz="2625" b="1" dirty="0" err="1">
+                <a:solidFill>
+                  <a:srgbClr val="111111"/>
+                </a:solidFill>
+                <a:latin typeface="Arial"/>
+                <a:ea typeface="Arial"/>
+                <a:cs typeface="Arial"/>
+              </a:rPr>
+              <a:t>ao</a:t>
+            </a:r>
+            <a:r>
+              <a:rPr sz="2625" b="1" dirty="0">
+                <a:solidFill>
+                  <a:srgbClr val="111111"/>
+                </a:solidFill>
+                <a:latin typeface="Arial"/>
+                <a:ea typeface="Arial"/>
+                <a:cs typeface="Arial"/>
+              </a:rPr>
+              <a:t> plano </a:t>
+            </a:r>
+            <a:r>
+              <a:rPr sz="2625" b="1" dirty="0" err="1">
+                <a:solidFill>
+                  <a:srgbClr val="111111"/>
+                </a:solidFill>
+                <a:latin typeface="Arial"/>
+                <a:ea typeface="Arial"/>
+                <a:cs typeface="Arial"/>
+              </a:rPr>
+              <a:t>revisado</a:t>
+            </a:r>
+            <a:endParaRPr sz="2625" b="1" dirty="0">
+              <a:solidFill>
+                <a:srgbClr val="111111"/>
+              </a:solidFill>
+              <a:latin typeface="Arial"/>
+              <a:ea typeface="Arial"/>
+              <a:cs typeface="Arial"/>
+            </a:endParaRPr>
           </a:p>
         </p:txBody>
       </p:sp>
       <p:sp>
         <p:nvSpPr>
-          <p:cNvPr id="7" name="Rectangle 6">
-            <a:extLst>
-              <a:ext uri="{FF2B5EF4-FFF2-40B4-BE49-F238E27FC236}">
-                <a16:creationId xmlns:a16="http://schemas.microsoft.com/office/drawing/2014/main" id="{2C8BF201-2A20-404D-B2DF-73585A39E6F7}"/>
-              </a:ext>
-            </a:extLst>
-          </p:cNvPr>
-          <p:cNvSpPr>
-            <a:spLocks noGrp="1"/>
-          </p:cNvSpPr>
-          <p:nvPr/>
-        </p:nvSpPr>
-        <p:spPr>
-          <a:xfrm>
-            <a:off x="1876425" y="1962150"/>
-            <a:ext cx="457200" cy="28575"/>
-          </a:xfrm>
-          <a:prstGeom prst="rect">
-            <a:avLst/>
-          </a:prstGeom>
-          <a:solidFill>
-            <a:srgbClr val="111111"/>
-          </a:solidFill>
-          <a:ln w="0">
-            <a:solidFill>
-              <a:srgbClr val="000000">
-                <a:alpha val="0"/>
-              </a:srgbClr>
-            </a:solidFill>
-            <a:prstDash val="solid"/>
-          </a:ln>
-        </p:spPr>
-      </p:sp>
-      <p:sp>
-        <p:nvSpPr>
-          <p:cNvPr id="8" name="Rectangle 7">
-            <a:extLst>
-              <a:ext uri="{FF2B5EF4-FFF2-40B4-BE49-F238E27FC236}">
-                <a16:creationId xmlns:a16="http://schemas.microsoft.com/office/drawing/2014/main" id="{A7D7A3D6-B550-436C-BB41-4B483E58DF77}"/>
-              </a:ext>
-            </a:extLst>
-          </p:cNvPr>
-          <p:cNvSpPr>
-            <a:spLocks noGrp="1"/>
-          </p:cNvSpPr>
-          <p:nvPr/>
-        </p:nvSpPr>
-        <p:spPr>
-          <a:xfrm>
-            <a:off x="2333625" y="1638300"/>
-            <a:ext cx="1285875" cy="666750"/>
+          <p:cNvPr id="4" name="Rectangle 3">
+            <a:extLst>
+              <a:ext uri="{FF2B5EF4-FFF2-40B4-BE49-F238E27FC236}">
+                <a16:creationId xmlns:a16="http://schemas.microsoft.com/office/drawing/2014/main" id="{6A48706F-ADC4-4AC4-BA56-820B66076433}"/>
+              </a:ext>
+            </a:extLst>
+          </p:cNvPr>
+          <p:cNvSpPr>
+            <a:spLocks noGrp="1"/>
+          </p:cNvSpPr>
+          <p:nvPr/>
+        </p:nvSpPr>
+        <p:spPr>
+          <a:xfrm>
+            <a:off x="457200" y="1371600"/>
+            <a:ext cx="800100" cy="66675"/>
           </a:xfrm>
           <a:prstGeom prst="rect">
             <a:avLst/>
@@ -4455,32 +4519,34 @@
           <a:solidFill>
             <a:srgbClr val="08B8C8"/>
           </a:solidFill>
-          <a:ln w="13335">
-            <a:solidFill>
-              <a:srgbClr val="111111"/>
-            </a:solidFill>
-            <a:prstDash val="solid"/>
-          </a:ln>
-        </p:spPr>
-      </p:sp>
-      <p:sp>
-        <p:nvSpPr>
-          <p:cNvPr id="9" name="Rectangle 8">
-            <a:extLst>
-              <a:ext uri="{FF2B5EF4-FFF2-40B4-BE49-F238E27FC236}">
-                <a16:creationId xmlns:a16="http://schemas.microsoft.com/office/drawing/2014/main" id="{26C35BA3-7ECB-4A22-A79F-DAB34F5A3B7F}"/>
-              </a:ext>
-            </a:extLst>
-          </p:cNvPr>
-          <p:cNvSpPr>
-            <a:spLocks noGrp="1"/>
-          </p:cNvSpPr>
-          <p:nvPr/>
-        </p:nvSpPr>
-        <p:spPr>
-          <a:xfrm>
-            <a:off x="2409825" y="1724025"/>
-            <a:ext cx="1133475" cy="533400"/>
+          <a:ln w="0">
+            <a:solidFill>
+              <a:srgbClr val="000000">
+                <a:alpha val="0"/>
+              </a:srgbClr>
+            </a:solidFill>
+            <a:prstDash val="solid"/>
+          </a:ln>
+        </p:spPr>
+      </p:sp>
+      <p:sp>
+        <p:nvSpPr>
+          <p:cNvPr id="5" name="Rectangle 4">
+            <a:extLst>
+              <a:ext uri="{FF2B5EF4-FFF2-40B4-BE49-F238E27FC236}">
+                <a16:creationId xmlns:a16="http://schemas.microsoft.com/office/drawing/2014/main" id="{EBFB24DD-4DD9-4739-8D73-AE0630AAB85B}"/>
+              </a:ext>
+            </a:extLst>
+          </p:cNvPr>
+          <p:cNvSpPr>
+            <a:spLocks noGrp="1"/>
+          </p:cNvSpPr>
+          <p:nvPr/>
+        </p:nvSpPr>
+        <p:spPr>
+          <a:xfrm>
+            <a:off x="457200" y="1571625"/>
+            <a:ext cx="2476500" cy="247650"/>
           </a:xfrm>
           <a:prstGeom prst="rect">
             <a:avLst/>
@@ -4500,13 +4566,13 @@
           </a:ln>
         </p:spPr>
         <p:txBody>
-          <a:bodyPr lIns="0" tIns="0" rIns="0" bIns="0" anchor="ctr"/>
+          <a:bodyPr lIns="0" tIns="0" rIns="0" bIns="0" anchor="t"/>
           <a:lstStyle/>
           <a:p>
-            <a:pPr algn="ctr">
-              <a:defRPr sz="975" b="1">
-                <a:solidFill>
-                  <a:srgbClr val="FFFFFF"/>
+            <a:pPr algn="l">
+              <a:defRPr sz="1500" b="1">
+                <a:solidFill>
+                  <a:srgbClr val="111111"/>
                 </a:solidFill>
                 <a:latin typeface="Arial"/>
                 <a:ea typeface="Arial"/>
@@ -4514,128 +4580,37 @@
               </a:defRPr>
             </a:pPr>
             <a:r>
-              <a:rPr sz="975" b="1">
-                <a:solidFill>
-                  <a:srgbClr val="FFFFFF"/>
-                </a:solidFill>
-                <a:latin typeface="Arial"/>
-                <a:ea typeface="Arial"/>
-                <a:cs typeface="Arial"/>
-              </a:rPr>
-              <a:t>.NET API</a:t>
-            </a:r>
-          </a:p>
-          <a:p>
-            <a:pPr algn="ctr">
-              <a:defRPr sz="975" b="1">
-                <a:solidFill>
-                  <a:srgbClr val="FFFFFF"/>
-                </a:solidFill>
-                <a:latin typeface="Arial"/>
-                <a:ea typeface="Arial"/>
-                <a:cs typeface="Arial"/>
-              </a:defRPr>
-            </a:pPr>
-            <a:r>
-              <a:rPr sz="975" b="1">
-                <a:solidFill>
-                  <a:srgbClr val="FFFFFF"/>
-                </a:solidFill>
-                <a:latin typeface="Arial"/>
-                <a:ea typeface="Arial"/>
-                <a:cs typeface="Arial"/>
-              </a:rPr>
-              <a:t>Workflow host</a:t>
+              <a:rPr sz="1500" b="1">
+                <a:solidFill>
+                  <a:srgbClr val="111111"/>
+                </a:solidFill>
+                <a:latin typeface="Arial"/>
+                <a:ea typeface="Arial"/>
+                <a:cs typeface="Arial"/>
+              </a:rPr>
+              <a:t>Cenário proposto</a:t>
             </a:r>
           </a:p>
         </p:txBody>
       </p:sp>
       <p:sp>
         <p:nvSpPr>
-          <p:cNvPr id="10" name="Rectangle 9">
-            <a:extLst>
-              <a:ext uri="{FF2B5EF4-FFF2-40B4-BE49-F238E27FC236}">
-                <a16:creationId xmlns:a16="http://schemas.microsoft.com/office/drawing/2014/main" id="{5996E9A6-9735-434F-86F1-E4C7B2DEE73F}"/>
-              </a:ext>
-            </a:extLst>
-          </p:cNvPr>
-          <p:cNvSpPr>
-            <a:spLocks noGrp="1"/>
-          </p:cNvSpPr>
-          <p:nvPr/>
-        </p:nvSpPr>
-        <p:spPr>
-          <a:xfrm>
-            <a:off x="3619500" y="1962150"/>
-            <a:ext cx="438150" cy="28575"/>
-          </a:xfrm>
-          <a:prstGeom prst="rect">
-            <a:avLst/>
-          </a:prstGeom>
-          <a:solidFill>
-            <a:srgbClr val="111111"/>
-          </a:solidFill>
-          <a:ln w="0">
-            <a:solidFill>
-              <a:srgbClr val="000000">
-                <a:alpha val="0"/>
-              </a:srgbClr>
-            </a:solidFill>
-            <a:prstDash val="solid"/>
-          </a:ln>
-        </p:spPr>
-      </p:sp>
-      <p:sp>
-        <p:nvSpPr>
-          <p:cNvPr id="11" name="Rectangle 10">
-            <a:extLst>
-              <a:ext uri="{FF2B5EF4-FFF2-40B4-BE49-F238E27FC236}">
-                <a16:creationId xmlns:a16="http://schemas.microsoft.com/office/drawing/2014/main" id="{7382C47A-0225-485E-A81B-36B5D6B6B602}"/>
-              </a:ext>
-            </a:extLst>
-          </p:cNvPr>
-          <p:cNvSpPr>
-            <a:spLocks noGrp="1"/>
-          </p:cNvSpPr>
-          <p:nvPr/>
-        </p:nvSpPr>
-        <p:spPr>
-          <a:xfrm>
-            <a:off x="4057650" y="1638300"/>
-            <a:ext cx="1285875" cy="666750"/>
-          </a:xfrm>
-          <a:prstGeom prst="rect">
-            <a:avLst/>
-          </a:prstGeom>
-          <a:solidFill>
-            <a:srgbClr val="FFFFFF"/>
-          </a:solidFill>
-          <a:ln w="13335">
-            <a:solidFill>
-              <a:srgbClr val="111111"/>
-            </a:solidFill>
-            <a:prstDash val="solid"/>
-          </a:ln>
-        </p:spPr>
-      </p:sp>
-      <p:sp>
-        <p:nvSpPr>
-          <p:cNvPr id="12" name="Rectangle 11">
-            <a:extLst>
-              <a:ext uri="{FF2B5EF4-FFF2-40B4-BE49-F238E27FC236}">
-                <a16:creationId xmlns:a16="http://schemas.microsoft.com/office/drawing/2014/main" id="{A622F060-E9A0-4330-BED8-167111375699}"/>
-              </a:ext>
-            </a:extLst>
-          </p:cNvPr>
-          <p:cNvSpPr>
-            <a:spLocks noGrp="1"/>
-          </p:cNvSpPr>
-          <p:nvPr/>
-        </p:nvSpPr>
-        <p:spPr>
-          <a:xfrm>
-            <a:off x="4133850" y="1724025"/>
-            <a:ext cx="1133475" cy="533400"/>
+          <p:cNvPr id="6" name="Rectangle 5">
+            <a:extLst>
+              <a:ext uri="{FF2B5EF4-FFF2-40B4-BE49-F238E27FC236}">
+                <a16:creationId xmlns:a16="http://schemas.microsoft.com/office/drawing/2014/main" id="{C617DF89-C18A-4CC7-BBF4-89ABA506C926}"/>
+              </a:ext>
+            </a:extLst>
+          </p:cNvPr>
+          <p:cNvSpPr>
+            <a:spLocks noGrp="1"/>
+          </p:cNvSpPr>
+          <p:nvPr/>
+        </p:nvSpPr>
+        <p:spPr>
+          <a:xfrm>
+            <a:off x="457200" y="1952625"/>
+            <a:ext cx="5334000" cy="838200"/>
           </a:xfrm>
           <a:prstGeom prst="rect">
             <a:avLst/>
@@ -4655,11 +4630,11 @@
           </a:ln>
         </p:spPr>
         <p:txBody>
-          <a:bodyPr lIns="0" tIns="0" rIns="0" bIns="0" anchor="ctr"/>
+          <a:bodyPr lIns="0" tIns="0" rIns="0" bIns="0" anchor="t"/>
           <a:lstStyle/>
           <a:p>
-            <a:pPr algn="ctr">
-              <a:defRPr sz="975" b="1">
+            <a:pPr algn="l">
+              <a:defRPr sz="1275" b="0">
                 <a:solidFill>
                   <a:srgbClr val="111111"/>
                 </a:solidFill>
@@ -4669,60 +4644,37 @@
               </a:defRPr>
             </a:pPr>
             <a:r>
-              <a:rPr sz="975" b="1">
-                <a:solidFill>
-                  <a:srgbClr val="111111"/>
-                </a:solidFill>
-                <a:latin typeface="Arial"/>
-                <a:ea typeface="Arial"/>
-                <a:cs typeface="Arial"/>
-              </a:rPr>
-              <a:t>Agent</a:t>
-            </a:r>
-          </a:p>
-          <a:p>
-            <a:pPr algn="ctr">
-              <a:defRPr sz="975" b="1">
-                <a:solidFill>
-                  <a:srgbClr val="111111"/>
-                </a:solidFill>
-                <a:latin typeface="Arial"/>
-                <a:ea typeface="Arial"/>
-                <a:cs typeface="Arial"/>
-              </a:defRPr>
-            </a:pPr>
-            <a:r>
-              <a:rPr sz="975" b="1">
-                <a:solidFill>
-                  <a:srgbClr val="111111"/>
-                </a:solidFill>
-                <a:latin typeface="Arial"/>
-                <a:ea typeface="Arial"/>
-                <a:cs typeface="Arial"/>
-              </a:rPr>
-              <a:t>Workflow</a:t>
+              <a:rPr sz="1275" b="0">
+                <a:solidFill>
+                  <a:srgbClr val="111111"/>
+                </a:solidFill>
+                <a:latin typeface="Arial"/>
+                <a:ea typeface="Arial"/>
+                <a:cs typeface="Arial"/>
+              </a:rPr>
+              <a:t>Um usuário informa um objetivo. O workflow divide a tarefa, aciona agentes especializados, acompanha eventos em tempo real e entrega um plano final com justificativa e riscos.</a:t>
             </a:r>
           </a:p>
         </p:txBody>
       </p:sp>
       <p:sp>
         <p:nvSpPr>
-          <p:cNvPr id="13" name="Rectangle 12">
-            <a:extLst>
-              <a:ext uri="{FF2B5EF4-FFF2-40B4-BE49-F238E27FC236}">
-                <a16:creationId xmlns:a16="http://schemas.microsoft.com/office/drawing/2014/main" id="{A75AEAA0-9273-4C61-A403-F82AB7738E3E}"/>
-              </a:ext>
-            </a:extLst>
-          </p:cNvPr>
-          <p:cNvSpPr>
-            <a:spLocks noGrp="1"/>
-          </p:cNvSpPr>
-          <p:nvPr/>
-        </p:nvSpPr>
-        <p:spPr>
-          <a:xfrm>
-            <a:off x="5343525" y="1962150"/>
-            <a:ext cx="438150" cy="28575"/>
+          <p:cNvPr id="7" name="Rectangle 6">
+            <a:extLst>
+              <a:ext uri="{FF2B5EF4-FFF2-40B4-BE49-F238E27FC236}">
+                <a16:creationId xmlns:a16="http://schemas.microsoft.com/office/drawing/2014/main" id="{536786B9-5C16-459A-AB37-D50ED8207927}"/>
+              </a:ext>
+            </a:extLst>
+          </p:cNvPr>
+          <p:cNvSpPr>
+            <a:spLocks noGrp="1"/>
+          </p:cNvSpPr>
+          <p:nvPr/>
+        </p:nvSpPr>
+        <p:spPr>
+          <a:xfrm>
+            <a:off x="533400" y="3238500"/>
+            <a:ext cx="723900" cy="457200"/>
           </a:xfrm>
           <a:prstGeom prst="rect">
             <a:avLst/>
@@ -4730,41 +4682,6 @@
           <a:solidFill>
             <a:srgbClr val="111111"/>
           </a:solidFill>
-          <a:ln w="0">
-            <a:solidFill>
-              <a:srgbClr val="000000">
-                <a:alpha val="0"/>
-              </a:srgbClr>
-            </a:solidFill>
-            <a:prstDash val="solid"/>
-          </a:ln>
-        </p:spPr>
-      </p:sp>
-      <p:sp>
-        <p:nvSpPr>
-          <p:cNvPr id="14" name="Rectangle 13">
-            <a:extLst>
-              <a:ext uri="{FF2B5EF4-FFF2-40B4-BE49-F238E27FC236}">
-                <a16:creationId xmlns:a16="http://schemas.microsoft.com/office/drawing/2014/main" id="{26647AB0-0512-42D5-97D0-E4BA9C594C31}"/>
-              </a:ext>
-            </a:extLst>
-          </p:cNvPr>
-          <p:cNvSpPr>
-            <a:spLocks noGrp="1"/>
-          </p:cNvSpPr>
-          <p:nvPr/>
-        </p:nvSpPr>
-        <p:spPr>
-          <a:xfrm>
-            <a:off x="5781675" y="1638300"/>
-            <a:ext cx="1381125" cy="666750"/>
-          </a:xfrm>
-          <a:prstGeom prst="rect">
-            <a:avLst/>
-          </a:prstGeom>
-          <a:solidFill>
-            <a:srgbClr val="ECECEC"/>
-          </a:solidFill>
           <a:ln w="13335">
             <a:solidFill>
               <a:srgbClr val="111111"/>
@@ -4775,22 +4692,22 @@
       </p:sp>
       <p:sp>
         <p:nvSpPr>
-          <p:cNvPr id="15" name="Rectangle 14">
-            <a:extLst>
-              <a:ext uri="{FF2B5EF4-FFF2-40B4-BE49-F238E27FC236}">
-                <a16:creationId xmlns:a16="http://schemas.microsoft.com/office/drawing/2014/main" id="{B37BA5E1-1FC3-4328-8F4D-D7A838794310}"/>
-              </a:ext>
-            </a:extLst>
-          </p:cNvPr>
-          <p:cNvSpPr>
-            <a:spLocks noGrp="1"/>
-          </p:cNvSpPr>
-          <p:nvPr/>
-        </p:nvSpPr>
-        <p:spPr>
-          <a:xfrm>
-            <a:off x="5857875" y="1724025"/>
-            <a:ext cx="1228725" cy="533400"/>
+          <p:cNvPr id="8" name="Rectangle 7">
+            <a:extLst>
+              <a:ext uri="{FF2B5EF4-FFF2-40B4-BE49-F238E27FC236}">
+                <a16:creationId xmlns:a16="http://schemas.microsoft.com/office/drawing/2014/main" id="{D3DA8EB9-D673-4985-9A7F-808F49FC7D4E}"/>
+              </a:ext>
+            </a:extLst>
+          </p:cNvPr>
+          <p:cNvSpPr>
+            <a:spLocks noGrp="1"/>
+          </p:cNvSpPr>
+          <p:nvPr/>
+        </p:nvSpPr>
+        <p:spPr>
+          <a:xfrm>
+            <a:off x="609600" y="3298101"/>
+            <a:ext cx="571500" cy="323850"/>
           </a:xfrm>
           <a:prstGeom prst="rect">
             <a:avLst/>
@@ -4814,9 +4731,9 @@
           <a:lstStyle/>
           <a:p>
             <a:pPr algn="ctr">
-              <a:defRPr sz="975" b="1">
-                <a:solidFill>
-                  <a:srgbClr val="111111"/>
+              <a:defRPr sz="825" b="1">
+                <a:solidFill>
+                  <a:srgbClr val="FFFFFF"/>
                 </a:solidFill>
                 <a:latin typeface="Arial"/>
                 <a:ea typeface="Arial"/>
@@ -4824,60 +4741,80 @@
               </a:defRPr>
             </a:pPr>
             <a:r>
-              <a:rPr sz="975" b="1">
-                <a:solidFill>
-                  <a:srgbClr val="111111"/>
-                </a:solidFill>
-                <a:latin typeface="Arial"/>
-                <a:ea typeface="Arial"/>
-                <a:cs typeface="Arial"/>
-              </a:rPr>
-              <a:t>Azure OpenAI</a:t>
-            </a:r>
-          </a:p>
-          <a:p>
-            <a:pPr algn="ctr">
-              <a:defRPr sz="975" b="1">
-                <a:solidFill>
-                  <a:srgbClr val="111111"/>
-                </a:solidFill>
-                <a:latin typeface="Arial"/>
-                <a:ea typeface="Arial"/>
-                <a:cs typeface="Arial"/>
-              </a:defRPr>
-            </a:pPr>
-            <a:r>
-              <a:rPr sz="975" b="1">
-                <a:solidFill>
-                  <a:srgbClr val="111111"/>
-                </a:solidFill>
-                <a:latin typeface="Arial"/>
-                <a:ea typeface="Arial"/>
-                <a:cs typeface="Arial"/>
-              </a:rPr>
-              <a:t>Foundry</a:t>
-            </a:r>
+              <a:rPr sz="825" b="1" dirty="0" err="1">
+                <a:solidFill>
+                  <a:srgbClr val="FFFFFF"/>
+                </a:solidFill>
+                <a:latin typeface="Arial"/>
+                <a:ea typeface="Arial"/>
+                <a:cs typeface="Arial"/>
+              </a:rPr>
+              <a:t>Objetivo</a:t>
+            </a:r>
+            <a:endParaRPr sz="825" b="1" dirty="0">
+              <a:solidFill>
+                <a:srgbClr val="FFFFFF"/>
+              </a:solidFill>
+              <a:latin typeface="Arial"/>
+              <a:ea typeface="Arial"/>
+              <a:cs typeface="Arial"/>
+            </a:endParaRPr>
           </a:p>
         </p:txBody>
       </p:sp>
       <p:sp>
         <p:nvSpPr>
-          <p:cNvPr id="16" name="Rectangle 15">
-            <a:extLst>
-              <a:ext uri="{FF2B5EF4-FFF2-40B4-BE49-F238E27FC236}">
-                <a16:creationId xmlns:a16="http://schemas.microsoft.com/office/drawing/2014/main" id="{50F8C3AB-06CE-4174-A35B-092ED4309082}"/>
-              </a:ext>
-            </a:extLst>
-          </p:cNvPr>
-          <p:cNvSpPr>
-            <a:spLocks noGrp="1"/>
-          </p:cNvSpPr>
-          <p:nvPr/>
-        </p:nvSpPr>
-        <p:spPr>
-          <a:xfrm>
-            <a:off x="3143250" y="2952750"/>
-            <a:ext cx="990600" cy="457200"/>
+          <p:cNvPr id="9" name="Rectangle 8">
+            <a:extLst>
+              <a:ext uri="{FF2B5EF4-FFF2-40B4-BE49-F238E27FC236}">
+                <a16:creationId xmlns:a16="http://schemas.microsoft.com/office/drawing/2014/main" id="{0C1EA30C-22B4-4327-9EEB-0C5DD570F0F7}"/>
+              </a:ext>
+            </a:extLst>
+          </p:cNvPr>
+          <p:cNvSpPr>
+            <a:spLocks noGrp="1"/>
+          </p:cNvSpPr>
+          <p:nvPr/>
+        </p:nvSpPr>
+        <p:spPr>
+          <a:xfrm>
+            <a:off x="1257300" y="3457575"/>
+            <a:ext cx="152400" cy="28575"/>
+          </a:xfrm>
+          <a:prstGeom prst="rect">
+            <a:avLst/>
+          </a:prstGeom>
+          <a:solidFill>
+            <a:srgbClr val="08B8C8"/>
+          </a:solidFill>
+          <a:ln w="0">
+            <a:solidFill>
+              <a:srgbClr val="000000">
+                <a:alpha val="0"/>
+              </a:srgbClr>
+            </a:solidFill>
+            <a:prstDash val="solid"/>
+          </a:ln>
+        </p:spPr>
+      </p:sp>
+      <p:sp>
+        <p:nvSpPr>
+          <p:cNvPr id="10" name="Rectangle 9">
+            <a:extLst>
+              <a:ext uri="{FF2B5EF4-FFF2-40B4-BE49-F238E27FC236}">
+                <a16:creationId xmlns:a16="http://schemas.microsoft.com/office/drawing/2014/main" id="{B18AAE21-C9DC-4D6A-BB2D-C4BFE88168A3}"/>
+              </a:ext>
+            </a:extLst>
+          </p:cNvPr>
+          <p:cNvSpPr>
+            <a:spLocks noGrp="1"/>
+          </p:cNvSpPr>
+          <p:nvPr/>
+        </p:nvSpPr>
+        <p:spPr>
+          <a:xfrm>
+            <a:off x="1409700" y="3238500"/>
+            <a:ext cx="723900" cy="457200"/>
           </a:xfrm>
           <a:prstGeom prst="rect">
             <a:avLst/>
@@ -4895,22 +4832,22 @@
       </p:sp>
       <p:sp>
         <p:nvSpPr>
-          <p:cNvPr id="24" name="Rectangle 23">
-            <a:extLst>
-              <a:ext uri="{FF2B5EF4-FFF2-40B4-BE49-F238E27FC236}">
-                <a16:creationId xmlns:a16="http://schemas.microsoft.com/office/drawing/2014/main" id="{A3DA33E3-426C-4E33-A7BE-DCDDB01CF732}"/>
-              </a:ext>
-            </a:extLst>
-          </p:cNvPr>
-          <p:cNvSpPr>
-            <a:spLocks noGrp="1"/>
-          </p:cNvSpPr>
-          <p:nvPr/>
-        </p:nvSpPr>
-        <p:spPr>
-          <a:xfrm>
-            <a:off x="2857500" y="2686050"/>
-            <a:ext cx="4000500" cy="1000125"/>
+          <p:cNvPr id="11" name="Rectangle 10">
+            <a:extLst>
+              <a:ext uri="{FF2B5EF4-FFF2-40B4-BE49-F238E27FC236}">
+                <a16:creationId xmlns:a16="http://schemas.microsoft.com/office/drawing/2014/main" id="{3207D62A-590B-42A6-9FBF-C116606312DD}"/>
+              </a:ext>
+            </a:extLst>
+          </p:cNvPr>
+          <p:cNvSpPr>
+            <a:spLocks noGrp="1"/>
+          </p:cNvSpPr>
+          <p:nvPr/>
+        </p:nvSpPr>
+        <p:spPr>
+          <a:xfrm>
+            <a:off x="1485900" y="3298101"/>
+            <a:ext cx="571500" cy="323850"/>
           </a:xfrm>
           <a:prstGeom prst="rect">
             <a:avLst/>
@@ -4920,39 +4857,129 @@
               <a:alpha val="0"/>
             </a:srgbClr>
           </a:solidFill>
-          <a:ln w="19050">
-            <a:solidFill>
-              <a:srgbClr val="08B8C8"/>
+          <a:ln w="0">
+            <a:solidFill>
+              <a:srgbClr val="000000">
+                <a:alpha val="0"/>
+              </a:srgbClr>
             </a:solidFill>
             <a:prstDash val="solid"/>
           </a:ln>
         </p:spPr>
         <p:txBody>
-          <a:bodyPr/>
+          <a:bodyPr lIns="0" tIns="0" rIns="0" bIns="0" anchor="ctr"/>
           <a:lstStyle/>
           <a:p>
-            <a:endParaRPr lang="en-BR" dirty="0"/>
+            <a:pPr algn="ctr">
+              <a:defRPr sz="825" b="1">
+                <a:solidFill>
+                  <a:srgbClr val="111111"/>
+                </a:solidFill>
+                <a:latin typeface="Arial"/>
+                <a:ea typeface="Arial"/>
+                <a:cs typeface="Arial"/>
+              </a:defRPr>
+            </a:pPr>
+            <a:r>
+              <a:rPr sz="825" b="1">
+                <a:solidFill>
+                  <a:srgbClr val="111111"/>
+                </a:solidFill>
+                <a:latin typeface="Arial"/>
+                <a:ea typeface="Arial"/>
+                <a:cs typeface="Arial"/>
+              </a:rPr>
+              <a:t>Plano</a:t>
+            </a:r>
           </a:p>
         </p:txBody>
       </p:sp>
       <p:sp>
         <p:nvSpPr>
-          <p:cNvPr id="17" name="Rectangle 16">
-            <a:extLst>
-              <a:ext uri="{FF2B5EF4-FFF2-40B4-BE49-F238E27FC236}">
-                <a16:creationId xmlns:a16="http://schemas.microsoft.com/office/drawing/2014/main" id="{3BDC0C88-9366-4A0A-9E37-A213307091D5}"/>
-              </a:ext>
-            </a:extLst>
-          </p:cNvPr>
-          <p:cNvSpPr>
-            <a:spLocks noGrp="1"/>
-          </p:cNvSpPr>
-          <p:nvPr/>
-        </p:nvSpPr>
-        <p:spPr>
-          <a:xfrm>
-            <a:off x="3219450" y="3018882"/>
-            <a:ext cx="838200" cy="323850"/>
+          <p:cNvPr id="12" name="Rectangle 11">
+            <a:extLst>
+              <a:ext uri="{FF2B5EF4-FFF2-40B4-BE49-F238E27FC236}">
+                <a16:creationId xmlns:a16="http://schemas.microsoft.com/office/drawing/2014/main" id="{A571FE11-815B-4E43-84BF-3C66E74944CB}"/>
+              </a:ext>
+            </a:extLst>
+          </p:cNvPr>
+          <p:cNvSpPr>
+            <a:spLocks noGrp="1"/>
+          </p:cNvSpPr>
+          <p:nvPr/>
+        </p:nvSpPr>
+        <p:spPr>
+          <a:xfrm>
+            <a:off x="2133600" y="3457575"/>
+            <a:ext cx="152400" cy="28575"/>
+          </a:xfrm>
+          <a:prstGeom prst="rect">
+            <a:avLst/>
+          </a:prstGeom>
+          <a:solidFill>
+            <a:srgbClr val="08B8C8"/>
+          </a:solidFill>
+          <a:ln w="0">
+            <a:solidFill>
+              <a:srgbClr val="000000">
+                <a:alpha val="0"/>
+              </a:srgbClr>
+            </a:solidFill>
+            <a:prstDash val="solid"/>
+          </a:ln>
+        </p:spPr>
+      </p:sp>
+      <p:sp>
+        <p:nvSpPr>
+          <p:cNvPr id="13" name="Rectangle 12">
+            <a:extLst>
+              <a:ext uri="{FF2B5EF4-FFF2-40B4-BE49-F238E27FC236}">
+                <a16:creationId xmlns:a16="http://schemas.microsoft.com/office/drawing/2014/main" id="{E29E0FC1-DB1A-4BC2-BE6E-8A732EE0668D}"/>
+              </a:ext>
+            </a:extLst>
+          </p:cNvPr>
+          <p:cNvSpPr>
+            <a:spLocks noGrp="1"/>
+          </p:cNvSpPr>
+          <p:nvPr/>
+        </p:nvSpPr>
+        <p:spPr>
+          <a:xfrm>
+            <a:off x="2286000" y="3238500"/>
+            <a:ext cx="723900" cy="457200"/>
+          </a:xfrm>
+          <a:prstGeom prst="rect">
+            <a:avLst/>
+          </a:prstGeom>
+          <a:solidFill>
+            <a:srgbClr val="FFFFFF"/>
+          </a:solidFill>
+          <a:ln w="13335">
+            <a:solidFill>
+              <a:srgbClr val="111111"/>
+            </a:solidFill>
+            <a:prstDash val="solid"/>
+          </a:ln>
+        </p:spPr>
+      </p:sp>
+      <p:sp>
+        <p:nvSpPr>
+          <p:cNvPr id="14" name="Rectangle 13">
+            <a:extLst>
+              <a:ext uri="{FF2B5EF4-FFF2-40B4-BE49-F238E27FC236}">
+                <a16:creationId xmlns:a16="http://schemas.microsoft.com/office/drawing/2014/main" id="{A991B892-C6F5-4569-BB2E-5A1636E8A1F2}"/>
+              </a:ext>
+            </a:extLst>
+          </p:cNvPr>
+          <p:cNvSpPr>
+            <a:spLocks noGrp="1"/>
+          </p:cNvSpPr>
+          <p:nvPr/>
+        </p:nvSpPr>
+        <p:spPr>
+          <a:xfrm>
+            <a:off x="2362200" y="3298101"/>
+            <a:ext cx="571500" cy="323850"/>
           </a:xfrm>
           <a:prstGeom prst="rect">
             <a:avLst/>
@@ -4976,7 +5003,7 @@
           <a:lstStyle/>
           <a:p>
             <a:pPr algn="ctr">
-              <a:defRPr sz="975" b="1">
+              <a:defRPr sz="825" b="1">
                 <a:solidFill>
                   <a:srgbClr val="111111"/>
                 </a:solidFill>
@@ -4986,37 +5013,72 @@
               </a:defRPr>
             </a:pPr>
             <a:r>
-              <a:rPr sz="975" b="1" dirty="0">
-                <a:solidFill>
-                  <a:srgbClr val="111111"/>
-                </a:solidFill>
-                <a:latin typeface="Arial"/>
-                <a:ea typeface="Arial"/>
-                <a:cs typeface="Arial"/>
-              </a:rPr>
-              <a:t>Planner</a:t>
+              <a:rPr sz="825" b="1">
+                <a:solidFill>
+                  <a:srgbClr val="111111"/>
+                </a:solidFill>
+                <a:latin typeface="Arial"/>
+                <a:ea typeface="Arial"/>
+                <a:cs typeface="Arial"/>
+              </a:rPr>
+              <a:t>Pesquisa</a:t>
             </a:r>
           </a:p>
         </p:txBody>
       </p:sp>
       <p:sp>
         <p:nvSpPr>
-          <p:cNvPr id="18" name="Rectangle 17">
-            <a:extLst>
-              <a:ext uri="{FF2B5EF4-FFF2-40B4-BE49-F238E27FC236}">
-                <a16:creationId xmlns:a16="http://schemas.microsoft.com/office/drawing/2014/main" id="{71587728-2F17-4261-8FCB-5172DB165E19}"/>
-              </a:ext>
-            </a:extLst>
-          </p:cNvPr>
-          <p:cNvSpPr>
-            <a:spLocks noGrp="1"/>
-          </p:cNvSpPr>
-          <p:nvPr/>
-        </p:nvSpPr>
-        <p:spPr>
-          <a:xfrm>
-            <a:off x="4362450" y="2952750"/>
-            <a:ext cx="990600" cy="457200"/>
+          <p:cNvPr id="15" name="Rectangle 14">
+            <a:extLst>
+              <a:ext uri="{FF2B5EF4-FFF2-40B4-BE49-F238E27FC236}">
+                <a16:creationId xmlns:a16="http://schemas.microsoft.com/office/drawing/2014/main" id="{7A3805A6-6ACE-4E50-BA1D-520492CDD72E}"/>
+              </a:ext>
+            </a:extLst>
+          </p:cNvPr>
+          <p:cNvSpPr>
+            <a:spLocks noGrp="1"/>
+          </p:cNvSpPr>
+          <p:nvPr/>
+        </p:nvSpPr>
+        <p:spPr>
+          <a:xfrm>
+            <a:off x="3009900" y="3457575"/>
+            <a:ext cx="152400" cy="28575"/>
+          </a:xfrm>
+          <a:prstGeom prst="rect">
+            <a:avLst/>
+          </a:prstGeom>
+          <a:solidFill>
+            <a:srgbClr val="08B8C8"/>
+          </a:solidFill>
+          <a:ln w="0">
+            <a:solidFill>
+              <a:srgbClr val="000000">
+                <a:alpha val="0"/>
+              </a:srgbClr>
+            </a:solidFill>
+            <a:prstDash val="solid"/>
+          </a:ln>
+        </p:spPr>
+      </p:sp>
+      <p:sp>
+        <p:nvSpPr>
+          <p:cNvPr id="16" name="Rectangle 15">
+            <a:extLst>
+              <a:ext uri="{FF2B5EF4-FFF2-40B4-BE49-F238E27FC236}">
+                <a16:creationId xmlns:a16="http://schemas.microsoft.com/office/drawing/2014/main" id="{623E322A-4C2C-44B5-9BDD-BD233E4D6B3E}"/>
+              </a:ext>
+            </a:extLst>
+          </p:cNvPr>
+          <p:cNvSpPr>
+            <a:spLocks noGrp="1"/>
+          </p:cNvSpPr>
+          <p:nvPr/>
+        </p:nvSpPr>
+        <p:spPr>
+          <a:xfrm>
+            <a:off x="3162300" y="3238500"/>
+            <a:ext cx="723900" cy="457200"/>
           </a:xfrm>
           <a:prstGeom prst="rect">
             <a:avLst/>
@@ -5034,22 +5096,22 @@
       </p:sp>
       <p:sp>
         <p:nvSpPr>
-          <p:cNvPr id="19" name="Rectangle 18">
-            <a:extLst>
-              <a:ext uri="{FF2B5EF4-FFF2-40B4-BE49-F238E27FC236}">
-                <a16:creationId xmlns:a16="http://schemas.microsoft.com/office/drawing/2014/main" id="{07EA5FE3-9A14-49D4-A810-C39359A8F686}"/>
-              </a:ext>
-            </a:extLst>
-          </p:cNvPr>
-          <p:cNvSpPr>
-            <a:spLocks noGrp="1"/>
-          </p:cNvSpPr>
-          <p:nvPr/>
-        </p:nvSpPr>
-        <p:spPr>
-          <a:xfrm>
-            <a:off x="4438650" y="3018882"/>
-            <a:ext cx="838200" cy="323850"/>
+          <p:cNvPr id="17" name="Rectangle 16">
+            <a:extLst>
+              <a:ext uri="{FF2B5EF4-FFF2-40B4-BE49-F238E27FC236}">
+                <a16:creationId xmlns:a16="http://schemas.microsoft.com/office/drawing/2014/main" id="{1E8C83C0-48BC-4EB5-8D23-2282438B0E2F}"/>
+              </a:ext>
+            </a:extLst>
+          </p:cNvPr>
+          <p:cNvSpPr>
+            <a:spLocks noGrp="1"/>
+          </p:cNvSpPr>
+          <p:nvPr/>
+        </p:nvSpPr>
+        <p:spPr>
+          <a:xfrm>
+            <a:off x="3238500" y="3298101"/>
+            <a:ext cx="571500" cy="323850"/>
           </a:xfrm>
           <a:prstGeom prst="rect">
             <a:avLst/>
@@ -5073,7 +5135,7 @@
           <a:lstStyle/>
           <a:p>
             <a:pPr algn="ctr">
-              <a:defRPr sz="975" b="1">
+              <a:defRPr sz="825" b="1">
                 <a:solidFill>
                   <a:srgbClr val="111111"/>
                 </a:solidFill>
@@ -5083,70 +5145,105 @@
               </a:defRPr>
             </a:pPr>
             <a:r>
-              <a:rPr sz="975" b="1" dirty="0">
-                <a:solidFill>
-                  <a:srgbClr val="111111"/>
-                </a:solidFill>
-                <a:latin typeface="Arial"/>
-                <a:ea typeface="Arial"/>
-                <a:cs typeface="Arial"/>
-              </a:rPr>
-              <a:t>Researcher</a:t>
+              <a:rPr sz="825" b="1">
+                <a:solidFill>
+                  <a:srgbClr val="111111"/>
+                </a:solidFill>
+                <a:latin typeface="Arial"/>
+                <a:ea typeface="Arial"/>
+                <a:cs typeface="Arial"/>
+              </a:rPr>
+              <a:t>Execução</a:t>
             </a:r>
           </a:p>
         </p:txBody>
       </p:sp>
       <p:sp>
         <p:nvSpPr>
+          <p:cNvPr id="18" name="Rectangle 17">
+            <a:extLst>
+              <a:ext uri="{FF2B5EF4-FFF2-40B4-BE49-F238E27FC236}">
+                <a16:creationId xmlns:a16="http://schemas.microsoft.com/office/drawing/2014/main" id="{6CB77C1B-7CBD-4876-830C-6788FA430392}"/>
+              </a:ext>
+            </a:extLst>
+          </p:cNvPr>
+          <p:cNvSpPr>
+            <a:spLocks noGrp="1"/>
+          </p:cNvSpPr>
+          <p:nvPr/>
+        </p:nvSpPr>
+        <p:spPr>
+          <a:xfrm>
+            <a:off x="3886200" y="3457575"/>
+            <a:ext cx="152400" cy="28575"/>
+          </a:xfrm>
+          <a:prstGeom prst="rect">
+            <a:avLst/>
+          </a:prstGeom>
+          <a:solidFill>
+            <a:srgbClr val="08B8C8"/>
+          </a:solidFill>
+          <a:ln w="0">
+            <a:solidFill>
+              <a:srgbClr val="000000">
+                <a:alpha val="0"/>
+              </a:srgbClr>
+            </a:solidFill>
+            <a:prstDash val="solid"/>
+          </a:ln>
+        </p:spPr>
+      </p:sp>
+      <p:sp>
+        <p:nvSpPr>
+          <p:cNvPr id="19" name="Rectangle 18">
+            <a:extLst>
+              <a:ext uri="{FF2B5EF4-FFF2-40B4-BE49-F238E27FC236}">
+                <a16:creationId xmlns:a16="http://schemas.microsoft.com/office/drawing/2014/main" id="{F515A25F-8A84-4B9A-AE24-BEAE02C63DB3}"/>
+              </a:ext>
+            </a:extLst>
+          </p:cNvPr>
+          <p:cNvSpPr>
+            <a:spLocks noGrp="1"/>
+          </p:cNvSpPr>
+          <p:nvPr/>
+        </p:nvSpPr>
+        <p:spPr>
+          <a:xfrm>
+            <a:off x="4038600" y="3238500"/>
+            <a:ext cx="723900" cy="457200"/>
+          </a:xfrm>
+          <a:prstGeom prst="rect">
+            <a:avLst/>
+          </a:prstGeom>
+          <a:solidFill>
+            <a:srgbClr val="FFFFFF"/>
+          </a:solidFill>
+          <a:ln w="13335">
+            <a:solidFill>
+              <a:srgbClr val="111111"/>
+            </a:solidFill>
+            <a:prstDash val="solid"/>
+          </a:ln>
+        </p:spPr>
+      </p:sp>
+      <p:sp>
+        <p:nvSpPr>
           <p:cNvPr id="20" name="Rectangle 19">
             <a:extLst>
               <a:ext uri="{FF2B5EF4-FFF2-40B4-BE49-F238E27FC236}">
-                <a16:creationId xmlns:a16="http://schemas.microsoft.com/office/drawing/2014/main" id="{E2F8AF1D-2BA6-441F-A72B-749C93E43717}"/>
-              </a:ext>
-            </a:extLst>
-          </p:cNvPr>
-          <p:cNvSpPr>
-            <a:spLocks noGrp="1"/>
-          </p:cNvSpPr>
-          <p:nvPr/>
-        </p:nvSpPr>
-        <p:spPr>
-          <a:xfrm>
-            <a:off x="5581650" y="2952750"/>
-            <a:ext cx="990600" cy="457200"/>
-          </a:xfrm>
-          <a:prstGeom prst="rect">
-            <a:avLst/>
-          </a:prstGeom>
-          <a:solidFill>
-            <a:srgbClr val="FFFFFF"/>
-          </a:solidFill>
-          <a:ln w="13335">
-            <a:solidFill>
-              <a:srgbClr val="111111"/>
-            </a:solidFill>
-            <a:prstDash val="solid"/>
-          </a:ln>
-        </p:spPr>
-      </p:sp>
-      <p:sp>
-        <p:nvSpPr>
-          <p:cNvPr id="21" name="Rectangle 20">
-            <a:extLst>
-              <a:ext uri="{FF2B5EF4-FFF2-40B4-BE49-F238E27FC236}">
-                <a16:creationId xmlns:a16="http://schemas.microsoft.com/office/drawing/2014/main" id="{AC684766-4E6D-4FB8-A93D-1762808272B8}"/>
-              </a:ext>
-            </a:extLst>
-          </p:cNvPr>
-          <p:cNvSpPr>
-            <a:spLocks noGrp="1"/>
-          </p:cNvSpPr>
-          <p:nvPr/>
-        </p:nvSpPr>
-        <p:spPr>
-          <a:xfrm>
-            <a:off x="5657850" y="3018882"/>
-            <a:ext cx="838200" cy="323850"/>
+                <a16:creationId xmlns:a16="http://schemas.microsoft.com/office/drawing/2014/main" id="{5A99CD0A-EC99-432F-8D7D-FC2F86DE9094}"/>
+              </a:ext>
+            </a:extLst>
+          </p:cNvPr>
+          <p:cNvSpPr>
+            <a:spLocks noGrp="1"/>
+          </p:cNvSpPr>
+          <p:nvPr/>
+        </p:nvSpPr>
+        <p:spPr>
+          <a:xfrm>
+            <a:off x="4114800" y="3298101"/>
+            <a:ext cx="571500" cy="323850"/>
           </a:xfrm>
           <a:prstGeom prst="rect">
             <a:avLst/>
@@ -5170,7 +5267,7 @@
           <a:lstStyle/>
           <a:p>
             <a:pPr algn="ctr">
-              <a:defRPr sz="975" b="1">
+              <a:defRPr sz="825" b="1">
                 <a:solidFill>
                   <a:srgbClr val="111111"/>
                 </a:solidFill>
@@ -5180,49 +5277,82 @@
               </a:defRPr>
             </a:pPr>
             <a:r>
-              <a:rPr sz="975" b="1" dirty="0">
-                <a:solidFill>
-                  <a:srgbClr val="111111"/>
-                </a:solidFill>
-                <a:latin typeface="Arial"/>
-                <a:ea typeface="Arial"/>
-                <a:cs typeface="Arial"/>
-              </a:rPr>
-              <a:t>Reviewer</a:t>
+              <a:rPr sz="825" b="1">
+                <a:solidFill>
+                  <a:srgbClr val="111111"/>
+                </a:solidFill>
+                <a:latin typeface="Arial"/>
+                <a:ea typeface="Arial"/>
+                <a:cs typeface="Arial"/>
+              </a:rPr>
+              <a:t>Revisão</a:t>
             </a:r>
           </a:p>
         </p:txBody>
       </p:sp>
       <p:sp>
         <p:nvSpPr>
+          <p:cNvPr id="21" name="Rectangle 20">
+            <a:extLst>
+              <a:ext uri="{FF2B5EF4-FFF2-40B4-BE49-F238E27FC236}">
+                <a16:creationId xmlns:a16="http://schemas.microsoft.com/office/drawing/2014/main" id="{B18A313A-64F9-44D6-A3C6-831A2ED74A65}"/>
+              </a:ext>
+            </a:extLst>
+          </p:cNvPr>
+          <p:cNvSpPr>
+            <a:spLocks noGrp="1"/>
+          </p:cNvSpPr>
+          <p:nvPr/>
+        </p:nvSpPr>
+        <p:spPr>
+          <a:xfrm>
+            <a:off x="4762500" y="3457575"/>
+            <a:ext cx="152400" cy="28575"/>
+          </a:xfrm>
+          <a:prstGeom prst="rect">
+            <a:avLst/>
+          </a:prstGeom>
+          <a:solidFill>
+            <a:srgbClr val="08B8C8"/>
+          </a:solidFill>
+          <a:ln w="0">
+            <a:solidFill>
+              <a:srgbClr val="000000">
+                <a:alpha val="0"/>
+              </a:srgbClr>
+            </a:solidFill>
+            <a:prstDash val="solid"/>
+          </a:ln>
+        </p:spPr>
+      </p:sp>
+      <p:sp>
+        <p:nvSpPr>
           <p:cNvPr id="22" name="Rectangle 21">
             <a:extLst>
               <a:ext uri="{FF2B5EF4-FFF2-40B4-BE49-F238E27FC236}">
-                <a16:creationId xmlns:a16="http://schemas.microsoft.com/office/drawing/2014/main" id="{1D0E4B1F-7F48-4CB7-B511-DE57B7670BB1}"/>
-              </a:ext>
-            </a:extLst>
-          </p:cNvPr>
-          <p:cNvSpPr>
-            <a:spLocks noGrp="1"/>
-          </p:cNvSpPr>
-          <p:nvPr/>
-        </p:nvSpPr>
-        <p:spPr>
-          <a:xfrm>
-            <a:off x="4133850" y="3171825"/>
-            <a:ext cx="228600" cy="28575"/>
-          </a:xfrm>
-          <a:prstGeom prst="rect">
-            <a:avLst/>
-          </a:prstGeom>
-          <a:solidFill>
-            <a:srgbClr val="08B8C8"/>
-          </a:solidFill>
-          <a:ln w="0">
-            <a:solidFill>
-              <a:srgbClr val="000000">
-                <a:alpha val="0"/>
-              </a:srgbClr>
+                <a16:creationId xmlns:a16="http://schemas.microsoft.com/office/drawing/2014/main" id="{21E99DFB-A5A4-4775-A688-70F231DB03F0}"/>
+              </a:ext>
+            </a:extLst>
+          </p:cNvPr>
+          <p:cNvSpPr>
+            <a:spLocks noGrp="1"/>
+          </p:cNvSpPr>
+          <p:nvPr/>
+        </p:nvSpPr>
+        <p:spPr>
+          <a:xfrm>
+            <a:off x="4914900" y="3238500"/>
+            <a:ext cx="723900" cy="457200"/>
+          </a:xfrm>
+          <a:prstGeom prst="rect">
+            <a:avLst/>
+          </a:prstGeom>
+          <a:solidFill>
+            <a:srgbClr val="111111"/>
+          </a:solidFill>
+          <a:ln w="13335">
+            <a:solidFill>
+              <a:srgbClr val="111111"/>
             </a:solidFill>
             <a:prstDash val="solid"/>
           </a:ln>
@@ -5233,54 +5363,19 @@
           <p:cNvPr id="23" name="Rectangle 22">
             <a:extLst>
               <a:ext uri="{FF2B5EF4-FFF2-40B4-BE49-F238E27FC236}">
-                <a16:creationId xmlns:a16="http://schemas.microsoft.com/office/drawing/2014/main" id="{CE673C2D-DEAB-42EE-B4AA-7FA3EF75A2C4}"/>
-              </a:ext>
-            </a:extLst>
-          </p:cNvPr>
-          <p:cNvSpPr>
-            <a:spLocks noGrp="1"/>
-          </p:cNvSpPr>
-          <p:nvPr/>
-        </p:nvSpPr>
-        <p:spPr>
-          <a:xfrm>
-            <a:off x="5353050" y="3171825"/>
-            <a:ext cx="228600" cy="28575"/>
-          </a:xfrm>
-          <a:prstGeom prst="rect">
-            <a:avLst/>
-          </a:prstGeom>
-          <a:solidFill>
-            <a:srgbClr val="08B8C8"/>
-          </a:solidFill>
-          <a:ln w="0">
-            <a:solidFill>
-              <a:srgbClr val="000000">
-                <a:alpha val="0"/>
-              </a:srgbClr>
-            </a:solidFill>
-            <a:prstDash val="solid"/>
-          </a:ln>
-        </p:spPr>
-      </p:sp>
-      <p:sp>
-        <p:nvSpPr>
-          <p:cNvPr id="25" name="Rectangle 24">
-            <a:extLst>
-              <a:ext uri="{FF2B5EF4-FFF2-40B4-BE49-F238E27FC236}">
-                <a16:creationId xmlns:a16="http://schemas.microsoft.com/office/drawing/2014/main" id="{60ED0024-B85B-42E1-AF4A-14D1CCE7CE27}"/>
-              </a:ext>
-            </a:extLst>
-          </p:cNvPr>
-          <p:cNvSpPr>
-            <a:spLocks noGrp="1"/>
-          </p:cNvSpPr>
-          <p:nvPr/>
-        </p:nvSpPr>
-        <p:spPr>
-          <a:xfrm>
-            <a:off x="819150" y="4048125"/>
-            <a:ext cx="7048500" cy="266700"/>
+                <a16:creationId xmlns:a16="http://schemas.microsoft.com/office/drawing/2014/main" id="{39E2F292-7321-43DC-A9FE-8DEFB20381FF}"/>
+              </a:ext>
+            </a:extLst>
+          </p:cNvPr>
+          <p:cNvSpPr>
+            <a:spLocks noGrp="1"/>
+          </p:cNvSpPr>
+          <p:nvPr/>
+        </p:nvSpPr>
+        <p:spPr>
+          <a:xfrm>
+            <a:off x="4991100" y="3298101"/>
+            <a:ext cx="571500" cy="323850"/>
           </a:xfrm>
           <a:prstGeom prst="rect">
             <a:avLst/>
@@ -5300,13 +5395,13 @@
           </a:ln>
         </p:spPr>
         <p:txBody>
-          <a:bodyPr lIns="0" tIns="0" rIns="0" bIns="0" anchor="t"/>
+          <a:bodyPr lIns="0" tIns="0" rIns="0" bIns="0" anchor="ctr"/>
           <a:lstStyle/>
           <a:p>
-            <a:pPr algn="l">
-              <a:defRPr sz="1200" b="1">
-                <a:solidFill>
-                  <a:srgbClr val="111111"/>
+            <a:pPr algn="ctr">
+              <a:defRPr sz="825" b="1">
+                <a:solidFill>
+                  <a:srgbClr val="FFFFFF"/>
                 </a:solidFill>
                 <a:latin typeface="Arial"/>
                 <a:ea typeface="Arial"/>
@@ -5314,15 +5409,75 @@
               </a:defRPr>
             </a:pPr>
             <a:r>
-              <a:rPr sz="1200" b="1">
-                <a:solidFill>
-                  <a:srgbClr val="111111"/>
-                </a:solidFill>
-                <a:latin typeface="Arial"/>
-                <a:ea typeface="Arial"/>
-                <a:cs typeface="Arial"/>
-              </a:rPr>
-              <a:t>Ferramentas: APIs, MCP, banco, arquivos, serviços internos</a:t>
+              <a:rPr sz="825" b="1">
+                <a:solidFill>
+                  <a:srgbClr val="FFFFFF"/>
+                </a:solidFill>
+                <a:latin typeface="Arial"/>
+                <a:ea typeface="Arial"/>
+                <a:cs typeface="Arial"/>
+              </a:rPr>
+              <a:t>Resposta</a:t>
+            </a:r>
+          </a:p>
+        </p:txBody>
+      </p:sp>
+      <p:sp>
+        <p:nvSpPr>
+          <p:cNvPr id="24" name="Rectangle 23">
+            <a:extLst>
+              <a:ext uri="{FF2B5EF4-FFF2-40B4-BE49-F238E27FC236}">
+                <a16:creationId xmlns:a16="http://schemas.microsoft.com/office/drawing/2014/main" id="{E0029CBF-0ADB-4935-83EB-CA66C37620D1}"/>
+              </a:ext>
+            </a:extLst>
+          </p:cNvPr>
+          <p:cNvSpPr>
+            <a:spLocks noGrp="1"/>
+          </p:cNvSpPr>
+          <p:nvPr/>
+        </p:nvSpPr>
+        <p:spPr>
+          <a:xfrm>
+            <a:off x="457200" y="4095750"/>
+            <a:ext cx="5429250" cy="438150"/>
+          </a:xfrm>
+          <a:prstGeom prst="rect">
+            <a:avLst/>
+          </a:prstGeom>
+          <a:solidFill>
+            <a:srgbClr val="ECECEC"/>
+          </a:solidFill>
+          <a:ln w="9525">
+            <a:solidFill>
+              <a:srgbClr val="08B8C8"/>
+            </a:solidFill>
+            <a:prstDash val="solid"/>
+          </a:ln>
+        </p:spPr>
+        <p:txBody>
+          <a:bodyPr lIns="114300" tIns="85725" rIns="114300" bIns="85725" anchor="ctr"/>
+          <a:lstStyle/>
+          <a:p>
+            <a:pPr algn="l">
+              <a:defRPr sz="975" b="0">
+                <a:solidFill>
+                  <a:srgbClr val="111111"/>
+                </a:solidFill>
+                <a:latin typeface="Arial"/>
+                <a:ea typeface="Arial"/>
+                <a:cs typeface="Arial"/>
+              </a:defRPr>
+            </a:pPr>
+            <a:r>
+              <a:rPr sz="975" b="0">
+                <a:solidFill>
+                  <a:srgbClr val="111111"/>
+                </a:solidFill>
+                <a:latin typeface="Arial"/>
+                <a:ea typeface="Arial"/>
+                <a:cs typeface="Arial"/>
+              </a:rPr>
+              <a:t>A demo deve vender o raciocínio do fluxo, não só a resposta bonita no fim.</a:t>
             </a:r>
           </a:p>
         </p:txBody>
@@ -5330,7 +5485,7 @@
     </p:spTree>
     <p:extLst>
       <p:ext uri="{BB962C8B-B14F-4D97-AF65-F5344CB8AC3E}">
-        <p14:creationId xmlns:p14="http://schemas.microsoft.com/office/powerpoint/2010/main" val="610165967"/>
+        <p14:creationId xmlns:p14="http://schemas.microsoft.com/office/powerpoint/2010/main" val="1348552864"/>
       </p:ext>
     </p:extLst>
   </p:cSld>
@@ -5359,7 +5514,7 @@
       </p:grpSpPr>
       <p:pic>
         <p:nvPicPr>
-          <p:cNvPr id="25" name="Image 0"/>
+          <p:cNvPr id="26" name="Image 0"/>
           <p:cNvPicPr>
             <a:picLocks noChangeAspect="1"/>
           </p:cNvPicPr>
@@ -5386,19 +5541,19 @@
           <p:cNvPr id="3" name="Rectangle 2">
             <a:extLst>
               <a:ext uri="{FF2B5EF4-FFF2-40B4-BE49-F238E27FC236}">
-                <a16:creationId xmlns:a16="http://schemas.microsoft.com/office/drawing/2014/main" id="{198F3ECA-1717-4347-B2EE-04BA4DC0BEA4}"/>
-              </a:ext>
-            </a:extLst>
-          </p:cNvPr>
-          <p:cNvSpPr>
-            <a:spLocks noGrp="1"/>
-          </p:cNvSpPr>
-          <p:nvPr/>
-        </p:nvSpPr>
-        <p:spPr>
-          <a:xfrm>
-            <a:off x="457200" y="666750"/>
-            <a:ext cx="5334000" cy="685800"/>
+                <a16:creationId xmlns:a16="http://schemas.microsoft.com/office/drawing/2014/main" id="{4B2C17C4-5A16-4E71-A0D2-6092C57E821E}"/>
+              </a:ext>
+            </a:extLst>
+          </p:cNvPr>
+          <p:cNvSpPr>
+            <a:spLocks noGrp="1"/>
+          </p:cNvSpPr>
+          <p:nvPr/>
+        </p:nvSpPr>
+        <p:spPr>
+          <a:xfrm>
+            <a:off x="457200" y="552450"/>
+            <a:ext cx="5619750" cy="685800"/>
           </a:xfrm>
           <a:prstGeom prst="rect">
             <a:avLst/>
@@ -5440,7 +5595,7 @@
                 <a:ea typeface="Arial"/>
                 <a:cs typeface="Arial"/>
               </a:rPr>
-              <a:t>O que separa demo de produto</a:t>
+              <a:t>Blazor como cockpit do workflow</a:t>
             </a:r>
           </a:p>
         </p:txBody>
@@ -5450,18 +5605,18 @@
           <p:cNvPr id="4" name="Rectangle 3">
             <a:extLst>
               <a:ext uri="{FF2B5EF4-FFF2-40B4-BE49-F238E27FC236}">
-                <a16:creationId xmlns:a16="http://schemas.microsoft.com/office/drawing/2014/main" id="{FEBFE37E-2851-4FB8-A528-3E66C6EE061E}"/>
-              </a:ext>
-            </a:extLst>
-          </p:cNvPr>
-          <p:cNvSpPr>
-            <a:spLocks noGrp="1"/>
-          </p:cNvSpPr>
-          <p:nvPr/>
-        </p:nvSpPr>
-        <p:spPr>
-          <a:xfrm>
-            <a:off x="457200" y="1371600"/>
+                <a16:creationId xmlns:a16="http://schemas.microsoft.com/office/drawing/2014/main" id="{BCFBB6C8-84EC-4136-A6DB-A0AB66892E8F}"/>
+              </a:ext>
+            </a:extLst>
+          </p:cNvPr>
+          <p:cNvSpPr>
+            <a:spLocks noGrp="1"/>
+          </p:cNvSpPr>
+          <p:nvPr/>
+        </p:nvSpPr>
+        <p:spPr>
+          <a:xfrm>
+            <a:off x="457200" y="1257300"/>
             <a:ext cx="800100" cy="66675"/>
           </a:xfrm>
           <a:prstGeom prst="rect">
@@ -5485,19 +5640,52 @@
           <p:cNvPr id="5" name="Rectangle 4">
             <a:extLst>
               <a:ext uri="{FF2B5EF4-FFF2-40B4-BE49-F238E27FC236}">
-                <a16:creationId xmlns:a16="http://schemas.microsoft.com/office/drawing/2014/main" id="{40449C99-C1C5-43FB-BA3F-56C789649782}"/>
-              </a:ext>
-            </a:extLst>
-          </p:cNvPr>
-          <p:cNvSpPr>
-            <a:spLocks noGrp="1"/>
-          </p:cNvSpPr>
-          <p:nvPr/>
-        </p:nvSpPr>
-        <p:spPr>
-          <a:xfrm>
-            <a:off x="590550" y="1762125"/>
-            <a:ext cx="2095500" cy="1000125"/>
+                <a16:creationId xmlns:a16="http://schemas.microsoft.com/office/drawing/2014/main" id="{57C36E84-6E1F-4E2B-9F1F-9CE6962F28F0}"/>
+              </a:ext>
+            </a:extLst>
+          </p:cNvPr>
+          <p:cNvSpPr>
+            <a:spLocks noGrp="1"/>
+          </p:cNvSpPr>
+          <p:nvPr/>
+        </p:nvSpPr>
+        <p:spPr>
+          <a:xfrm>
+            <a:off x="590550" y="1638300"/>
+            <a:ext cx="1285875" cy="666750"/>
+          </a:xfrm>
+          <a:prstGeom prst="rect">
+            <a:avLst/>
+          </a:prstGeom>
+          <a:solidFill>
+            <a:srgbClr val="111111"/>
+          </a:solidFill>
+          <a:ln w="13335">
+            <a:solidFill>
+              <a:srgbClr val="111111"/>
+            </a:solidFill>
+            <a:prstDash val="solid"/>
+          </a:ln>
+        </p:spPr>
+      </p:sp>
+      <p:sp>
+        <p:nvSpPr>
+          <p:cNvPr id="6" name="Rectangle 5">
+            <a:extLst>
+              <a:ext uri="{FF2B5EF4-FFF2-40B4-BE49-F238E27FC236}">
+                <a16:creationId xmlns:a16="http://schemas.microsoft.com/office/drawing/2014/main" id="{F6082241-7DFE-4B9F-8B30-84CF3C0218B5}"/>
+              </a:ext>
+            </a:extLst>
+          </p:cNvPr>
+          <p:cNvSpPr>
+            <a:spLocks noGrp="1"/>
+          </p:cNvSpPr>
+          <p:nvPr/>
+        </p:nvSpPr>
+        <p:spPr>
+          <a:xfrm>
+            <a:off x="666750" y="1724025"/>
+            <a:ext cx="1133475" cy="533400"/>
           </a:xfrm>
           <a:prstGeom prst="rect">
             <a:avLst/>
@@ -5507,7 +5695,127 @@
               <a:alpha val="0"/>
             </a:srgbClr>
           </a:solidFill>
-          <a:ln w="9525">
+          <a:ln w="0">
+            <a:solidFill>
+              <a:srgbClr val="000000">
+                <a:alpha val="0"/>
+              </a:srgbClr>
+            </a:solidFill>
+            <a:prstDash val="solid"/>
+          </a:ln>
+        </p:spPr>
+        <p:txBody>
+          <a:bodyPr lIns="0" tIns="0" rIns="0" bIns="0" anchor="ctr"/>
+          <a:lstStyle/>
+          <a:p>
+            <a:pPr algn="ctr">
+              <a:defRPr sz="975" b="1">
+                <a:solidFill>
+                  <a:srgbClr val="FFFFFF"/>
+                </a:solidFill>
+                <a:latin typeface="Arial"/>
+                <a:ea typeface="Arial"/>
+                <a:cs typeface="Arial"/>
+              </a:defRPr>
+            </a:pPr>
+            <a:r>
+              <a:rPr sz="975" b="1">
+                <a:solidFill>
+                  <a:srgbClr val="FFFFFF"/>
+                </a:solidFill>
+                <a:latin typeface="Arial"/>
+                <a:ea typeface="Arial"/>
+                <a:cs typeface="Arial"/>
+              </a:rPr>
+              <a:t>Blazor UI</a:t>
+            </a:r>
+          </a:p>
+          <a:p>
+            <a:pPr algn="ctr">
+              <a:defRPr sz="975" b="1">
+                <a:solidFill>
+                  <a:srgbClr val="FFFFFF"/>
+                </a:solidFill>
+                <a:latin typeface="Arial"/>
+                <a:ea typeface="Arial"/>
+                <a:cs typeface="Arial"/>
+              </a:defRPr>
+            </a:pPr>
+            <a:r>
+              <a:rPr sz="975" b="1">
+                <a:solidFill>
+                  <a:srgbClr val="FFFFFF"/>
+                </a:solidFill>
+                <a:latin typeface="Arial"/>
+                <a:ea typeface="Arial"/>
+                <a:cs typeface="Arial"/>
+              </a:rPr>
+              <a:t>stream + estado</a:t>
+            </a:r>
+          </a:p>
+        </p:txBody>
+      </p:sp>
+      <p:sp>
+        <p:nvSpPr>
+          <p:cNvPr id="7" name="Rectangle 6">
+            <a:extLst>
+              <a:ext uri="{FF2B5EF4-FFF2-40B4-BE49-F238E27FC236}">
+                <a16:creationId xmlns:a16="http://schemas.microsoft.com/office/drawing/2014/main" id="{2C8BF201-2A20-404D-B2DF-73585A39E6F7}"/>
+              </a:ext>
+            </a:extLst>
+          </p:cNvPr>
+          <p:cNvSpPr>
+            <a:spLocks noGrp="1"/>
+          </p:cNvSpPr>
+          <p:nvPr/>
+        </p:nvSpPr>
+        <p:spPr>
+          <a:xfrm>
+            <a:off x="1876425" y="1962150"/>
+            <a:ext cx="457200" cy="28575"/>
+          </a:xfrm>
+          <a:prstGeom prst="rect">
+            <a:avLst/>
+          </a:prstGeom>
+          <a:solidFill>
+            <a:srgbClr val="111111"/>
+          </a:solidFill>
+          <a:ln w="0">
+            <a:solidFill>
+              <a:srgbClr val="000000">
+                <a:alpha val="0"/>
+              </a:srgbClr>
+            </a:solidFill>
+            <a:prstDash val="solid"/>
+          </a:ln>
+        </p:spPr>
+      </p:sp>
+      <p:sp>
+        <p:nvSpPr>
+          <p:cNvPr id="8" name="Rectangle 7">
+            <a:extLst>
+              <a:ext uri="{FF2B5EF4-FFF2-40B4-BE49-F238E27FC236}">
+                <a16:creationId xmlns:a16="http://schemas.microsoft.com/office/drawing/2014/main" id="{A7D7A3D6-B550-436C-BB41-4B483E58DF77}"/>
+              </a:ext>
+            </a:extLst>
+          </p:cNvPr>
+          <p:cNvSpPr>
+            <a:spLocks noGrp="1"/>
+          </p:cNvSpPr>
+          <p:nvPr/>
+        </p:nvSpPr>
+        <p:spPr>
+          <a:xfrm>
+            <a:off x="2333625" y="1638300"/>
+            <a:ext cx="1285875" cy="666750"/>
+          </a:xfrm>
+          <a:prstGeom prst="rect">
+            <a:avLst/>
+          </a:prstGeom>
+          <a:solidFill>
+            <a:srgbClr val="08B8C8"/>
+          </a:solidFill>
+          <a:ln w="13335">
             <a:solidFill>
               <a:srgbClr val="111111"/>
             </a:solidFill>
@@ -5517,57 +5825,22 @@
       </p:sp>
       <p:sp>
         <p:nvSpPr>
-          <p:cNvPr id="6" name="Rectangle 5">
-            <a:extLst>
-              <a:ext uri="{FF2B5EF4-FFF2-40B4-BE49-F238E27FC236}">
-                <a16:creationId xmlns:a16="http://schemas.microsoft.com/office/drawing/2014/main" id="{EDC846B3-0C05-4E05-B2AC-5BA8729A309D}"/>
-              </a:ext>
-            </a:extLst>
-          </p:cNvPr>
-          <p:cNvSpPr>
-            <a:spLocks noGrp="1"/>
-          </p:cNvSpPr>
-          <p:nvPr/>
-        </p:nvSpPr>
-        <p:spPr>
-          <a:xfrm>
-            <a:off x="590550" y="1762125"/>
-            <a:ext cx="76200" cy="1000125"/>
-          </a:xfrm>
-          <a:prstGeom prst="rect">
-            <a:avLst/>
-          </a:prstGeom>
-          <a:solidFill>
-            <a:srgbClr val="08B8C8"/>
-          </a:solidFill>
-          <a:ln w="0">
-            <a:solidFill>
-              <a:srgbClr val="000000">
-                <a:alpha val="0"/>
-              </a:srgbClr>
-            </a:solidFill>
-            <a:prstDash val="solid"/>
-          </a:ln>
-        </p:spPr>
-      </p:sp>
-      <p:sp>
-        <p:nvSpPr>
-          <p:cNvPr id="7" name="Rectangle 6">
-            <a:extLst>
-              <a:ext uri="{FF2B5EF4-FFF2-40B4-BE49-F238E27FC236}">
-                <a16:creationId xmlns:a16="http://schemas.microsoft.com/office/drawing/2014/main" id="{0C708719-9DD6-4741-8BDF-6FAC90424DF4}"/>
-              </a:ext>
-            </a:extLst>
-          </p:cNvPr>
-          <p:cNvSpPr>
-            <a:spLocks noGrp="1"/>
-          </p:cNvSpPr>
-          <p:nvPr/>
-        </p:nvSpPr>
-        <p:spPr>
-          <a:xfrm>
-            <a:off x="762000" y="1914525"/>
-            <a:ext cx="1809750" cy="228600"/>
+          <p:cNvPr id="9" name="Rectangle 8">
+            <a:extLst>
+              <a:ext uri="{FF2B5EF4-FFF2-40B4-BE49-F238E27FC236}">
+                <a16:creationId xmlns:a16="http://schemas.microsoft.com/office/drawing/2014/main" id="{26C35BA3-7ECB-4A22-A79F-DAB34F5A3B7F}"/>
+              </a:ext>
+            </a:extLst>
+          </p:cNvPr>
+          <p:cNvSpPr>
+            <a:spLocks noGrp="1"/>
+          </p:cNvSpPr>
+          <p:nvPr/>
+        </p:nvSpPr>
+        <p:spPr>
+          <a:xfrm>
+            <a:off x="2409825" y="1724025"/>
+            <a:ext cx="1133475" cy="533400"/>
           </a:xfrm>
           <a:prstGeom prst="rect">
             <a:avLst/>
@@ -5587,13 +5860,13 @@
           </a:ln>
         </p:spPr>
         <p:txBody>
-          <a:bodyPr lIns="0" tIns="0" rIns="0" bIns="0" anchor="t"/>
+          <a:bodyPr lIns="0" tIns="0" rIns="0" bIns="0" anchor="ctr"/>
           <a:lstStyle/>
           <a:p>
-            <a:pPr algn="l">
-              <a:defRPr sz="1200" b="1">
-                <a:solidFill>
-                  <a:srgbClr val="111111"/>
+            <a:pPr algn="ctr">
+              <a:defRPr sz="975" b="1">
+                <a:solidFill>
+                  <a:srgbClr val="FFFFFF"/>
                 </a:solidFill>
                 <a:latin typeface="Arial"/>
                 <a:ea typeface="Arial"/>
@@ -5601,37 +5874,128 @@
               </a:defRPr>
             </a:pPr>
             <a:r>
-              <a:rPr sz="1200" b="1">
-                <a:solidFill>
-                  <a:srgbClr val="111111"/>
-                </a:solidFill>
-                <a:latin typeface="Arial"/>
-                <a:ea typeface="Arial"/>
-                <a:cs typeface="Arial"/>
-              </a:rPr>
-              <a:t>Estado</a:t>
+              <a:rPr sz="975" b="1">
+                <a:solidFill>
+                  <a:srgbClr val="FFFFFF"/>
+                </a:solidFill>
+                <a:latin typeface="Arial"/>
+                <a:ea typeface="Arial"/>
+                <a:cs typeface="Arial"/>
+              </a:rPr>
+              <a:t>.NET API</a:t>
+            </a:r>
+          </a:p>
+          <a:p>
+            <a:pPr algn="ctr">
+              <a:defRPr sz="975" b="1">
+                <a:solidFill>
+                  <a:srgbClr val="FFFFFF"/>
+                </a:solidFill>
+                <a:latin typeface="Arial"/>
+                <a:ea typeface="Arial"/>
+                <a:cs typeface="Arial"/>
+              </a:defRPr>
+            </a:pPr>
+            <a:r>
+              <a:rPr sz="975" b="1">
+                <a:solidFill>
+                  <a:srgbClr val="FFFFFF"/>
+                </a:solidFill>
+                <a:latin typeface="Arial"/>
+                <a:ea typeface="Arial"/>
+                <a:cs typeface="Arial"/>
+              </a:rPr>
+              <a:t>Workflow host</a:t>
             </a:r>
           </a:p>
         </p:txBody>
       </p:sp>
       <p:sp>
         <p:nvSpPr>
-          <p:cNvPr id="8" name="Rectangle 7">
-            <a:extLst>
-              <a:ext uri="{FF2B5EF4-FFF2-40B4-BE49-F238E27FC236}">
-                <a16:creationId xmlns:a16="http://schemas.microsoft.com/office/drawing/2014/main" id="{F939EB19-9715-4198-B7E0-99F6374DE0A4}"/>
-              </a:ext>
-            </a:extLst>
-          </p:cNvPr>
-          <p:cNvSpPr>
-            <a:spLocks noGrp="1"/>
-          </p:cNvSpPr>
-          <p:nvPr/>
-        </p:nvSpPr>
-        <p:spPr>
-          <a:xfrm>
-            <a:off x="762000" y="2200275"/>
-            <a:ext cx="1790700" cy="466725"/>
+          <p:cNvPr id="10" name="Rectangle 9">
+            <a:extLst>
+              <a:ext uri="{FF2B5EF4-FFF2-40B4-BE49-F238E27FC236}">
+                <a16:creationId xmlns:a16="http://schemas.microsoft.com/office/drawing/2014/main" id="{5996E9A6-9735-434F-86F1-E4C7B2DEE73F}"/>
+              </a:ext>
+            </a:extLst>
+          </p:cNvPr>
+          <p:cNvSpPr>
+            <a:spLocks noGrp="1"/>
+          </p:cNvSpPr>
+          <p:nvPr/>
+        </p:nvSpPr>
+        <p:spPr>
+          <a:xfrm>
+            <a:off x="3619500" y="1962150"/>
+            <a:ext cx="438150" cy="28575"/>
+          </a:xfrm>
+          <a:prstGeom prst="rect">
+            <a:avLst/>
+          </a:prstGeom>
+          <a:solidFill>
+            <a:srgbClr val="111111"/>
+          </a:solidFill>
+          <a:ln w="0">
+            <a:solidFill>
+              <a:srgbClr val="000000">
+                <a:alpha val="0"/>
+              </a:srgbClr>
+            </a:solidFill>
+            <a:prstDash val="solid"/>
+          </a:ln>
+        </p:spPr>
+      </p:sp>
+      <p:sp>
+        <p:nvSpPr>
+          <p:cNvPr id="11" name="Rectangle 10">
+            <a:extLst>
+              <a:ext uri="{FF2B5EF4-FFF2-40B4-BE49-F238E27FC236}">
+                <a16:creationId xmlns:a16="http://schemas.microsoft.com/office/drawing/2014/main" id="{7382C47A-0225-485E-A81B-36B5D6B6B602}"/>
+              </a:ext>
+            </a:extLst>
+          </p:cNvPr>
+          <p:cNvSpPr>
+            <a:spLocks noGrp="1"/>
+          </p:cNvSpPr>
+          <p:nvPr/>
+        </p:nvSpPr>
+        <p:spPr>
+          <a:xfrm>
+            <a:off x="4057650" y="1638300"/>
+            <a:ext cx="1285875" cy="666750"/>
+          </a:xfrm>
+          <a:prstGeom prst="rect">
+            <a:avLst/>
+          </a:prstGeom>
+          <a:solidFill>
+            <a:srgbClr val="FFFFFF"/>
+          </a:solidFill>
+          <a:ln w="13335">
+            <a:solidFill>
+              <a:srgbClr val="111111"/>
+            </a:solidFill>
+            <a:prstDash val="solid"/>
+          </a:ln>
+        </p:spPr>
+      </p:sp>
+      <p:sp>
+        <p:nvSpPr>
+          <p:cNvPr id="12" name="Rectangle 11">
+            <a:extLst>
+              <a:ext uri="{FF2B5EF4-FFF2-40B4-BE49-F238E27FC236}">
+                <a16:creationId xmlns:a16="http://schemas.microsoft.com/office/drawing/2014/main" id="{A622F060-E9A0-4330-BED8-167111375699}"/>
+              </a:ext>
+            </a:extLst>
+          </p:cNvPr>
+          <p:cNvSpPr>
+            <a:spLocks noGrp="1"/>
+          </p:cNvSpPr>
+          <p:nvPr/>
+        </p:nvSpPr>
+        <p:spPr>
+          <a:xfrm>
+            <a:off x="4133850" y="1724025"/>
+            <a:ext cx="1133475" cy="533400"/>
           </a:xfrm>
           <a:prstGeom prst="rect">
             <a:avLst/>
@@ -5651,11 +6015,11 @@
           </a:ln>
         </p:spPr>
         <p:txBody>
-          <a:bodyPr lIns="0" tIns="0" rIns="0" bIns="0" anchor="t"/>
+          <a:bodyPr lIns="0" tIns="0" rIns="0" bIns="0" anchor="ctr"/>
           <a:lstStyle/>
           <a:p>
-            <a:pPr algn="l">
-              <a:defRPr sz="975" b="0">
+            <a:pPr algn="ctr">
+              <a:defRPr sz="975" b="1">
                 <a:solidFill>
                   <a:srgbClr val="111111"/>
                 </a:solidFill>
@@ -5665,37 +6029,128 @@
               </a:defRPr>
             </a:pPr>
             <a:r>
-              <a:rPr sz="975" b="0">
-                <a:solidFill>
-                  <a:srgbClr val="111111"/>
-                </a:solidFill>
-                <a:latin typeface="Arial"/>
-                <a:ea typeface="Arial"/>
-                <a:cs typeface="Arial"/>
-              </a:rPr>
-              <a:t>checkpoint, retomada e idempotência</a:t>
+              <a:rPr sz="975" b="1">
+                <a:solidFill>
+                  <a:srgbClr val="111111"/>
+                </a:solidFill>
+                <a:latin typeface="Arial"/>
+                <a:ea typeface="Arial"/>
+                <a:cs typeface="Arial"/>
+              </a:rPr>
+              <a:t>Agent</a:t>
+            </a:r>
+          </a:p>
+          <a:p>
+            <a:pPr algn="ctr">
+              <a:defRPr sz="975" b="1">
+                <a:solidFill>
+                  <a:srgbClr val="111111"/>
+                </a:solidFill>
+                <a:latin typeface="Arial"/>
+                <a:ea typeface="Arial"/>
+                <a:cs typeface="Arial"/>
+              </a:defRPr>
+            </a:pPr>
+            <a:r>
+              <a:rPr sz="975" b="1">
+                <a:solidFill>
+                  <a:srgbClr val="111111"/>
+                </a:solidFill>
+                <a:latin typeface="Arial"/>
+                <a:ea typeface="Arial"/>
+                <a:cs typeface="Arial"/>
+              </a:rPr>
+              <a:t>Workflow</a:t>
             </a:r>
           </a:p>
         </p:txBody>
       </p:sp>
       <p:sp>
         <p:nvSpPr>
-          <p:cNvPr id="9" name="Rectangle 8">
-            <a:extLst>
-              <a:ext uri="{FF2B5EF4-FFF2-40B4-BE49-F238E27FC236}">
-                <a16:creationId xmlns:a16="http://schemas.microsoft.com/office/drawing/2014/main" id="{CFE14375-4550-4554-AACC-3F04728BE380}"/>
-              </a:ext>
-            </a:extLst>
-          </p:cNvPr>
-          <p:cNvSpPr>
-            <a:spLocks noGrp="1"/>
-          </p:cNvSpPr>
-          <p:nvPr/>
-        </p:nvSpPr>
-        <p:spPr>
-          <a:xfrm>
-            <a:off x="3114675" y="1762125"/>
-            <a:ext cx="2095500" cy="1000125"/>
+          <p:cNvPr id="13" name="Rectangle 12">
+            <a:extLst>
+              <a:ext uri="{FF2B5EF4-FFF2-40B4-BE49-F238E27FC236}">
+                <a16:creationId xmlns:a16="http://schemas.microsoft.com/office/drawing/2014/main" id="{A75AEAA0-9273-4C61-A403-F82AB7738E3E}"/>
+              </a:ext>
+            </a:extLst>
+          </p:cNvPr>
+          <p:cNvSpPr>
+            <a:spLocks noGrp="1"/>
+          </p:cNvSpPr>
+          <p:nvPr/>
+        </p:nvSpPr>
+        <p:spPr>
+          <a:xfrm>
+            <a:off x="5343525" y="1962150"/>
+            <a:ext cx="438150" cy="28575"/>
+          </a:xfrm>
+          <a:prstGeom prst="rect">
+            <a:avLst/>
+          </a:prstGeom>
+          <a:solidFill>
+            <a:srgbClr val="111111"/>
+          </a:solidFill>
+          <a:ln w="0">
+            <a:solidFill>
+              <a:srgbClr val="000000">
+                <a:alpha val="0"/>
+              </a:srgbClr>
+            </a:solidFill>
+            <a:prstDash val="solid"/>
+          </a:ln>
+        </p:spPr>
+      </p:sp>
+      <p:sp>
+        <p:nvSpPr>
+          <p:cNvPr id="14" name="Rectangle 13">
+            <a:extLst>
+              <a:ext uri="{FF2B5EF4-FFF2-40B4-BE49-F238E27FC236}">
+                <a16:creationId xmlns:a16="http://schemas.microsoft.com/office/drawing/2014/main" id="{26647AB0-0512-42D5-97D0-E4BA9C594C31}"/>
+              </a:ext>
+            </a:extLst>
+          </p:cNvPr>
+          <p:cNvSpPr>
+            <a:spLocks noGrp="1"/>
+          </p:cNvSpPr>
+          <p:nvPr/>
+        </p:nvSpPr>
+        <p:spPr>
+          <a:xfrm>
+            <a:off x="5781675" y="1638300"/>
+            <a:ext cx="1381125" cy="666750"/>
+          </a:xfrm>
+          <a:prstGeom prst="rect">
+            <a:avLst/>
+          </a:prstGeom>
+          <a:solidFill>
+            <a:srgbClr val="ECECEC"/>
+          </a:solidFill>
+          <a:ln w="13335">
+            <a:solidFill>
+              <a:srgbClr val="111111"/>
+            </a:solidFill>
+            <a:prstDash val="solid"/>
+          </a:ln>
+        </p:spPr>
+      </p:sp>
+      <p:sp>
+        <p:nvSpPr>
+          <p:cNvPr id="15" name="Rectangle 14">
+            <a:extLst>
+              <a:ext uri="{FF2B5EF4-FFF2-40B4-BE49-F238E27FC236}">
+                <a16:creationId xmlns:a16="http://schemas.microsoft.com/office/drawing/2014/main" id="{B37BA5E1-1FC3-4328-8F4D-D7A838794310}"/>
+              </a:ext>
+            </a:extLst>
+          </p:cNvPr>
+          <p:cNvSpPr>
+            <a:spLocks noGrp="1"/>
+          </p:cNvSpPr>
+          <p:nvPr/>
+        </p:nvSpPr>
+        <p:spPr>
+          <a:xfrm>
+            <a:off x="5857875" y="1724025"/>
+            <a:ext cx="1228725" cy="533400"/>
           </a:xfrm>
           <a:prstGeom prst="rect">
             <a:avLst/>
@@ -5705,7 +6160,92 @@
               <a:alpha val="0"/>
             </a:srgbClr>
           </a:solidFill>
-          <a:ln w="9525">
+          <a:ln w="0">
+            <a:solidFill>
+              <a:srgbClr val="000000">
+                <a:alpha val="0"/>
+              </a:srgbClr>
+            </a:solidFill>
+            <a:prstDash val="solid"/>
+          </a:ln>
+        </p:spPr>
+        <p:txBody>
+          <a:bodyPr lIns="0" tIns="0" rIns="0" bIns="0" anchor="ctr"/>
+          <a:lstStyle/>
+          <a:p>
+            <a:pPr algn="ctr">
+              <a:defRPr sz="975" b="1">
+                <a:solidFill>
+                  <a:srgbClr val="111111"/>
+                </a:solidFill>
+                <a:latin typeface="Arial"/>
+                <a:ea typeface="Arial"/>
+                <a:cs typeface="Arial"/>
+              </a:defRPr>
+            </a:pPr>
+            <a:r>
+              <a:rPr sz="975" b="1">
+                <a:solidFill>
+                  <a:srgbClr val="111111"/>
+                </a:solidFill>
+                <a:latin typeface="Arial"/>
+                <a:ea typeface="Arial"/>
+                <a:cs typeface="Arial"/>
+              </a:rPr>
+              <a:t>Azure OpenAI</a:t>
+            </a:r>
+          </a:p>
+          <a:p>
+            <a:pPr algn="ctr">
+              <a:defRPr sz="975" b="1">
+                <a:solidFill>
+                  <a:srgbClr val="111111"/>
+                </a:solidFill>
+                <a:latin typeface="Arial"/>
+                <a:ea typeface="Arial"/>
+                <a:cs typeface="Arial"/>
+              </a:defRPr>
+            </a:pPr>
+            <a:r>
+              <a:rPr sz="975" b="1">
+                <a:solidFill>
+                  <a:srgbClr val="111111"/>
+                </a:solidFill>
+                <a:latin typeface="Arial"/>
+                <a:ea typeface="Arial"/>
+                <a:cs typeface="Arial"/>
+              </a:rPr>
+              <a:t>Foundry</a:t>
+            </a:r>
+          </a:p>
+        </p:txBody>
+      </p:sp>
+      <p:sp>
+        <p:nvSpPr>
+          <p:cNvPr id="16" name="Rectangle 15">
+            <a:extLst>
+              <a:ext uri="{FF2B5EF4-FFF2-40B4-BE49-F238E27FC236}">
+                <a16:creationId xmlns:a16="http://schemas.microsoft.com/office/drawing/2014/main" id="{50F8C3AB-06CE-4174-A35B-092ED4309082}"/>
+              </a:ext>
+            </a:extLst>
+          </p:cNvPr>
+          <p:cNvSpPr>
+            <a:spLocks noGrp="1"/>
+          </p:cNvSpPr>
+          <p:nvPr/>
+        </p:nvSpPr>
+        <p:spPr>
+          <a:xfrm>
+            <a:off x="3143250" y="2952750"/>
+            <a:ext cx="990600" cy="457200"/>
+          </a:xfrm>
+          <a:prstGeom prst="rect">
+            <a:avLst/>
+          </a:prstGeom>
+          <a:solidFill>
+            <a:srgbClr val="FFFFFF"/>
+          </a:solidFill>
+          <a:ln w="13335">
             <a:solidFill>
               <a:srgbClr val="111111"/>
             </a:solidFill>
@@ -5715,57 +6255,22 @@
       </p:sp>
       <p:sp>
         <p:nvSpPr>
-          <p:cNvPr id="10" name="Rectangle 9">
-            <a:extLst>
-              <a:ext uri="{FF2B5EF4-FFF2-40B4-BE49-F238E27FC236}">
-                <a16:creationId xmlns:a16="http://schemas.microsoft.com/office/drawing/2014/main" id="{4C0A993F-AFFF-4633-A8F6-2F8DAD3153E0}"/>
-              </a:ext>
-            </a:extLst>
-          </p:cNvPr>
-          <p:cNvSpPr>
-            <a:spLocks noGrp="1"/>
-          </p:cNvSpPr>
-          <p:nvPr/>
-        </p:nvSpPr>
-        <p:spPr>
-          <a:xfrm>
-            <a:off x="3114675" y="1762125"/>
-            <a:ext cx="76200" cy="1000125"/>
-          </a:xfrm>
-          <a:prstGeom prst="rect">
-            <a:avLst/>
-          </a:prstGeom>
-          <a:solidFill>
-            <a:srgbClr val="08B8C8"/>
-          </a:solidFill>
-          <a:ln w="0">
-            <a:solidFill>
-              <a:srgbClr val="000000">
-                <a:alpha val="0"/>
-              </a:srgbClr>
-            </a:solidFill>
-            <a:prstDash val="solid"/>
-          </a:ln>
-        </p:spPr>
-      </p:sp>
-      <p:sp>
-        <p:nvSpPr>
-          <p:cNvPr id="11" name="Rectangle 10">
-            <a:extLst>
-              <a:ext uri="{FF2B5EF4-FFF2-40B4-BE49-F238E27FC236}">
-                <a16:creationId xmlns:a16="http://schemas.microsoft.com/office/drawing/2014/main" id="{14FB6CCD-39B8-4A19-972C-F3C1E3BAC0AD}"/>
-              </a:ext>
-            </a:extLst>
-          </p:cNvPr>
-          <p:cNvSpPr>
-            <a:spLocks noGrp="1"/>
-          </p:cNvSpPr>
-          <p:nvPr/>
-        </p:nvSpPr>
-        <p:spPr>
-          <a:xfrm>
-            <a:off x="3286125" y="1914525"/>
-            <a:ext cx="1809750" cy="228600"/>
+          <p:cNvPr id="24" name="Rectangle 23">
+            <a:extLst>
+              <a:ext uri="{FF2B5EF4-FFF2-40B4-BE49-F238E27FC236}">
+                <a16:creationId xmlns:a16="http://schemas.microsoft.com/office/drawing/2014/main" id="{A3DA33E3-426C-4E33-A7BE-DCDDB01CF732}"/>
+              </a:ext>
+            </a:extLst>
+          </p:cNvPr>
+          <p:cNvSpPr>
+            <a:spLocks noGrp="1"/>
+          </p:cNvSpPr>
+          <p:nvPr/>
+        </p:nvSpPr>
+        <p:spPr>
+          <a:xfrm>
+            <a:off x="2857500" y="2686050"/>
+            <a:ext cx="4000500" cy="1000125"/>
           </a:xfrm>
           <a:prstGeom prst="rect">
             <a:avLst/>
@@ -5775,6 +6280,376 @@
               <a:alpha val="0"/>
             </a:srgbClr>
           </a:solidFill>
+          <a:ln w="19050">
+            <a:solidFill>
+              <a:srgbClr val="08B8C8"/>
+            </a:solidFill>
+            <a:prstDash val="solid"/>
+          </a:ln>
+        </p:spPr>
+        <p:txBody>
+          <a:bodyPr/>
+          <a:lstStyle/>
+          <a:p>
+            <a:endParaRPr lang="en-BR" dirty="0"/>
+          </a:p>
+        </p:txBody>
+      </p:sp>
+      <p:sp>
+        <p:nvSpPr>
+          <p:cNvPr id="17" name="Rectangle 16">
+            <a:extLst>
+              <a:ext uri="{FF2B5EF4-FFF2-40B4-BE49-F238E27FC236}">
+                <a16:creationId xmlns:a16="http://schemas.microsoft.com/office/drawing/2014/main" id="{3BDC0C88-9366-4A0A-9E37-A213307091D5}"/>
+              </a:ext>
+            </a:extLst>
+          </p:cNvPr>
+          <p:cNvSpPr>
+            <a:spLocks noGrp="1"/>
+          </p:cNvSpPr>
+          <p:nvPr/>
+        </p:nvSpPr>
+        <p:spPr>
+          <a:xfrm>
+            <a:off x="3219450" y="3018882"/>
+            <a:ext cx="838200" cy="323850"/>
+          </a:xfrm>
+          <a:prstGeom prst="rect">
+            <a:avLst/>
+          </a:prstGeom>
+          <a:solidFill>
+            <a:srgbClr val="000000">
+              <a:alpha val="0"/>
+            </a:srgbClr>
+          </a:solidFill>
+          <a:ln w="0">
+            <a:solidFill>
+              <a:srgbClr val="000000">
+                <a:alpha val="0"/>
+              </a:srgbClr>
+            </a:solidFill>
+            <a:prstDash val="solid"/>
+          </a:ln>
+        </p:spPr>
+        <p:txBody>
+          <a:bodyPr lIns="0" tIns="0" rIns="0" bIns="0" anchor="ctr"/>
+          <a:lstStyle/>
+          <a:p>
+            <a:pPr algn="ctr">
+              <a:defRPr sz="975" b="1">
+                <a:solidFill>
+                  <a:srgbClr val="111111"/>
+                </a:solidFill>
+                <a:latin typeface="Arial"/>
+                <a:ea typeface="Arial"/>
+                <a:cs typeface="Arial"/>
+              </a:defRPr>
+            </a:pPr>
+            <a:r>
+              <a:rPr sz="975" b="1" dirty="0">
+                <a:solidFill>
+                  <a:srgbClr val="111111"/>
+                </a:solidFill>
+                <a:latin typeface="Arial"/>
+                <a:ea typeface="Arial"/>
+                <a:cs typeface="Arial"/>
+              </a:rPr>
+              <a:t>Planner</a:t>
+            </a:r>
+          </a:p>
+        </p:txBody>
+      </p:sp>
+      <p:sp>
+        <p:nvSpPr>
+          <p:cNvPr id="18" name="Rectangle 17">
+            <a:extLst>
+              <a:ext uri="{FF2B5EF4-FFF2-40B4-BE49-F238E27FC236}">
+                <a16:creationId xmlns:a16="http://schemas.microsoft.com/office/drawing/2014/main" id="{71587728-2F17-4261-8FCB-5172DB165E19}"/>
+              </a:ext>
+            </a:extLst>
+          </p:cNvPr>
+          <p:cNvSpPr>
+            <a:spLocks noGrp="1"/>
+          </p:cNvSpPr>
+          <p:nvPr/>
+        </p:nvSpPr>
+        <p:spPr>
+          <a:xfrm>
+            <a:off x="4362450" y="2952750"/>
+            <a:ext cx="990600" cy="457200"/>
+          </a:xfrm>
+          <a:prstGeom prst="rect">
+            <a:avLst/>
+          </a:prstGeom>
+          <a:solidFill>
+            <a:srgbClr val="FFFFFF"/>
+          </a:solidFill>
+          <a:ln w="13335">
+            <a:solidFill>
+              <a:srgbClr val="111111"/>
+            </a:solidFill>
+            <a:prstDash val="solid"/>
+          </a:ln>
+        </p:spPr>
+      </p:sp>
+      <p:sp>
+        <p:nvSpPr>
+          <p:cNvPr id="19" name="Rectangle 18">
+            <a:extLst>
+              <a:ext uri="{FF2B5EF4-FFF2-40B4-BE49-F238E27FC236}">
+                <a16:creationId xmlns:a16="http://schemas.microsoft.com/office/drawing/2014/main" id="{07EA5FE3-9A14-49D4-A810-C39359A8F686}"/>
+              </a:ext>
+            </a:extLst>
+          </p:cNvPr>
+          <p:cNvSpPr>
+            <a:spLocks noGrp="1"/>
+          </p:cNvSpPr>
+          <p:nvPr/>
+        </p:nvSpPr>
+        <p:spPr>
+          <a:xfrm>
+            <a:off x="4438650" y="3018882"/>
+            <a:ext cx="838200" cy="323850"/>
+          </a:xfrm>
+          <a:prstGeom prst="rect">
+            <a:avLst/>
+          </a:prstGeom>
+          <a:solidFill>
+            <a:srgbClr val="000000">
+              <a:alpha val="0"/>
+            </a:srgbClr>
+          </a:solidFill>
+          <a:ln w="0">
+            <a:solidFill>
+              <a:srgbClr val="000000">
+                <a:alpha val="0"/>
+              </a:srgbClr>
+            </a:solidFill>
+            <a:prstDash val="solid"/>
+          </a:ln>
+        </p:spPr>
+        <p:txBody>
+          <a:bodyPr lIns="0" tIns="0" rIns="0" bIns="0" anchor="ctr"/>
+          <a:lstStyle/>
+          <a:p>
+            <a:pPr algn="ctr">
+              <a:defRPr sz="975" b="1">
+                <a:solidFill>
+                  <a:srgbClr val="111111"/>
+                </a:solidFill>
+                <a:latin typeface="Arial"/>
+                <a:ea typeface="Arial"/>
+                <a:cs typeface="Arial"/>
+              </a:defRPr>
+            </a:pPr>
+            <a:r>
+              <a:rPr sz="975" b="1" dirty="0">
+                <a:solidFill>
+                  <a:srgbClr val="111111"/>
+                </a:solidFill>
+                <a:latin typeface="Arial"/>
+                <a:ea typeface="Arial"/>
+                <a:cs typeface="Arial"/>
+              </a:rPr>
+              <a:t>Researcher</a:t>
+            </a:r>
+          </a:p>
+        </p:txBody>
+      </p:sp>
+      <p:sp>
+        <p:nvSpPr>
+          <p:cNvPr id="20" name="Rectangle 19">
+            <a:extLst>
+              <a:ext uri="{FF2B5EF4-FFF2-40B4-BE49-F238E27FC236}">
+                <a16:creationId xmlns:a16="http://schemas.microsoft.com/office/drawing/2014/main" id="{E2F8AF1D-2BA6-441F-A72B-749C93E43717}"/>
+              </a:ext>
+            </a:extLst>
+          </p:cNvPr>
+          <p:cNvSpPr>
+            <a:spLocks noGrp="1"/>
+          </p:cNvSpPr>
+          <p:nvPr/>
+        </p:nvSpPr>
+        <p:spPr>
+          <a:xfrm>
+            <a:off x="5581650" y="2952750"/>
+            <a:ext cx="990600" cy="457200"/>
+          </a:xfrm>
+          <a:prstGeom prst="rect">
+            <a:avLst/>
+          </a:prstGeom>
+          <a:solidFill>
+            <a:srgbClr val="FFFFFF"/>
+          </a:solidFill>
+          <a:ln w="13335">
+            <a:solidFill>
+              <a:srgbClr val="111111"/>
+            </a:solidFill>
+            <a:prstDash val="solid"/>
+          </a:ln>
+        </p:spPr>
+      </p:sp>
+      <p:sp>
+        <p:nvSpPr>
+          <p:cNvPr id="21" name="Rectangle 20">
+            <a:extLst>
+              <a:ext uri="{FF2B5EF4-FFF2-40B4-BE49-F238E27FC236}">
+                <a16:creationId xmlns:a16="http://schemas.microsoft.com/office/drawing/2014/main" id="{AC684766-4E6D-4FB8-A93D-1762808272B8}"/>
+              </a:ext>
+            </a:extLst>
+          </p:cNvPr>
+          <p:cNvSpPr>
+            <a:spLocks noGrp="1"/>
+          </p:cNvSpPr>
+          <p:nvPr/>
+        </p:nvSpPr>
+        <p:spPr>
+          <a:xfrm>
+            <a:off x="5657850" y="3018882"/>
+            <a:ext cx="838200" cy="323850"/>
+          </a:xfrm>
+          <a:prstGeom prst="rect">
+            <a:avLst/>
+          </a:prstGeom>
+          <a:solidFill>
+            <a:srgbClr val="000000">
+              <a:alpha val="0"/>
+            </a:srgbClr>
+          </a:solidFill>
+          <a:ln w="0">
+            <a:solidFill>
+              <a:srgbClr val="000000">
+                <a:alpha val="0"/>
+              </a:srgbClr>
+            </a:solidFill>
+            <a:prstDash val="solid"/>
+          </a:ln>
+        </p:spPr>
+        <p:txBody>
+          <a:bodyPr lIns="0" tIns="0" rIns="0" bIns="0" anchor="ctr"/>
+          <a:lstStyle/>
+          <a:p>
+            <a:pPr algn="ctr">
+              <a:defRPr sz="975" b="1">
+                <a:solidFill>
+                  <a:srgbClr val="111111"/>
+                </a:solidFill>
+                <a:latin typeface="Arial"/>
+                <a:ea typeface="Arial"/>
+                <a:cs typeface="Arial"/>
+              </a:defRPr>
+            </a:pPr>
+            <a:r>
+              <a:rPr sz="975" b="1" dirty="0">
+                <a:solidFill>
+                  <a:srgbClr val="111111"/>
+                </a:solidFill>
+                <a:latin typeface="Arial"/>
+                <a:ea typeface="Arial"/>
+                <a:cs typeface="Arial"/>
+              </a:rPr>
+              <a:t>Reviewer</a:t>
+            </a:r>
+          </a:p>
+        </p:txBody>
+      </p:sp>
+      <p:sp>
+        <p:nvSpPr>
+          <p:cNvPr id="22" name="Rectangle 21">
+            <a:extLst>
+              <a:ext uri="{FF2B5EF4-FFF2-40B4-BE49-F238E27FC236}">
+                <a16:creationId xmlns:a16="http://schemas.microsoft.com/office/drawing/2014/main" id="{1D0E4B1F-7F48-4CB7-B511-DE57B7670BB1}"/>
+              </a:ext>
+            </a:extLst>
+          </p:cNvPr>
+          <p:cNvSpPr>
+            <a:spLocks noGrp="1"/>
+          </p:cNvSpPr>
+          <p:nvPr/>
+        </p:nvSpPr>
+        <p:spPr>
+          <a:xfrm>
+            <a:off x="4133850" y="3171825"/>
+            <a:ext cx="228600" cy="28575"/>
+          </a:xfrm>
+          <a:prstGeom prst="rect">
+            <a:avLst/>
+          </a:prstGeom>
+          <a:solidFill>
+            <a:srgbClr val="08B8C8"/>
+          </a:solidFill>
+          <a:ln w="0">
+            <a:solidFill>
+              <a:srgbClr val="000000">
+                <a:alpha val="0"/>
+              </a:srgbClr>
+            </a:solidFill>
+            <a:prstDash val="solid"/>
+          </a:ln>
+        </p:spPr>
+      </p:sp>
+      <p:sp>
+        <p:nvSpPr>
+          <p:cNvPr id="23" name="Rectangle 22">
+            <a:extLst>
+              <a:ext uri="{FF2B5EF4-FFF2-40B4-BE49-F238E27FC236}">
+                <a16:creationId xmlns:a16="http://schemas.microsoft.com/office/drawing/2014/main" id="{CE673C2D-DEAB-42EE-B4AA-7FA3EF75A2C4}"/>
+              </a:ext>
+            </a:extLst>
+          </p:cNvPr>
+          <p:cNvSpPr>
+            <a:spLocks noGrp="1"/>
+          </p:cNvSpPr>
+          <p:nvPr/>
+        </p:nvSpPr>
+        <p:spPr>
+          <a:xfrm>
+            <a:off x="5353050" y="3171825"/>
+            <a:ext cx="228600" cy="28575"/>
+          </a:xfrm>
+          <a:prstGeom prst="rect">
+            <a:avLst/>
+          </a:prstGeom>
+          <a:solidFill>
+            <a:srgbClr val="08B8C8"/>
+          </a:solidFill>
+          <a:ln w="0">
+            <a:solidFill>
+              <a:srgbClr val="000000">
+                <a:alpha val="0"/>
+              </a:srgbClr>
+            </a:solidFill>
+            <a:prstDash val="solid"/>
+          </a:ln>
+        </p:spPr>
+      </p:sp>
+      <p:sp>
+        <p:nvSpPr>
+          <p:cNvPr id="25" name="Rectangle 24">
+            <a:extLst>
+              <a:ext uri="{FF2B5EF4-FFF2-40B4-BE49-F238E27FC236}">
+                <a16:creationId xmlns:a16="http://schemas.microsoft.com/office/drawing/2014/main" id="{60ED0024-B85B-42E1-AF4A-14D1CCE7CE27}"/>
+              </a:ext>
+            </a:extLst>
+          </p:cNvPr>
+          <p:cNvSpPr>
+            <a:spLocks noGrp="1"/>
+          </p:cNvSpPr>
+          <p:nvPr/>
+        </p:nvSpPr>
+        <p:spPr>
+          <a:xfrm>
+            <a:off x="819150" y="4048125"/>
+            <a:ext cx="7048500" cy="266700"/>
+          </a:xfrm>
+          <a:prstGeom prst="rect">
+            <a:avLst/>
+          </a:prstGeom>
+          <a:solidFill>
+            <a:srgbClr val="000000">
+              <a:alpha val="0"/>
+            </a:srgbClr>
+          </a:solidFill>
           <a:ln w="0">
             <a:solidFill>
               <a:srgbClr val="000000">
@@ -5807,665 +6682,7 @@
                 <a:ea typeface="Arial"/>
                 <a:cs typeface="Arial"/>
               </a:rPr>
-              <a:t>Observabilidade</a:t>
-            </a:r>
-          </a:p>
-        </p:txBody>
-      </p:sp>
-      <p:sp>
-        <p:nvSpPr>
-          <p:cNvPr id="12" name="Rectangle 11">
-            <a:extLst>
-              <a:ext uri="{FF2B5EF4-FFF2-40B4-BE49-F238E27FC236}">
-                <a16:creationId xmlns:a16="http://schemas.microsoft.com/office/drawing/2014/main" id="{054A6D45-6E21-42EF-837A-C88601C763A3}"/>
-              </a:ext>
-            </a:extLst>
-          </p:cNvPr>
-          <p:cNvSpPr>
-            <a:spLocks noGrp="1"/>
-          </p:cNvSpPr>
-          <p:nvPr/>
-        </p:nvSpPr>
-        <p:spPr>
-          <a:xfrm>
-            <a:off x="3286125" y="2200275"/>
-            <a:ext cx="1790700" cy="466725"/>
-          </a:xfrm>
-          <a:prstGeom prst="rect">
-            <a:avLst/>
-          </a:prstGeom>
-          <a:solidFill>
-            <a:srgbClr val="000000">
-              <a:alpha val="0"/>
-            </a:srgbClr>
-          </a:solidFill>
-          <a:ln w="0">
-            <a:solidFill>
-              <a:srgbClr val="000000">
-                <a:alpha val="0"/>
-              </a:srgbClr>
-            </a:solidFill>
-            <a:prstDash val="solid"/>
-          </a:ln>
-        </p:spPr>
-        <p:txBody>
-          <a:bodyPr lIns="0" tIns="0" rIns="0" bIns="0" anchor="t"/>
-          <a:lstStyle/>
-          <a:p>
-            <a:pPr algn="l">
-              <a:defRPr sz="975" b="0">
-                <a:solidFill>
-                  <a:srgbClr val="111111"/>
-                </a:solidFill>
-                <a:latin typeface="Arial"/>
-                <a:ea typeface="Arial"/>
-                <a:cs typeface="Arial"/>
-              </a:defRPr>
-            </a:pPr>
-            <a:r>
-              <a:rPr sz="975" b="0">
-                <a:solidFill>
-                  <a:srgbClr val="111111"/>
-                </a:solidFill>
-                <a:latin typeface="Arial"/>
-                <a:ea typeface="Arial"/>
-                <a:cs typeface="Arial"/>
-              </a:rPr>
-              <a:t>eventos, traces, custo e latência</a:t>
-            </a:r>
-          </a:p>
-        </p:txBody>
-      </p:sp>
-      <p:sp>
-        <p:nvSpPr>
-          <p:cNvPr id="13" name="Rectangle 12">
-            <a:extLst>
-              <a:ext uri="{FF2B5EF4-FFF2-40B4-BE49-F238E27FC236}">
-                <a16:creationId xmlns:a16="http://schemas.microsoft.com/office/drawing/2014/main" id="{AF06BD08-0827-4FEA-A1DA-40DF266442DA}"/>
-              </a:ext>
-            </a:extLst>
-          </p:cNvPr>
-          <p:cNvSpPr>
-            <a:spLocks noGrp="1"/>
-          </p:cNvSpPr>
-          <p:nvPr/>
-        </p:nvSpPr>
-        <p:spPr>
-          <a:xfrm>
-            <a:off x="5638800" y="1762125"/>
-            <a:ext cx="2095500" cy="1000125"/>
-          </a:xfrm>
-          <a:prstGeom prst="rect">
-            <a:avLst/>
-          </a:prstGeom>
-          <a:solidFill>
-            <a:srgbClr val="000000">
-              <a:alpha val="0"/>
-            </a:srgbClr>
-          </a:solidFill>
-          <a:ln w="9525">
-            <a:solidFill>
-              <a:srgbClr val="111111"/>
-            </a:solidFill>
-            <a:prstDash val="solid"/>
-          </a:ln>
-        </p:spPr>
-      </p:sp>
-      <p:sp>
-        <p:nvSpPr>
-          <p:cNvPr id="14" name="Rectangle 13">
-            <a:extLst>
-              <a:ext uri="{FF2B5EF4-FFF2-40B4-BE49-F238E27FC236}">
-                <a16:creationId xmlns:a16="http://schemas.microsoft.com/office/drawing/2014/main" id="{5F8BA86F-C51F-46E7-8009-23D36B25CD3C}"/>
-              </a:ext>
-            </a:extLst>
-          </p:cNvPr>
-          <p:cNvSpPr>
-            <a:spLocks noGrp="1"/>
-          </p:cNvSpPr>
-          <p:nvPr/>
-        </p:nvSpPr>
-        <p:spPr>
-          <a:xfrm>
-            <a:off x="5638800" y="1762125"/>
-            <a:ext cx="76200" cy="1000125"/>
-          </a:xfrm>
-          <a:prstGeom prst="rect">
-            <a:avLst/>
-          </a:prstGeom>
-          <a:solidFill>
-            <a:srgbClr val="111111"/>
-          </a:solidFill>
-          <a:ln w="0">
-            <a:solidFill>
-              <a:srgbClr val="000000">
-                <a:alpha val="0"/>
-              </a:srgbClr>
-            </a:solidFill>
-            <a:prstDash val="solid"/>
-          </a:ln>
-        </p:spPr>
-      </p:sp>
-      <p:sp>
-        <p:nvSpPr>
-          <p:cNvPr id="15" name="Rectangle 14">
-            <a:extLst>
-              <a:ext uri="{FF2B5EF4-FFF2-40B4-BE49-F238E27FC236}">
-                <a16:creationId xmlns:a16="http://schemas.microsoft.com/office/drawing/2014/main" id="{38E2B648-B47C-44B9-8864-A16A0C111B11}"/>
-              </a:ext>
-            </a:extLst>
-          </p:cNvPr>
-          <p:cNvSpPr>
-            <a:spLocks noGrp="1"/>
-          </p:cNvSpPr>
-          <p:nvPr/>
-        </p:nvSpPr>
-        <p:spPr>
-          <a:xfrm>
-            <a:off x="5810250" y="1914525"/>
-            <a:ext cx="1809750" cy="228600"/>
-          </a:xfrm>
-          <a:prstGeom prst="rect">
-            <a:avLst/>
-          </a:prstGeom>
-          <a:solidFill>
-            <a:srgbClr val="000000">
-              <a:alpha val="0"/>
-            </a:srgbClr>
-          </a:solidFill>
-          <a:ln w="0">
-            <a:solidFill>
-              <a:srgbClr val="000000">
-                <a:alpha val="0"/>
-              </a:srgbClr>
-            </a:solidFill>
-            <a:prstDash val="solid"/>
-          </a:ln>
-        </p:spPr>
-        <p:txBody>
-          <a:bodyPr lIns="0" tIns="0" rIns="0" bIns="0" anchor="t"/>
-          <a:lstStyle/>
-          <a:p>
-            <a:pPr algn="l">
-              <a:defRPr sz="1200" b="1">
-                <a:solidFill>
-                  <a:srgbClr val="111111"/>
-                </a:solidFill>
-                <a:latin typeface="Arial"/>
-                <a:ea typeface="Arial"/>
-                <a:cs typeface="Arial"/>
-              </a:defRPr>
-            </a:pPr>
-            <a:r>
-              <a:rPr sz="1200" b="1">
-                <a:solidFill>
-                  <a:srgbClr val="111111"/>
-                </a:solidFill>
-                <a:latin typeface="Arial"/>
-                <a:ea typeface="Arial"/>
-                <a:cs typeface="Arial"/>
-              </a:rPr>
-              <a:t>Segurança</a:t>
-            </a:r>
-          </a:p>
-        </p:txBody>
-      </p:sp>
-      <p:sp>
-        <p:nvSpPr>
-          <p:cNvPr id="16" name="Rectangle 15">
-            <a:extLst>
-              <a:ext uri="{FF2B5EF4-FFF2-40B4-BE49-F238E27FC236}">
-                <a16:creationId xmlns:a16="http://schemas.microsoft.com/office/drawing/2014/main" id="{ACE8ED4D-72B2-4A3C-83E8-79DE4F3F3022}"/>
-              </a:ext>
-            </a:extLst>
-          </p:cNvPr>
-          <p:cNvSpPr>
-            <a:spLocks noGrp="1"/>
-          </p:cNvSpPr>
-          <p:nvPr/>
-        </p:nvSpPr>
-        <p:spPr>
-          <a:xfrm>
-            <a:off x="5810250" y="2200275"/>
-            <a:ext cx="1790700" cy="466725"/>
-          </a:xfrm>
-          <a:prstGeom prst="rect">
-            <a:avLst/>
-          </a:prstGeom>
-          <a:solidFill>
-            <a:srgbClr val="000000">
-              <a:alpha val="0"/>
-            </a:srgbClr>
-          </a:solidFill>
-          <a:ln w="0">
-            <a:solidFill>
-              <a:srgbClr val="000000">
-                <a:alpha val="0"/>
-              </a:srgbClr>
-            </a:solidFill>
-            <a:prstDash val="solid"/>
-          </a:ln>
-        </p:spPr>
-        <p:txBody>
-          <a:bodyPr lIns="0" tIns="0" rIns="0" bIns="0" anchor="t"/>
-          <a:lstStyle/>
-          <a:p>
-            <a:pPr algn="l">
-              <a:defRPr sz="975" b="0">
-                <a:solidFill>
-                  <a:srgbClr val="111111"/>
-                </a:solidFill>
-                <a:latin typeface="Arial"/>
-                <a:ea typeface="Arial"/>
-                <a:cs typeface="Arial"/>
-              </a:defRPr>
-            </a:pPr>
-            <a:r>
-              <a:rPr sz="975" b="0">
-                <a:solidFill>
-                  <a:srgbClr val="111111"/>
-                </a:solidFill>
-                <a:latin typeface="Arial"/>
-                <a:ea typeface="Arial"/>
-                <a:cs typeface="Arial"/>
-              </a:rPr>
-              <a:t>escopo de ferramentas e aprovação humana</a:t>
-            </a:r>
-          </a:p>
-        </p:txBody>
-      </p:sp>
-      <p:sp>
-        <p:nvSpPr>
-          <p:cNvPr id="17" name="Rectangle 16">
-            <a:extLst>
-              <a:ext uri="{FF2B5EF4-FFF2-40B4-BE49-F238E27FC236}">
-                <a16:creationId xmlns:a16="http://schemas.microsoft.com/office/drawing/2014/main" id="{C1592FD6-6FF3-4143-8040-649AAD6B507E}"/>
-              </a:ext>
-            </a:extLst>
-          </p:cNvPr>
-          <p:cNvSpPr>
-            <a:spLocks noGrp="1"/>
-          </p:cNvSpPr>
-          <p:nvPr/>
-        </p:nvSpPr>
-        <p:spPr>
-          <a:xfrm>
-            <a:off x="1847850" y="3190875"/>
-            <a:ext cx="2095500" cy="1000125"/>
-          </a:xfrm>
-          <a:prstGeom prst="rect">
-            <a:avLst/>
-          </a:prstGeom>
-          <a:solidFill>
-            <a:srgbClr val="000000">
-              <a:alpha val="0"/>
-            </a:srgbClr>
-          </a:solidFill>
-          <a:ln w="9525">
-            <a:solidFill>
-              <a:srgbClr val="111111"/>
-            </a:solidFill>
-            <a:prstDash val="solid"/>
-          </a:ln>
-        </p:spPr>
-      </p:sp>
-      <p:sp>
-        <p:nvSpPr>
-          <p:cNvPr id="18" name="Rectangle 17">
-            <a:extLst>
-              <a:ext uri="{FF2B5EF4-FFF2-40B4-BE49-F238E27FC236}">
-                <a16:creationId xmlns:a16="http://schemas.microsoft.com/office/drawing/2014/main" id="{196DA220-FEBC-48FE-BE0D-7C4A910C8534}"/>
-              </a:ext>
-            </a:extLst>
-          </p:cNvPr>
-          <p:cNvSpPr>
-            <a:spLocks noGrp="1"/>
-          </p:cNvSpPr>
-          <p:nvPr/>
-        </p:nvSpPr>
-        <p:spPr>
-          <a:xfrm>
-            <a:off x="1847850" y="3190875"/>
-            <a:ext cx="76200" cy="1000125"/>
-          </a:xfrm>
-          <a:prstGeom prst="rect">
-            <a:avLst/>
-          </a:prstGeom>
-          <a:solidFill>
-            <a:srgbClr val="08B8C8"/>
-          </a:solidFill>
-          <a:ln w="0">
-            <a:solidFill>
-              <a:srgbClr val="000000">
-                <a:alpha val="0"/>
-              </a:srgbClr>
-            </a:solidFill>
-            <a:prstDash val="solid"/>
-          </a:ln>
-        </p:spPr>
-      </p:sp>
-      <p:sp>
-        <p:nvSpPr>
-          <p:cNvPr id="19" name="Rectangle 18">
-            <a:extLst>
-              <a:ext uri="{FF2B5EF4-FFF2-40B4-BE49-F238E27FC236}">
-                <a16:creationId xmlns:a16="http://schemas.microsoft.com/office/drawing/2014/main" id="{92FF2FD6-B149-47A2-85EF-48DA6055BF8B}"/>
-              </a:ext>
-            </a:extLst>
-          </p:cNvPr>
-          <p:cNvSpPr>
-            <a:spLocks noGrp="1"/>
-          </p:cNvSpPr>
-          <p:nvPr/>
-        </p:nvSpPr>
-        <p:spPr>
-          <a:xfrm>
-            <a:off x="2019300" y="3343275"/>
-            <a:ext cx="1809750" cy="228600"/>
-          </a:xfrm>
-          <a:prstGeom prst="rect">
-            <a:avLst/>
-          </a:prstGeom>
-          <a:solidFill>
-            <a:srgbClr val="000000">
-              <a:alpha val="0"/>
-            </a:srgbClr>
-          </a:solidFill>
-          <a:ln w="0">
-            <a:solidFill>
-              <a:srgbClr val="000000">
-                <a:alpha val="0"/>
-              </a:srgbClr>
-            </a:solidFill>
-            <a:prstDash val="solid"/>
-          </a:ln>
-        </p:spPr>
-        <p:txBody>
-          <a:bodyPr lIns="0" tIns="0" rIns="0" bIns="0" anchor="t"/>
-          <a:lstStyle/>
-          <a:p>
-            <a:pPr algn="l">
-              <a:defRPr sz="1200" b="1">
-                <a:solidFill>
-                  <a:srgbClr val="111111"/>
-                </a:solidFill>
-                <a:latin typeface="Arial"/>
-                <a:ea typeface="Arial"/>
-                <a:cs typeface="Arial"/>
-              </a:defRPr>
-            </a:pPr>
-            <a:r>
-              <a:rPr sz="1200" b="1">
-                <a:solidFill>
-                  <a:srgbClr val="111111"/>
-                </a:solidFill>
-                <a:latin typeface="Arial"/>
-                <a:ea typeface="Arial"/>
-                <a:cs typeface="Arial"/>
-              </a:rPr>
-              <a:t>Avaliação</a:t>
-            </a:r>
-          </a:p>
-        </p:txBody>
-      </p:sp>
-      <p:sp>
-        <p:nvSpPr>
-          <p:cNvPr id="20" name="Rectangle 19">
-            <a:extLst>
-              <a:ext uri="{FF2B5EF4-FFF2-40B4-BE49-F238E27FC236}">
-                <a16:creationId xmlns:a16="http://schemas.microsoft.com/office/drawing/2014/main" id="{BA0B85CD-00B3-465C-BF7A-8163C17C11B7}"/>
-              </a:ext>
-            </a:extLst>
-          </p:cNvPr>
-          <p:cNvSpPr>
-            <a:spLocks noGrp="1"/>
-          </p:cNvSpPr>
-          <p:nvPr/>
-        </p:nvSpPr>
-        <p:spPr>
-          <a:xfrm>
-            <a:off x="2019300" y="3629025"/>
-            <a:ext cx="1790700" cy="466725"/>
-          </a:xfrm>
-          <a:prstGeom prst="rect">
-            <a:avLst/>
-          </a:prstGeom>
-          <a:solidFill>
-            <a:srgbClr val="000000">
-              <a:alpha val="0"/>
-            </a:srgbClr>
-          </a:solidFill>
-          <a:ln w="0">
-            <a:solidFill>
-              <a:srgbClr val="000000">
-                <a:alpha val="0"/>
-              </a:srgbClr>
-            </a:solidFill>
-            <a:prstDash val="solid"/>
-          </a:ln>
-        </p:spPr>
-        <p:txBody>
-          <a:bodyPr lIns="0" tIns="0" rIns="0" bIns="0" anchor="t"/>
-          <a:lstStyle/>
-          <a:p>
-            <a:pPr algn="l">
-              <a:defRPr sz="975" b="0">
-                <a:solidFill>
-                  <a:srgbClr val="111111"/>
-                </a:solidFill>
-                <a:latin typeface="Arial"/>
-                <a:ea typeface="Arial"/>
-                <a:cs typeface="Arial"/>
-              </a:defRPr>
-            </a:pPr>
-            <a:r>
-              <a:rPr sz="975" b="0">
-                <a:solidFill>
-                  <a:srgbClr val="111111"/>
-                </a:solidFill>
-                <a:latin typeface="Arial"/>
-                <a:ea typeface="Arial"/>
-                <a:cs typeface="Arial"/>
-              </a:rPr>
-              <a:t>testes de fluxo, regressão e qualidade</a:t>
-            </a:r>
-          </a:p>
-        </p:txBody>
-      </p:sp>
-      <p:sp>
-        <p:nvSpPr>
-          <p:cNvPr id="21" name="Rectangle 20">
-            <a:extLst>
-              <a:ext uri="{FF2B5EF4-FFF2-40B4-BE49-F238E27FC236}">
-                <a16:creationId xmlns:a16="http://schemas.microsoft.com/office/drawing/2014/main" id="{EBAC5602-7846-48F5-9C99-320D48E66AC8}"/>
-              </a:ext>
-            </a:extLst>
-          </p:cNvPr>
-          <p:cNvSpPr>
-            <a:spLocks noGrp="1"/>
-          </p:cNvSpPr>
-          <p:nvPr/>
-        </p:nvSpPr>
-        <p:spPr>
-          <a:xfrm>
-            <a:off x="4371975" y="3190875"/>
-            <a:ext cx="2095500" cy="1000125"/>
-          </a:xfrm>
-          <a:prstGeom prst="rect">
-            <a:avLst/>
-          </a:prstGeom>
-          <a:solidFill>
-            <a:srgbClr val="000000">
-              <a:alpha val="0"/>
-            </a:srgbClr>
-          </a:solidFill>
-          <a:ln w="9525">
-            <a:solidFill>
-              <a:srgbClr val="111111"/>
-            </a:solidFill>
-            <a:prstDash val="solid"/>
-          </a:ln>
-        </p:spPr>
-      </p:sp>
-      <p:sp>
-        <p:nvSpPr>
-          <p:cNvPr id="22" name="Rectangle 21">
-            <a:extLst>
-              <a:ext uri="{FF2B5EF4-FFF2-40B4-BE49-F238E27FC236}">
-                <a16:creationId xmlns:a16="http://schemas.microsoft.com/office/drawing/2014/main" id="{A12A5531-0FF7-4AF1-B379-797075AFEC70}"/>
-              </a:ext>
-            </a:extLst>
-          </p:cNvPr>
-          <p:cNvSpPr>
-            <a:spLocks noGrp="1"/>
-          </p:cNvSpPr>
-          <p:nvPr/>
-        </p:nvSpPr>
-        <p:spPr>
-          <a:xfrm>
-            <a:off x="4371975" y="3190875"/>
-            <a:ext cx="76200" cy="1000125"/>
-          </a:xfrm>
-          <a:prstGeom prst="rect">
-            <a:avLst/>
-          </a:prstGeom>
-          <a:solidFill>
-            <a:srgbClr val="08B8C8"/>
-          </a:solidFill>
-          <a:ln w="0">
-            <a:solidFill>
-              <a:srgbClr val="000000">
-                <a:alpha val="0"/>
-              </a:srgbClr>
-            </a:solidFill>
-            <a:prstDash val="solid"/>
-          </a:ln>
-        </p:spPr>
-      </p:sp>
-      <p:sp>
-        <p:nvSpPr>
-          <p:cNvPr id="23" name="Rectangle 22">
-            <a:extLst>
-              <a:ext uri="{FF2B5EF4-FFF2-40B4-BE49-F238E27FC236}">
-                <a16:creationId xmlns:a16="http://schemas.microsoft.com/office/drawing/2014/main" id="{C44A2355-BDC2-476E-8449-4D7A58940C38}"/>
-              </a:ext>
-            </a:extLst>
-          </p:cNvPr>
-          <p:cNvSpPr>
-            <a:spLocks noGrp="1"/>
-          </p:cNvSpPr>
-          <p:nvPr/>
-        </p:nvSpPr>
-        <p:spPr>
-          <a:xfrm>
-            <a:off x="4543425" y="3343275"/>
-            <a:ext cx="1809750" cy="228600"/>
-          </a:xfrm>
-          <a:prstGeom prst="rect">
-            <a:avLst/>
-          </a:prstGeom>
-          <a:solidFill>
-            <a:srgbClr val="000000">
-              <a:alpha val="0"/>
-            </a:srgbClr>
-          </a:solidFill>
-          <a:ln w="0">
-            <a:solidFill>
-              <a:srgbClr val="000000">
-                <a:alpha val="0"/>
-              </a:srgbClr>
-            </a:solidFill>
-            <a:prstDash val="solid"/>
-          </a:ln>
-        </p:spPr>
-        <p:txBody>
-          <a:bodyPr lIns="0" tIns="0" rIns="0" bIns="0" anchor="t"/>
-          <a:lstStyle/>
-          <a:p>
-            <a:pPr algn="l">
-              <a:defRPr sz="1200" b="1">
-                <a:solidFill>
-                  <a:srgbClr val="111111"/>
-                </a:solidFill>
-                <a:latin typeface="Arial"/>
-                <a:ea typeface="Arial"/>
-                <a:cs typeface="Arial"/>
-              </a:defRPr>
-            </a:pPr>
-            <a:r>
-              <a:rPr sz="1200" b="1">
-                <a:solidFill>
-                  <a:srgbClr val="111111"/>
-                </a:solidFill>
-                <a:latin typeface="Arial"/>
-                <a:ea typeface="Arial"/>
-                <a:cs typeface="Arial"/>
-              </a:rPr>
-              <a:t>UX</a:t>
-            </a:r>
-          </a:p>
-        </p:txBody>
-      </p:sp>
-      <p:sp>
-        <p:nvSpPr>
-          <p:cNvPr id="24" name="Rectangle 23">
-            <a:extLst>
-              <a:ext uri="{FF2B5EF4-FFF2-40B4-BE49-F238E27FC236}">
-                <a16:creationId xmlns:a16="http://schemas.microsoft.com/office/drawing/2014/main" id="{2F87D04C-EAF6-4BD3-9917-0FC0660E047B}"/>
-              </a:ext>
-            </a:extLst>
-          </p:cNvPr>
-          <p:cNvSpPr>
-            <a:spLocks noGrp="1"/>
-          </p:cNvSpPr>
-          <p:nvPr/>
-        </p:nvSpPr>
-        <p:spPr>
-          <a:xfrm>
-            <a:off x="4543425" y="3629025"/>
-            <a:ext cx="1790700" cy="466725"/>
-          </a:xfrm>
-          <a:prstGeom prst="rect">
-            <a:avLst/>
-          </a:prstGeom>
-          <a:solidFill>
-            <a:srgbClr val="000000">
-              <a:alpha val="0"/>
-            </a:srgbClr>
-          </a:solidFill>
-          <a:ln w="0">
-            <a:solidFill>
-              <a:srgbClr val="000000">
-                <a:alpha val="0"/>
-              </a:srgbClr>
-            </a:solidFill>
-            <a:prstDash val="solid"/>
-          </a:ln>
-        </p:spPr>
-        <p:txBody>
-          <a:bodyPr lIns="0" tIns="0" rIns="0" bIns="0" anchor="t"/>
-          <a:lstStyle/>
-          <a:p>
-            <a:pPr algn="l">
-              <a:defRPr sz="975" b="0">
-                <a:solidFill>
-                  <a:srgbClr val="111111"/>
-                </a:solidFill>
-                <a:latin typeface="Arial"/>
-                <a:ea typeface="Arial"/>
-                <a:cs typeface="Arial"/>
-              </a:defRPr>
-            </a:pPr>
-            <a:r>
-              <a:rPr sz="975" b="0">
-                <a:solidFill>
-                  <a:srgbClr val="111111"/>
-                </a:solidFill>
-                <a:latin typeface="Arial"/>
-                <a:ea typeface="Arial"/>
-                <a:cs typeface="Arial"/>
-              </a:rPr>
-              <a:t>progresso claro e intervenção no momento certo</a:t>
+              <a:t>Ferramentas: APIs, MCP, banco, arquivos, serviços internos</a:t>
             </a:r>
           </a:p>
         </p:txBody>
@@ -6502,6 +6719,1149 @@
       </p:grpSpPr>
       <p:pic>
         <p:nvPicPr>
+          <p:cNvPr id="25" name="Image 0"/>
+          <p:cNvPicPr>
+            <a:picLocks noChangeAspect="1"/>
+          </p:cNvPicPr>
+          <p:nvPr/>
+        </p:nvPicPr>
+        <p:blipFill>
+          <a:blip r:embed="rId3"/>
+          <a:stretch>
+            <a:fillRect/>
+          </a:stretch>
+        </p:blipFill>
+        <p:spPr>
+          <a:xfrm>
+            <a:off x="0" y="0"/>
+            <a:ext cx="9144000" cy="5143500"/>
+          </a:xfrm>
+          <a:prstGeom prst="rect">
+            <a:avLst/>
+          </a:prstGeom>
+        </p:spPr>
+      </p:pic>
+      <p:sp>
+        <p:nvSpPr>
+          <p:cNvPr id="3" name="Rectangle 2">
+            <a:extLst>
+              <a:ext uri="{FF2B5EF4-FFF2-40B4-BE49-F238E27FC236}">
+                <a16:creationId xmlns:a16="http://schemas.microsoft.com/office/drawing/2014/main" id="{198F3ECA-1717-4347-B2EE-04BA4DC0BEA4}"/>
+              </a:ext>
+            </a:extLst>
+          </p:cNvPr>
+          <p:cNvSpPr>
+            <a:spLocks noGrp="1"/>
+          </p:cNvSpPr>
+          <p:nvPr/>
+        </p:nvSpPr>
+        <p:spPr>
+          <a:xfrm>
+            <a:off x="457200" y="666750"/>
+            <a:ext cx="5334000" cy="685800"/>
+          </a:xfrm>
+          <a:prstGeom prst="rect">
+            <a:avLst/>
+          </a:prstGeom>
+          <a:solidFill>
+            <a:srgbClr val="000000">
+              <a:alpha val="0"/>
+            </a:srgbClr>
+          </a:solidFill>
+          <a:ln w="0">
+            <a:solidFill>
+              <a:srgbClr val="000000">
+                <a:alpha val="0"/>
+              </a:srgbClr>
+            </a:solidFill>
+            <a:prstDash val="solid"/>
+          </a:ln>
+        </p:spPr>
+        <p:txBody>
+          <a:bodyPr lIns="0" tIns="0" rIns="0" bIns="0" anchor="t"/>
+          <a:lstStyle/>
+          <a:p>
+            <a:pPr algn="l">
+              <a:defRPr sz="2625" b="1">
+                <a:solidFill>
+                  <a:srgbClr val="111111"/>
+                </a:solidFill>
+                <a:latin typeface="Arial"/>
+                <a:ea typeface="Arial"/>
+                <a:cs typeface="Arial"/>
+              </a:defRPr>
+            </a:pPr>
+            <a:r>
+              <a:rPr sz="2625" b="1">
+                <a:solidFill>
+                  <a:srgbClr val="111111"/>
+                </a:solidFill>
+                <a:latin typeface="Arial"/>
+                <a:ea typeface="Arial"/>
+                <a:cs typeface="Arial"/>
+              </a:rPr>
+              <a:t>O que separa demo de produto</a:t>
+            </a:r>
+          </a:p>
+        </p:txBody>
+      </p:sp>
+      <p:sp>
+        <p:nvSpPr>
+          <p:cNvPr id="4" name="Rectangle 3">
+            <a:extLst>
+              <a:ext uri="{FF2B5EF4-FFF2-40B4-BE49-F238E27FC236}">
+                <a16:creationId xmlns:a16="http://schemas.microsoft.com/office/drawing/2014/main" id="{FEBFE37E-2851-4FB8-A528-3E66C6EE061E}"/>
+              </a:ext>
+            </a:extLst>
+          </p:cNvPr>
+          <p:cNvSpPr>
+            <a:spLocks noGrp="1"/>
+          </p:cNvSpPr>
+          <p:nvPr/>
+        </p:nvSpPr>
+        <p:spPr>
+          <a:xfrm>
+            <a:off x="457200" y="1371600"/>
+            <a:ext cx="800100" cy="66675"/>
+          </a:xfrm>
+          <a:prstGeom prst="rect">
+            <a:avLst/>
+          </a:prstGeom>
+          <a:solidFill>
+            <a:srgbClr val="08B8C8"/>
+          </a:solidFill>
+          <a:ln w="0">
+            <a:solidFill>
+              <a:srgbClr val="000000">
+                <a:alpha val="0"/>
+              </a:srgbClr>
+            </a:solidFill>
+            <a:prstDash val="solid"/>
+          </a:ln>
+        </p:spPr>
+      </p:sp>
+      <p:sp>
+        <p:nvSpPr>
+          <p:cNvPr id="5" name="Rectangle 4">
+            <a:extLst>
+              <a:ext uri="{FF2B5EF4-FFF2-40B4-BE49-F238E27FC236}">
+                <a16:creationId xmlns:a16="http://schemas.microsoft.com/office/drawing/2014/main" id="{40449C99-C1C5-43FB-BA3F-56C789649782}"/>
+              </a:ext>
+            </a:extLst>
+          </p:cNvPr>
+          <p:cNvSpPr>
+            <a:spLocks noGrp="1"/>
+          </p:cNvSpPr>
+          <p:nvPr/>
+        </p:nvSpPr>
+        <p:spPr>
+          <a:xfrm>
+            <a:off x="590550" y="1762125"/>
+            <a:ext cx="2095500" cy="1000125"/>
+          </a:xfrm>
+          <a:prstGeom prst="rect">
+            <a:avLst/>
+          </a:prstGeom>
+          <a:solidFill>
+            <a:srgbClr val="000000">
+              <a:alpha val="0"/>
+            </a:srgbClr>
+          </a:solidFill>
+          <a:ln w="9525">
+            <a:solidFill>
+              <a:srgbClr val="111111"/>
+            </a:solidFill>
+            <a:prstDash val="solid"/>
+          </a:ln>
+        </p:spPr>
+      </p:sp>
+      <p:sp>
+        <p:nvSpPr>
+          <p:cNvPr id="6" name="Rectangle 5">
+            <a:extLst>
+              <a:ext uri="{FF2B5EF4-FFF2-40B4-BE49-F238E27FC236}">
+                <a16:creationId xmlns:a16="http://schemas.microsoft.com/office/drawing/2014/main" id="{EDC846B3-0C05-4E05-B2AC-5BA8729A309D}"/>
+              </a:ext>
+            </a:extLst>
+          </p:cNvPr>
+          <p:cNvSpPr>
+            <a:spLocks noGrp="1"/>
+          </p:cNvSpPr>
+          <p:nvPr/>
+        </p:nvSpPr>
+        <p:spPr>
+          <a:xfrm>
+            <a:off x="590550" y="1762125"/>
+            <a:ext cx="76200" cy="1000125"/>
+          </a:xfrm>
+          <a:prstGeom prst="rect">
+            <a:avLst/>
+          </a:prstGeom>
+          <a:solidFill>
+            <a:srgbClr val="08B8C8"/>
+          </a:solidFill>
+          <a:ln w="0">
+            <a:solidFill>
+              <a:srgbClr val="000000">
+                <a:alpha val="0"/>
+              </a:srgbClr>
+            </a:solidFill>
+            <a:prstDash val="solid"/>
+          </a:ln>
+        </p:spPr>
+      </p:sp>
+      <p:sp>
+        <p:nvSpPr>
+          <p:cNvPr id="7" name="Rectangle 6">
+            <a:extLst>
+              <a:ext uri="{FF2B5EF4-FFF2-40B4-BE49-F238E27FC236}">
+                <a16:creationId xmlns:a16="http://schemas.microsoft.com/office/drawing/2014/main" id="{0C708719-9DD6-4741-8BDF-6FAC90424DF4}"/>
+              </a:ext>
+            </a:extLst>
+          </p:cNvPr>
+          <p:cNvSpPr>
+            <a:spLocks noGrp="1"/>
+          </p:cNvSpPr>
+          <p:nvPr/>
+        </p:nvSpPr>
+        <p:spPr>
+          <a:xfrm>
+            <a:off x="762000" y="1914525"/>
+            <a:ext cx="1809750" cy="228600"/>
+          </a:xfrm>
+          <a:prstGeom prst="rect">
+            <a:avLst/>
+          </a:prstGeom>
+          <a:solidFill>
+            <a:srgbClr val="000000">
+              <a:alpha val="0"/>
+            </a:srgbClr>
+          </a:solidFill>
+          <a:ln w="0">
+            <a:solidFill>
+              <a:srgbClr val="000000">
+                <a:alpha val="0"/>
+              </a:srgbClr>
+            </a:solidFill>
+            <a:prstDash val="solid"/>
+          </a:ln>
+        </p:spPr>
+        <p:txBody>
+          <a:bodyPr lIns="0" tIns="0" rIns="0" bIns="0" anchor="t"/>
+          <a:lstStyle/>
+          <a:p>
+            <a:pPr algn="l">
+              <a:defRPr sz="1200" b="1">
+                <a:solidFill>
+                  <a:srgbClr val="111111"/>
+                </a:solidFill>
+                <a:latin typeface="Arial"/>
+                <a:ea typeface="Arial"/>
+                <a:cs typeface="Arial"/>
+              </a:defRPr>
+            </a:pPr>
+            <a:r>
+              <a:rPr sz="1200" b="1">
+                <a:solidFill>
+                  <a:srgbClr val="111111"/>
+                </a:solidFill>
+                <a:latin typeface="Arial"/>
+                <a:ea typeface="Arial"/>
+                <a:cs typeface="Arial"/>
+              </a:rPr>
+              <a:t>Estado</a:t>
+            </a:r>
+          </a:p>
+        </p:txBody>
+      </p:sp>
+      <p:sp>
+        <p:nvSpPr>
+          <p:cNvPr id="8" name="Rectangle 7">
+            <a:extLst>
+              <a:ext uri="{FF2B5EF4-FFF2-40B4-BE49-F238E27FC236}">
+                <a16:creationId xmlns:a16="http://schemas.microsoft.com/office/drawing/2014/main" id="{F939EB19-9715-4198-B7E0-99F6374DE0A4}"/>
+              </a:ext>
+            </a:extLst>
+          </p:cNvPr>
+          <p:cNvSpPr>
+            <a:spLocks noGrp="1"/>
+          </p:cNvSpPr>
+          <p:nvPr/>
+        </p:nvSpPr>
+        <p:spPr>
+          <a:xfrm>
+            <a:off x="762000" y="2200275"/>
+            <a:ext cx="1790700" cy="466725"/>
+          </a:xfrm>
+          <a:prstGeom prst="rect">
+            <a:avLst/>
+          </a:prstGeom>
+          <a:solidFill>
+            <a:srgbClr val="000000">
+              <a:alpha val="0"/>
+            </a:srgbClr>
+          </a:solidFill>
+          <a:ln w="0">
+            <a:solidFill>
+              <a:srgbClr val="000000">
+                <a:alpha val="0"/>
+              </a:srgbClr>
+            </a:solidFill>
+            <a:prstDash val="solid"/>
+          </a:ln>
+        </p:spPr>
+        <p:txBody>
+          <a:bodyPr lIns="0" tIns="0" rIns="0" bIns="0" anchor="t"/>
+          <a:lstStyle/>
+          <a:p>
+            <a:pPr algn="l">
+              <a:defRPr sz="975" b="0">
+                <a:solidFill>
+                  <a:srgbClr val="111111"/>
+                </a:solidFill>
+                <a:latin typeface="Arial"/>
+                <a:ea typeface="Arial"/>
+                <a:cs typeface="Arial"/>
+              </a:defRPr>
+            </a:pPr>
+            <a:r>
+              <a:rPr sz="975" b="0">
+                <a:solidFill>
+                  <a:srgbClr val="111111"/>
+                </a:solidFill>
+                <a:latin typeface="Arial"/>
+                <a:ea typeface="Arial"/>
+                <a:cs typeface="Arial"/>
+              </a:rPr>
+              <a:t>checkpoint, retomada e idempotência</a:t>
+            </a:r>
+          </a:p>
+        </p:txBody>
+      </p:sp>
+      <p:sp>
+        <p:nvSpPr>
+          <p:cNvPr id="9" name="Rectangle 8">
+            <a:extLst>
+              <a:ext uri="{FF2B5EF4-FFF2-40B4-BE49-F238E27FC236}">
+                <a16:creationId xmlns:a16="http://schemas.microsoft.com/office/drawing/2014/main" id="{CFE14375-4550-4554-AACC-3F04728BE380}"/>
+              </a:ext>
+            </a:extLst>
+          </p:cNvPr>
+          <p:cNvSpPr>
+            <a:spLocks noGrp="1"/>
+          </p:cNvSpPr>
+          <p:nvPr/>
+        </p:nvSpPr>
+        <p:spPr>
+          <a:xfrm>
+            <a:off x="3114675" y="1762125"/>
+            <a:ext cx="2095500" cy="1000125"/>
+          </a:xfrm>
+          <a:prstGeom prst="rect">
+            <a:avLst/>
+          </a:prstGeom>
+          <a:solidFill>
+            <a:srgbClr val="000000">
+              <a:alpha val="0"/>
+            </a:srgbClr>
+          </a:solidFill>
+          <a:ln w="9525">
+            <a:solidFill>
+              <a:srgbClr val="111111"/>
+            </a:solidFill>
+            <a:prstDash val="solid"/>
+          </a:ln>
+        </p:spPr>
+      </p:sp>
+      <p:sp>
+        <p:nvSpPr>
+          <p:cNvPr id="10" name="Rectangle 9">
+            <a:extLst>
+              <a:ext uri="{FF2B5EF4-FFF2-40B4-BE49-F238E27FC236}">
+                <a16:creationId xmlns:a16="http://schemas.microsoft.com/office/drawing/2014/main" id="{4C0A993F-AFFF-4633-A8F6-2F8DAD3153E0}"/>
+              </a:ext>
+            </a:extLst>
+          </p:cNvPr>
+          <p:cNvSpPr>
+            <a:spLocks noGrp="1"/>
+          </p:cNvSpPr>
+          <p:nvPr/>
+        </p:nvSpPr>
+        <p:spPr>
+          <a:xfrm>
+            <a:off x="3114675" y="1762125"/>
+            <a:ext cx="76200" cy="1000125"/>
+          </a:xfrm>
+          <a:prstGeom prst="rect">
+            <a:avLst/>
+          </a:prstGeom>
+          <a:solidFill>
+            <a:srgbClr val="08B8C8"/>
+          </a:solidFill>
+          <a:ln w="0">
+            <a:solidFill>
+              <a:srgbClr val="000000">
+                <a:alpha val="0"/>
+              </a:srgbClr>
+            </a:solidFill>
+            <a:prstDash val="solid"/>
+          </a:ln>
+        </p:spPr>
+      </p:sp>
+      <p:sp>
+        <p:nvSpPr>
+          <p:cNvPr id="11" name="Rectangle 10">
+            <a:extLst>
+              <a:ext uri="{FF2B5EF4-FFF2-40B4-BE49-F238E27FC236}">
+                <a16:creationId xmlns:a16="http://schemas.microsoft.com/office/drawing/2014/main" id="{14FB6CCD-39B8-4A19-972C-F3C1E3BAC0AD}"/>
+              </a:ext>
+            </a:extLst>
+          </p:cNvPr>
+          <p:cNvSpPr>
+            <a:spLocks noGrp="1"/>
+          </p:cNvSpPr>
+          <p:nvPr/>
+        </p:nvSpPr>
+        <p:spPr>
+          <a:xfrm>
+            <a:off x="3286125" y="1914525"/>
+            <a:ext cx="1809750" cy="228600"/>
+          </a:xfrm>
+          <a:prstGeom prst="rect">
+            <a:avLst/>
+          </a:prstGeom>
+          <a:solidFill>
+            <a:srgbClr val="000000">
+              <a:alpha val="0"/>
+            </a:srgbClr>
+          </a:solidFill>
+          <a:ln w="0">
+            <a:solidFill>
+              <a:srgbClr val="000000">
+                <a:alpha val="0"/>
+              </a:srgbClr>
+            </a:solidFill>
+            <a:prstDash val="solid"/>
+          </a:ln>
+        </p:spPr>
+        <p:txBody>
+          <a:bodyPr lIns="0" tIns="0" rIns="0" bIns="0" anchor="t"/>
+          <a:lstStyle/>
+          <a:p>
+            <a:pPr algn="l">
+              <a:defRPr sz="1200" b="1">
+                <a:solidFill>
+                  <a:srgbClr val="111111"/>
+                </a:solidFill>
+                <a:latin typeface="Arial"/>
+                <a:ea typeface="Arial"/>
+                <a:cs typeface="Arial"/>
+              </a:defRPr>
+            </a:pPr>
+            <a:r>
+              <a:rPr sz="1200" b="1">
+                <a:solidFill>
+                  <a:srgbClr val="111111"/>
+                </a:solidFill>
+                <a:latin typeface="Arial"/>
+                <a:ea typeface="Arial"/>
+                <a:cs typeface="Arial"/>
+              </a:rPr>
+              <a:t>Observabilidade</a:t>
+            </a:r>
+          </a:p>
+        </p:txBody>
+      </p:sp>
+      <p:sp>
+        <p:nvSpPr>
+          <p:cNvPr id="12" name="Rectangle 11">
+            <a:extLst>
+              <a:ext uri="{FF2B5EF4-FFF2-40B4-BE49-F238E27FC236}">
+                <a16:creationId xmlns:a16="http://schemas.microsoft.com/office/drawing/2014/main" id="{054A6D45-6E21-42EF-837A-C88601C763A3}"/>
+              </a:ext>
+            </a:extLst>
+          </p:cNvPr>
+          <p:cNvSpPr>
+            <a:spLocks noGrp="1"/>
+          </p:cNvSpPr>
+          <p:nvPr/>
+        </p:nvSpPr>
+        <p:spPr>
+          <a:xfrm>
+            <a:off x="3286125" y="2200275"/>
+            <a:ext cx="1790700" cy="466725"/>
+          </a:xfrm>
+          <a:prstGeom prst="rect">
+            <a:avLst/>
+          </a:prstGeom>
+          <a:solidFill>
+            <a:srgbClr val="000000">
+              <a:alpha val="0"/>
+            </a:srgbClr>
+          </a:solidFill>
+          <a:ln w="0">
+            <a:solidFill>
+              <a:srgbClr val="000000">
+                <a:alpha val="0"/>
+              </a:srgbClr>
+            </a:solidFill>
+            <a:prstDash val="solid"/>
+          </a:ln>
+        </p:spPr>
+        <p:txBody>
+          <a:bodyPr lIns="0" tIns="0" rIns="0" bIns="0" anchor="t"/>
+          <a:lstStyle/>
+          <a:p>
+            <a:pPr algn="l">
+              <a:defRPr sz="975" b="0">
+                <a:solidFill>
+                  <a:srgbClr val="111111"/>
+                </a:solidFill>
+                <a:latin typeface="Arial"/>
+                <a:ea typeface="Arial"/>
+                <a:cs typeface="Arial"/>
+              </a:defRPr>
+            </a:pPr>
+            <a:r>
+              <a:rPr sz="975" b="0">
+                <a:solidFill>
+                  <a:srgbClr val="111111"/>
+                </a:solidFill>
+                <a:latin typeface="Arial"/>
+                <a:ea typeface="Arial"/>
+                <a:cs typeface="Arial"/>
+              </a:rPr>
+              <a:t>eventos, traces, custo e latência</a:t>
+            </a:r>
+          </a:p>
+        </p:txBody>
+      </p:sp>
+      <p:sp>
+        <p:nvSpPr>
+          <p:cNvPr id="13" name="Rectangle 12">
+            <a:extLst>
+              <a:ext uri="{FF2B5EF4-FFF2-40B4-BE49-F238E27FC236}">
+                <a16:creationId xmlns:a16="http://schemas.microsoft.com/office/drawing/2014/main" id="{AF06BD08-0827-4FEA-A1DA-40DF266442DA}"/>
+              </a:ext>
+            </a:extLst>
+          </p:cNvPr>
+          <p:cNvSpPr>
+            <a:spLocks noGrp="1"/>
+          </p:cNvSpPr>
+          <p:nvPr/>
+        </p:nvSpPr>
+        <p:spPr>
+          <a:xfrm>
+            <a:off x="5638800" y="1762125"/>
+            <a:ext cx="2095500" cy="1000125"/>
+          </a:xfrm>
+          <a:prstGeom prst="rect">
+            <a:avLst/>
+          </a:prstGeom>
+          <a:solidFill>
+            <a:srgbClr val="000000">
+              <a:alpha val="0"/>
+            </a:srgbClr>
+          </a:solidFill>
+          <a:ln w="9525">
+            <a:solidFill>
+              <a:srgbClr val="111111"/>
+            </a:solidFill>
+            <a:prstDash val="solid"/>
+          </a:ln>
+        </p:spPr>
+      </p:sp>
+      <p:sp>
+        <p:nvSpPr>
+          <p:cNvPr id="14" name="Rectangle 13">
+            <a:extLst>
+              <a:ext uri="{FF2B5EF4-FFF2-40B4-BE49-F238E27FC236}">
+                <a16:creationId xmlns:a16="http://schemas.microsoft.com/office/drawing/2014/main" id="{5F8BA86F-C51F-46E7-8009-23D36B25CD3C}"/>
+              </a:ext>
+            </a:extLst>
+          </p:cNvPr>
+          <p:cNvSpPr>
+            <a:spLocks noGrp="1"/>
+          </p:cNvSpPr>
+          <p:nvPr/>
+        </p:nvSpPr>
+        <p:spPr>
+          <a:xfrm>
+            <a:off x="5638800" y="1762125"/>
+            <a:ext cx="76200" cy="1000125"/>
+          </a:xfrm>
+          <a:prstGeom prst="rect">
+            <a:avLst/>
+          </a:prstGeom>
+          <a:solidFill>
+            <a:srgbClr val="111111"/>
+          </a:solidFill>
+          <a:ln w="0">
+            <a:solidFill>
+              <a:srgbClr val="000000">
+                <a:alpha val="0"/>
+              </a:srgbClr>
+            </a:solidFill>
+            <a:prstDash val="solid"/>
+          </a:ln>
+        </p:spPr>
+      </p:sp>
+      <p:sp>
+        <p:nvSpPr>
+          <p:cNvPr id="15" name="Rectangle 14">
+            <a:extLst>
+              <a:ext uri="{FF2B5EF4-FFF2-40B4-BE49-F238E27FC236}">
+                <a16:creationId xmlns:a16="http://schemas.microsoft.com/office/drawing/2014/main" id="{38E2B648-B47C-44B9-8864-A16A0C111B11}"/>
+              </a:ext>
+            </a:extLst>
+          </p:cNvPr>
+          <p:cNvSpPr>
+            <a:spLocks noGrp="1"/>
+          </p:cNvSpPr>
+          <p:nvPr/>
+        </p:nvSpPr>
+        <p:spPr>
+          <a:xfrm>
+            <a:off x="5810250" y="1914525"/>
+            <a:ext cx="1809750" cy="228600"/>
+          </a:xfrm>
+          <a:prstGeom prst="rect">
+            <a:avLst/>
+          </a:prstGeom>
+          <a:solidFill>
+            <a:srgbClr val="000000">
+              <a:alpha val="0"/>
+            </a:srgbClr>
+          </a:solidFill>
+          <a:ln w="0">
+            <a:solidFill>
+              <a:srgbClr val="000000">
+                <a:alpha val="0"/>
+              </a:srgbClr>
+            </a:solidFill>
+            <a:prstDash val="solid"/>
+          </a:ln>
+        </p:spPr>
+        <p:txBody>
+          <a:bodyPr lIns="0" tIns="0" rIns="0" bIns="0" anchor="t"/>
+          <a:lstStyle/>
+          <a:p>
+            <a:pPr algn="l">
+              <a:defRPr sz="1200" b="1">
+                <a:solidFill>
+                  <a:srgbClr val="111111"/>
+                </a:solidFill>
+                <a:latin typeface="Arial"/>
+                <a:ea typeface="Arial"/>
+                <a:cs typeface="Arial"/>
+              </a:defRPr>
+            </a:pPr>
+            <a:r>
+              <a:rPr sz="1200" b="1">
+                <a:solidFill>
+                  <a:srgbClr val="111111"/>
+                </a:solidFill>
+                <a:latin typeface="Arial"/>
+                <a:ea typeface="Arial"/>
+                <a:cs typeface="Arial"/>
+              </a:rPr>
+              <a:t>Segurança</a:t>
+            </a:r>
+          </a:p>
+        </p:txBody>
+      </p:sp>
+      <p:sp>
+        <p:nvSpPr>
+          <p:cNvPr id="16" name="Rectangle 15">
+            <a:extLst>
+              <a:ext uri="{FF2B5EF4-FFF2-40B4-BE49-F238E27FC236}">
+                <a16:creationId xmlns:a16="http://schemas.microsoft.com/office/drawing/2014/main" id="{ACE8ED4D-72B2-4A3C-83E8-79DE4F3F3022}"/>
+              </a:ext>
+            </a:extLst>
+          </p:cNvPr>
+          <p:cNvSpPr>
+            <a:spLocks noGrp="1"/>
+          </p:cNvSpPr>
+          <p:nvPr/>
+        </p:nvSpPr>
+        <p:spPr>
+          <a:xfrm>
+            <a:off x="5810250" y="2200275"/>
+            <a:ext cx="1790700" cy="466725"/>
+          </a:xfrm>
+          <a:prstGeom prst="rect">
+            <a:avLst/>
+          </a:prstGeom>
+          <a:solidFill>
+            <a:srgbClr val="000000">
+              <a:alpha val="0"/>
+            </a:srgbClr>
+          </a:solidFill>
+          <a:ln w="0">
+            <a:solidFill>
+              <a:srgbClr val="000000">
+                <a:alpha val="0"/>
+              </a:srgbClr>
+            </a:solidFill>
+            <a:prstDash val="solid"/>
+          </a:ln>
+        </p:spPr>
+        <p:txBody>
+          <a:bodyPr lIns="0" tIns="0" rIns="0" bIns="0" anchor="t"/>
+          <a:lstStyle/>
+          <a:p>
+            <a:pPr algn="l">
+              <a:defRPr sz="975" b="0">
+                <a:solidFill>
+                  <a:srgbClr val="111111"/>
+                </a:solidFill>
+                <a:latin typeface="Arial"/>
+                <a:ea typeface="Arial"/>
+                <a:cs typeface="Arial"/>
+              </a:defRPr>
+            </a:pPr>
+            <a:r>
+              <a:rPr sz="975" b="0">
+                <a:solidFill>
+                  <a:srgbClr val="111111"/>
+                </a:solidFill>
+                <a:latin typeface="Arial"/>
+                <a:ea typeface="Arial"/>
+                <a:cs typeface="Arial"/>
+              </a:rPr>
+              <a:t>escopo de ferramentas e aprovação humana</a:t>
+            </a:r>
+          </a:p>
+        </p:txBody>
+      </p:sp>
+      <p:sp>
+        <p:nvSpPr>
+          <p:cNvPr id="17" name="Rectangle 16">
+            <a:extLst>
+              <a:ext uri="{FF2B5EF4-FFF2-40B4-BE49-F238E27FC236}">
+                <a16:creationId xmlns:a16="http://schemas.microsoft.com/office/drawing/2014/main" id="{C1592FD6-6FF3-4143-8040-649AAD6B507E}"/>
+              </a:ext>
+            </a:extLst>
+          </p:cNvPr>
+          <p:cNvSpPr>
+            <a:spLocks noGrp="1"/>
+          </p:cNvSpPr>
+          <p:nvPr/>
+        </p:nvSpPr>
+        <p:spPr>
+          <a:xfrm>
+            <a:off x="1847850" y="3190875"/>
+            <a:ext cx="2095500" cy="1000125"/>
+          </a:xfrm>
+          <a:prstGeom prst="rect">
+            <a:avLst/>
+          </a:prstGeom>
+          <a:solidFill>
+            <a:srgbClr val="000000">
+              <a:alpha val="0"/>
+            </a:srgbClr>
+          </a:solidFill>
+          <a:ln w="9525">
+            <a:solidFill>
+              <a:srgbClr val="111111"/>
+            </a:solidFill>
+            <a:prstDash val="solid"/>
+          </a:ln>
+        </p:spPr>
+      </p:sp>
+      <p:sp>
+        <p:nvSpPr>
+          <p:cNvPr id="18" name="Rectangle 17">
+            <a:extLst>
+              <a:ext uri="{FF2B5EF4-FFF2-40B4-BE49-F238E27FC236}">
+                <a16:creationId xmlns:a16="http://schemas.microsoft.com/office/drawing/2014/main" id="{196DA220-FEBC-48FE-BE0D-7C4A910C8534}"/>
+              </a:ext>
+            </a:extLst>
+          </p:cNvPr>
+          <p:cNvSpPr>
+            <a:spLocks noGrp="1"/>
+          </p:cNvSpPr>
+          <p:nvPr/>
+        </p:nvSpPr>
+        <p:spPr>
+          <a:xfrm>
+            <a:off x="1847850" y="3190875"/>
+            <a:ext cx="76200" cy="1000125"/>
+          </a:xfrm>
+          <a:prstGeom prst="rect">
+            <a:avLst/>
+          </a:prstGeom>
+          <a:solidFill>
+            <a:srgbClr val="08B8C8"/>
+          </a:solidFill>
+          <a:ln w="0">
+            <a:solidFill>
+              <a:srgbClr val="000000">
+                <a:alpha val="0"/>
+              </a:srgbClr>
+            </a:solidFill>
+            <a:prstDash val="solid"/>
+          </a:ln>
+        </p:spPr>
+      </p:sp>
+      <p:sp>
+        <p:nvSpPr>
+          <p:cNvPr id="19" name="Rectangle 18">
+            <a:extLst>
+              <a:ext uri="{FF2B5EF4-FFF2-40B4-BE49-F238E27FC236}">
+                <a16:creationId xmlns:a16="http://schemas.microsoft.com/office/drawing/2014/main" id="{92FF2FD6-B149-47A2-85EF-48DA6055BF8B}"/>
+              </a:ext>
+            </a:extLst>
+          </p:cNvPr>
+          <p:cNvSpPr>
+            <a:spLocks noGrp="1"/>
+          </p:cNvSpPr>
+          <p:nvPr/>
+        </p:nvSpPr>
+        <p:spPr>
+          <a:xfrm>
+            <a:off x="2019300" y="3343275"/>
+            <a:ext cx="1809750" cy="228600"/>
+          </a:xfrm>
+          <a:prstGeom prst="rect">
+            <a:avLst/>
+          </a:prstGeom>
+          <a:solidFill>
+            <a:srgbClr val="000000">
+              <a:alpha val="0"/>
+            </a:srgbClr>
+          </a:solidFill>
+          <a:ln w="0">
+            <a:solidFill>
+              <a:srgbClr val="000000">
+                <a:alpha val="0"/>
+              </a:srgbClr>
+            </a:solidFill>
+            <a:prstDash val="solid"/>
+          </a:ln>
+        </p:spPr>
+        <p:txBody>
+          <a:bodyPr lIns="0" tIns="0" rIns="0" bIns="0" anchor="t"/>
+          <a:lstStyle/>
+          <a:p>
+            <a:pPr algn="l">
+              <a:defRPr sz="1200" b="1">
+                <a:solidFill>
+                  <a:srgbClr val="111111"/>
+                </a:solidFill>
+                <a:latin typeface="Arial"/>
+                <a:ea typeface="Arial"/>
+                <a:cs typeface="Arial"/>
+              </a:defRPr>
+            </a:pPr>
+            <a:r>
+              <a:rPr sz="1200" b="1">
+                <a:solidFill>
+                  <a:srgbClr val="111111"/>
+                </a:solidFill>
+                <a:latin typeface="Arial"/>
+                <a:ea typeface="Arial"/>
+                <a:cs typeface="Arial"/>
+              </a:rPr>
+              <a:t>Avaliação</a:t>
+            </a:r>
+          </a:p>
+        </p:txBody>
+      </p:sp>
+      <p:sp>
+        <p:nvSpPr>
+          <p:cNvPr id="20" name="Rectangle 19">
+            <a:extLst>
+              <a:ext uri="{FF2B5EF4-FFF2-40B4-BE49-F238E27FC236}">
+                <a16:creationId xmlns:a16="http://schemas.microsoft.com/office/drawing/2014/main" id="{BA0B85CD-00B3-465C-BF7A-8163C17C11B7}"/>
+              </a:ext>
+            </a:extLst>
+          </p:cNvPr>
+          <p:cNvSpPr>
+            <a:spLocks noGrp="1"/>
+          </p:cNvSpPr>
+          <p:nvPr/>
+        </p:nvSpPr>
+        <p:spPr>
+          <a:xfrm>
+            <a:off x="2019300" y="3629025"/>
+            <a:ext cx="1790700" cy="466725"/>
+          </a:xfrm>
+          <a:prstGeom prst="rect">
+            <a:avLst/>
+          </a:prstGeom>
+          <a:solidFill>
+            <a:srgbClr val="000000">
+              <a:alpha val="0"/>
+            </a:srgbClr>
+          </a:solidFill>
+          <a:ln w="0">
+            <a:solidFill>
+              <a:srgbClr val="000000">
+                <a:alpha val="0"/>
+              </a:srgbClr>
+            </a:solidFill>
+            <a:prstDash val="solid"/>
+          </a:ln>
+        </p:spPr>
+        <p:txBody>
+          <a:bodyPr lIns="0" tIns="0" rIns="0" bIns="0" anchor="t"/>
+          <a:lstStyle/>
+          <a:p>
+            <a:pPr algn="l">
+              <a:defRPr sz="975" b="0">
+                <a:solidFill>
+                  <a:srgbClr val="111111"/>
+                </a:solidFill>
+                <a:latin typeface="Arial"/>
+                <a:ea typeface="Arial"/>
+                <a:cs typeface="Arial"/>
+              </a:defRPr>
+            </a:pPr>
+            <a:r>
+              <a:rPr sz="975" b="0">
+                <a:solidFill>
+                  <a:srgbClr val="111111"/>
+                </a:solidFill>
+                <a:latin typeface="Arial"/>
+                <a:ea typeface="Arial"/>
+                <a:cs typeface="Arial"/>
+              </a:rPr>
+              <a:t>testes de fluxo, regressão e qualidade</a:t>
+            </a:r>
+          </a:p>
+        </p:txBody>
+      </p:sp>
+      <p:sp>
+        <p:nvSpPr>
+          <p:cNvPr id="21" name="Rectangle 20">
+            <a:extLst>
+              <a:ext uri="{FF2B5EF4-FFF2-40B4-BE49-F238E27FC236}">
+                <a16:creationId xmlns:a16="http://schemas.microsoft.com/office/drawing/2014/main" id="{EBAC5602-7846-48F5-9C99-320D48E66AC8}"/>
+              </a:ext>
+            </a:extLst>
+          </p:cNvPr>
+          <p:cNvSpPr>
+            <a:spLocks noGrp="1"/>
+          </p:cNvSpPr>
+          <p:nvPr/>
+        </p:nvSpPr>
+        <p:spPr>
+          <a:xfrm>
+            <a:off x="4371975" y="3190875"/>
+            <a:ext cx="2095500" cy="1000125"/>
+          </a:xfrm>
+          <a:prstGeom prst="rect">
+            <a:avLst/>
+          </a:prstGeom>
+          <a:solidFill>
+            <a:srgbClr val="000000">
+              <a:alpha val="0"/>
+            </a:srgbClr>
+          </a:solidFill>
+          <a:ln w="9525">
+            <a:solidFill>
+              <a:srgbClr val="111111"/>
+            </a:solidFill>
+            <a:prstDash val="solid"/>
+          </a:ln>
+        </p:spPr>
+      </p:sp>
+      <p:sp>
+        <p:nvSpPr>
+          <p:cNvPr id="22" name="Rectangle 21">
+            <a:extLst>
+              <a:ext uri="{FF2B5EF4-FFF2-40B4-BE49-F238E27FC236}">
+                <a16:creationId xmlns:a16="http://schemas.microsoft.com/office/drawing/2014/main" id="{A12A5531-0FF7-4AF1-B379-797075AFEC70}"/>
+              </a:ext>
+            </a:extLst>
+          </p:cNvPr>
+          <p:cNvSpPr>
+            <a:spLocks noGrp="1"/>
+          </p:cNvSpPr>
+          <p:nvPr/>
+        </p:nvSpPr>
+        <p:spPr>
+          <a:xfrm>
+            <a:off x="4371975" y="3190875"/>
+            <a:ext cx="76200" cy="1000125"/>
+          </a:xfrm>
+          <a:prstGeom prst="rect">
+            <a:avLst/>
+          </a:prstGeom>
+          <a:solidFill>
+            <a:srgbClr val="08B8C8"/>
+          </a:solidFill>
+          <a:ln w="0">
+            <a:solidFill>
+              <a:srgbClr val="000000">
+                <a:alpha val="0"/>
+              </a:srgbClr>
+            </a:solidFill>
+            <a:prstDash val="solid"/>
+          </a:ln>
+        </p:spPr>
+      </p:sp>
+      <p:sp>
+        <p:nvSpPr>
+          <p:cNvPr id="23" name="Rectangle 22">
+            <a:extLst>
+              <a:ext uri="{FF2B5EF4-FFF2-40B4-BE49-F238E27FC236}">
+                <a16:creationId xmlns:a16="http://schemas.microsoft.com/office/drawing/2014/main" id="{C44A2355-BDC2-476E-8449-4D7A58940C38}"/>
+              </a:ext>
+            </a:extLst>
+          </p:cNvPr>
+          <p:cNvSpPr>
+            <a:spLocks noGrp="1"/>
+          </p:cNvSpPr>
+          <p:nvPr/>
+        </p:nvSpPr>
+        <p:spPr>
+          <a:xfrm>
+            <a:off x="4543425" y="3343275"/>
+            <a:ext cx="1809750" cy="228600"/>
+          </a:xfrm>
+          <a:prstGeom prst="rect">
+            <a:avLst/>
+          </a:prstGeom>
+          <a:solidFill>
+            <a:srgbClr val="000000">
+              <a:alpha val="0"/>
+            </a:srgbClr>
+          </a:solidFill>
+          <a:ln w="0">
+            <a:solidFill>
+              <a:srgbClr val="000000">
+                <a:alpha val="0"/>
+              </a:srgbClr>
+            </a:solidFill>
+            <a:prstDash val="solid"/>
+          </a:ln>
+        </p:spPr>
+        <p:txBody>
+          <a:bodyPr lIns="0" tIns="0" rIns="0" bIns="0" anchor="t"/>
+          <a:lstStyle/>
+          <a:p>
+            <a:pPr algn="l">
+              <a:defRPr sz="1200" b="1">
+                <a:solidFill>
+                  <a:srgbClr val="111111"/>
+                </a:solidFill>
+                <a:latin typeface="Arial"/>
+                <a:ea typeface="Arial"/>
+                <a:cs typeface="Arial"/>
+              </a:defRPr>
+            </a:pPr>
+            <a:r>
+              <a:rPr sz="1200" b="1">
+                <a:solidFill>
+                  <a:srgbClr val="111111"/>
+                </a:solidFill>
+                <a:latin typeface="Arial"/>
+                <a:ea typeface="Arial"/>
+                <a:cs typeface="Arial"/>
+              </a:rPr>
+              <a:t>UX</a:t>
+            </a:r>
+          </a:p>
+        </p:txBody>
+      </p:sp>
+      <p:sp>
+        <p:nvSpPr>
+          <p:cNvPr id="24" name="Rectangle 23">
+            <a:extLst>
+              <a:ext uri="{FF2B5EF4-FFF2-40B4-BE49-F238E27FC236}">
+                <a16:creationId xmlns:a16="http://schemas.microsoft.com/office/drawing/2014/main" id="{2F87D04C-EAF6-4BD3-9917-0FC0660E047B}"/>
+              </a:ext>
+            </a:extLst>
+          </p:cNvPr>
+          <p:cNvSpPr>
+            <a:spLocks noGrp="1"/>
+          </p:cNvSpPr>
+          <p:nvPr/>
+        </p:nvSpPr>
+        <p:spPr>
+          <a:xfrm>
+            <a:off x="4543425" y="3629025"/>
+            <a:ext cx="1790700" cy="466725"/>
+          </a:xfrm>
+          <a:prstGeom prst="rect">
+            <a:avLst/>
+          </a:prstGeom>
+          <a:solidFill>
+            <a:srgbClr val="000000">
+              <a:alpha val="0"/>
+            </a:srgbClr>
+          </a:solidFill>
+          <a:ln w="0">
+            <a:solidFill>
+              <a:srgbClr val="000000">
+                <a:alpha val="0"/>
+              </a:srgbClr>
+            </a:solidFill>
+            <a:prstDash val="solid"/>
+          </a:ln>
+        </p:spPr>
+        <p:txBody>
+          <a:bodyPr lIns="0" tIns="0" rIns="0" bIns="0" anchor="t"/>
+          <a:lstStyle/>
+          <a:p>
+            <a:pPr algn="l">
+              <a:defRPr sz="975" b="0">
+                <a:solidFill>
+                  <a:srgbClr val="111111"/>
+                </a:solidFill>
+                <a:latin typeface="Arial"/>
+                <a:ea typeface="Arial"/>
+                <a:cs typeface="Arial"/>
+              </a:defRPr>
+            </a:pPr>
+            <a:r>
+              <a:rPr sz="975" b="0">
+                <a:solidFill>
+                  <a:srgbClr val="111111"/>
+                </a:solidFill>
+                <a:latin typeface="Arial"/>
+                <a:ea typeface="Arial"/>
+                <a:cs typeface="Arial"/>
+              </a:rPr>
+              <a:t>progresso claro e intervenção no momento certo</a:t>
+            </a:r>
+          </a:p>
+        </p:txBody>
+      </p:sp>
+    </p:spTree>
+    <p:extLst>
+      <p:ext uri="{BB962C8B-B14F-4D97-AF65-F5344CB8AC3E}">
+        <p14:creationId xmlns:p14="http://schemas.microsoft.com/office/powerpoint/2010/main" val="610165967"/>
+      </p:ext>
+    </p:extLst>
+  </p:cSld>
+  <p:clrMapOvr>
+    <a:masterClrMapping/>
+  </p:clrMapOvr>
+</p:sld>
+</file>
+
+<file path=ppt/slides/slide15.xml><?xml version="1.0" encoding="utf-8"?>
+<p:sld xmlns:a="http://schemas.openxmlformats.org/drawingml/2006/main" xmlns:r="http://schemas.openxmlformats.org/officeDocument/2006/relationships" xmlns:p="http://schemas.openxmlformats.org/presentationml/2006/main">
+  <p:cSld>
+    <p:spTree>
+      <p:nvGrpSpPr>
+        <p:cNvPr id="1" name=""/>
+        <p:cNvGrpSpPr/>
+        <p:nvPr/>
+      </p:nvGrpSpPr>
+      <p:grpSpPr>
+        <a:xfrm>
+          <a:off x="0" y="0"/>
+          <a:ext cx="0" cy="0"/>
+          <a:chOff x="0" y="0"/>
+          <a:chExt cx="0" cy="0"/>
+        </a:xfrm>
+      </p:grpSpPr>
+      <p:pic>
+        <p:nvPicPr>
           <p:cNvPr id="10" name="Image 0"/>
           <p:cNvPicPr>
             <a:picLocks noChangeAspect="1"/>
@@ -6905,7 +8265,7 @@
 </p:sld>
 </file>
 
-<file path=ppt/slides/slide15.xml><?xml version="1.0" encoding="utf-8"?>
+<file path=ppt/slides/slide16.xml><?xml version="1.0" encoding="utf-8"?>
 <p:sld xmlns:a="http://schemas.openxmlformats.org/drawingml/2006/main" xmlns:r="http://schemas.openxmlformats.org/officeDocument/2006/relationships" xmlns:p="http://schemas.openxmlformats.org/presentationml/2006/main">
   <p:cSld>
     <p:spTree>
@@ -7300,7 +8660,7 @@
 </p:sld>
 </file>
 
-<file path=ppt/slides/slide16.xml><?xml version="1.0" encoding="utf-8"?>
+<file path=ppt/slides/slide17.xml><?xml version="1.0" encoding="utf-8"?>
 <p:sld xmlns:a="http://schemas.openxmlformats.org/drawingml/2006/main" xmlns:r="http://schemas.openxmlformats.org/officeDocument/2006/relationships" xmlns:p="http://schemas.openxmlformats.org/presentationml/2006/main">
   <p:cSld>
     <p:spTree>
